--- a/policy/proposal_009.pptx
+++ b/policy/proposal_009.pptx
@@ -2281,7 +2281,7 @@
     <p:bg>
       <p:bgPr>
         <a:solidFill>
-          <a:srgbClr val="0A0A0A"/>
+          <a:srgbClr val="F5F6F8"/>
         </a:solidFill>
       </p:bgPr>
     </p:bg>
@@ -2314,11 +2314,11 @@
             <a:avLst/>
           </a:prstGeom>
           <a:solidFill>
-            <a:srgbClr val="D62828"/>
+            <a:srgbClr val="C8161D"/>
           </a:solidFill>
           <a:ln w="12700">
             <a:solidFill>
-              <a:srgbClr val="D62828"/>
+              <a:srgbClr val="C8161D"/>
             </a:solidFill>
             <a:prstDash val="solid"/>
           </a:ln>
@@ -2351,11 +2351,11 @@
             <a:r>
               <a:rPr lang="en-US" sz="1000" b="1" spc="300" kern="0" dirty="0">
                 <a:solidFill>
-                  <a:srgbClr val="D62828"/>
+                  <a:srgbClr val="C8161D"/>
                 </a:solidFill>
                 <a:latin typeface="Arial" pitchFamily="34" charset="0"/>
-                <a:ea typeface="Arial" pitchFamily="34" charset="-122"/>
-                <a:cs typeface="Arial" pitchFamily="34" charset="-120"/>
+                <a:ea typeface="BIZ UDPGothic" pitchFamily="34" charset="-122"/>
+                <a:cs typeface="BIZ UDPGothic" pitchFamily="34" charset="-120"/>
               </a:rPr>
               <a:t>政策提言プラットフォーム ── 提言009</a:t>
             </a:r>
@@ -2390,11 +2390,11 @@
             <a:r>
               <a:rPr lang="en-US" sz="3000" b="1" dirty="0">
                 <a:solidFill>
-                  <a:srgbClr val="F5F5F0"/>
-                </a:solidFill>
-                <a:latin typeface="Cambria" pitchFamily="34" charset="0"/>
-                <a:ea typeface="Cambria" pitchFamily="34" charset="-122"/>
-                <a:cs typeface="Cambria" pitchFamily="34" charset="-120"/>
+                  <a:srgbClr val="16181D"/>
+                </a:solidFill>
+                <a:latin typeface="BIZ UDPGothic" pitchFamily="34" charset="0"/>
+                <a:ea typeface="BIZ UDPGothic" pitchFamily="34" charset="-122"/>
+                <a:cs typeface="BIZ UDPGothic" pitchFamily="34" charset="-120"/>
               </a:rPr>
               <a:t>高校教育の「全面公立化」と</a:t>
             </a:r>
@@ -2407,11 +2407,11 @@
             <a:r>
               <a:rPr lang="en-US" sz="3000" b="1" dirty="0">
                 <a:solidFill>
-                  <a:srgbClr val="F5F5F0"/>
-                </a:solidFill>
-                <a:latin typeface="Cambria" pitchFamily="34" charset="0"/>
-                <a:ea typeface="Cambria" pitchFamily="34" charset="-122"/>
-                <a:cs typeface="Cambria" pitchFamily="34" charset="-120"/>
+                  <a:srgbClr val="16181D"/>
+                </a:solidFill>
+                <a:latin typeface="BIZ UDPGothic" pitchFamily="34" charset="0"/>
+                <a:ea typeface="BIZ UDPGothic" pitchFamily="34" charset="-122"/>
+                <a:cs typeface="BIZ UDPGothic" pitchFamily="34" charset="-120"/>
               </a:rPr>
               <a:t>地方財政傾斜配分による</a:t>
             </a:r>
@@ -2424,11 +2424,11 @@
             <a:r>
               <a:rPr lang="en-US" sz="3000" b="1" dirty="0">
                 <a:solidFill>
-                  <a:srgbClr val="F5F5F0"/>
-                </a:solidFill>
-                <a:latin typeface="Cambria" pitchFamily="34" charset="0"/>
-                <a:ea typeface="Cambria" pitchFamily="34" charset="-122"/>
-                <a:cs typeface="Cambria" pitchFamily="34" charset="-120"/>
+                  <a:srgbClr val="16181D"/>
+                </a:solidFill>
+                <a:latin typeface="BIZ UDPGothic" pitchFamily="34" charset="0"/>
+                <a:ea typeface="BIZ UDPGothic" pitchFamily="34" charset="-122"/>
+                <a:cs typeface="BIZ UDPGothic" pitchFamily="34" charset="-120"/>
               </a:rPr>
               <a:t>地方創生戦略</a:t>
             </a:r>
@@ -2463,11 +2463,11 @@
             <a:r>
               <a:rPr lang="en-US" sz="1200" dirty="0">
                 <a:solidFill>
-                  <a:srgbClr val="888888"/>
+                  <a:srgbClr val="626875"/>
                 </a:solidFill>
                 <a:latin typeface="Arial" pitchFamily="34" charset="0"/>
-                <a:ea typeface="Arial" pitchFamily="34" charset="-122"/>
-                <a:cs typeface="Arial" pitchFamily="34" charset="-120"/>
+                <a:ea typeface="BIZ UDPGothic" pitchFamily="34" charset="-122"/>
+                <a:cs typeface="BIZ UDPGothic" pitchFamily="34" charset="-120"/>
               </a:rPr>
               <a:t>～年間6,800億円のバラマキを回収し、地方の未来を創るコモンズへ投資せよ～</a:t>
             </a:r>
@@ -2490,11 +2490,11 @@
             <a:avLst/>
           </a:prstGeom>
           <a:solidFill>
-            <a:srgbClr val="2E2E2E"/>
+            <a:srgbClr val="DDE0E6"/>
           </a:solidFill>
           <a:ln w="12700">
             <a:solidFill>
-              <a:srgbClr val="2E2E2E"/>
+              <a:srgbClr val="DDE0E6"/>
             </a:solidFill>
             <a:prstDash val="solid"/>
           </a:ln>
@@ -2527,11 +2527,11 @@
             <a:r>
               <a:rPr lang="en-US" sz="1100" dirty="0">
                 <a:solidFill>
-                  <a:srgbClr val="888888"/>
+                  <a:srgbClr val="626875"/>
                 </a:solidFill>
                 <a:latin typeface="Arial" pitchFamily="34" charset="0"/>
-                <a:ea typeface="Arial" pitchFamily="34" charset="-122"/>
-                <a:cs typeface="Arial" pitchFamily="34" charset="-120"/>
+                <a:ea typeface="BIZ UDPGothic" pitchFamily="34" charset="-122"/>
+                <a:cs typeface="BIZ UDPGothic" pitchFamily="34" charset="-120"/>
               </a:rPr>
               <a:t>REBOOT JAPAN ── 市民による政策提言プラットフォーム</a:t>
             </a:r>
@@ -2553,7 +2553,7 @@
     <p:bg>
       <p:bgPr>
         <a:solidFill>
-          <a:srgbClr val="0A0A0A"/>
+          <a:srgbClr val="F5F6F8"/>
         </a:solidFill>
       </p:bgPr>
     </p:bg>
@@ -2598,11 +2598,11 @@
             <a:r>
               <a:rPr lang="en-US" sz="900" b="1" spc="400" kern="0" dirty="0">
                 <a:solidFill>
-                  <a:srgbClr val="D62828"/>
+                  <a:srgbClr val="C8161D"/>
                 </a:solidFill>
                 <a:latin typeface="Arial" pitchFamily="34" charset="0"/>
-                <a:ea typeface="Arial" pitchFamily="34" charset="-122"/>
-                <a:cs typeface="Arial" pitchFamily="34" charset="-120"/>
+                <a:ea typeface="BIZ UDPGothic" pitchFamily="34" charset="-122"/>
+                <a:cs typeface="BIZ UDPGothic" pitchFamily="34" charset="-120"/>
               </a:rPr>
               <a:t>CORE 02 — DISTRIBUTION</a:t>
             </a:r>
@@ -2637,11 +2637,11 @@
             <a:r>
               <a:rPr lang="en-US" sz="2800" b="1" dirty="0">
                 <a:solidFill>
-                  <a:srgbClr val="F5F5F0"/>
-                </a:solidFill>
-                <a:latin typeface="Cambria" pitchFamily="34" charset="0"/>
-                <a:ea typeface="Cambria" pitchFamily="34" charset="-122"/>
-                <a:cs typeface="Cambria" pitchFamily="34" charset="-120"/>
+                  <a:srgbClr val="16181D"/>
+                </a:solidFill>
+                <a:latin typeface="BIZ UDPGothic" pitchFamily="34" charset="0"/>
+                <a:ea typeface="BIZ UDPGothic" pitchFamily="34" charset="-122"/>
+                <a:cs typeface="BIZ UDPGothic" pitchFamily="34" charset="-120"/>
               </a:rPr>
               <a:t>傾斜配分と施設整備：学校の特色に投資する</a:t>
             </a:r>
@@ -2664,11 +2664,11 @@
             <a:avLst/>
           </a:prstGeom>
           <a:solidFill>
-            <a:srgbClr val="2E2E2E"/>
+            <a:srgbClr val="DDE0E6"/>
           </a:solidFill>
           <a:ln w="12700">
             <a:solidFill>
-              <a:srgbClr val="2E2E2E"/>
+              <a:srgbClr val="DDE0E6"/>
             </a:solidFill>
             <a:prstDash val="solid"/>
           </a:ln>
@@ -2691,11 +2691,11 @@
             </a:avLst>
           </a:prstGeom>
           <a:solidFill>
-            <a:srgbClr val="1A1414"/>
+            <a:srgbClr val="FCEBEB"/>
           </a:solidFill>
           <a:ln w="12700">
             <a:solidFill>
-              <a:srgbClr val="2E2E2E"/>
+              <a:srgbClr val="DDE0E6"/>
             </a:solidFill>
             <a:prstDash val="solid"/>
           </a:ln>
@@ -2728,11 +2728,11 @@
             <a:r>
               <a:rPr lang="en-US" sz="1300" b="1" dirty="0">
                 <a:solidFill>
-                  <a:srgbClr val="D62828"/>
-                </a:solidFill>
-                <a:latin typeface="Cambria" pitchFamily="34" charset="0"/>
-                <a:ea typeface="Cambria" pitchFamily="34" charset="-122"/>
-                <a:cs typeface="Cambria" pitchFamily="34" charset="-120"/>
+                  <a:srgbClr val="C8161D"/>
+                </a:solidFill>
+                <a:latin typeface="BIZ UDPGothic" pitchFamily="34" charset="0"/>
+                <a:ea typeface="BIZ UDPGothic" pitchFamily="34" charset="-122"/>
+                <a:cs typeface="BIZ UDPGothic" pitchFamily="34" charset="-120"/>
               </a:rPr>
               <a:t>都市部の公立高校</a:t>
             </a:r>
@@ -2767,11 +2767,11 @@
             <a:r>
               <a:rPr lang="en-US" sz="1000" dirty="0">
                 <a:solidFill>
-                  <a:srgbClr val="888888"/>
+                  <a:srgbClr val="626875"/>
                 </a:solidFill>
                 <a:latin typeface="Arial" pitchFamily="34" charset="0"/>
-                <a:ea typeface="Arial" pitchFamily="34" charset="-122"/>
-                <a:cs typeface="Arial" pitchFamily="34" charset="-120"/>
+                <a:ea typeface="BIZ UDPGothic" pitchFamily="34" charset="-122"/>
+                <a:cs typeface="BIZ UDPGothic" pitchFamily="34" charset="-120"/>
               </a:rPr>
               <a:t>1校あたり年間</a:t>
             </a:r>
@@ -2806,11 +2806,11 @@
             <a:r>
               <a:rPr lang="en-US" sz="2200" b="1" dirty="0">
                 <a:solidFill>
-                  <a:srgbClr val="D62828"/>
-                </a:solidFill>
-                <a:latin typeface="Cambria" pitchFamily="34" charset="0"/>
-                <a:ea typeface="Cambria" pitchFamily="34" charset="-122"/>
-                <a:cs typeface="Cambria" pitchFamily="34" charset="-120"/>
+                  <a:srgbClr val="C8161D"/>
+                </a:solidFill>
+                <a:latin typeface="BIZ UDPGothic" pitchFamily="34" charset="0"/>
+                <a:ea typeface="BIZ UDPGothic" pitchFamily="34" charset="-122"/>
+                <a:cs typeface="BIZ UDPGothic" pitchFamily="34" charset="-120"/>
               </a:rPr>
               <a:t>1億〜1.5億円</a:t>
             </a:r>
@@ -2835,11 +2835,11 @@
             </a:avLst>
           </a:prstGeom>
           <a:solidFill>
-            <a:srgbClr val="081808"/>
+            <a:srgbClr val="E9EFF8"/>
           </a:solidFill>
           <a:ln w="12700">
             <a:solidFill>
-              <a:srgbClr val="2E2E2E"/>
+              <a:srgbClr val="DDE0E6"/>
             </a:solidFill>
             <a:prstDash val="solid"/>
           </a:ln>
@@ -2872,11 +2872,11 @@
             <a:r>
               <a:rPr lang="en-US" sz="1300" b="1" dirty="0">
                 <a:solidFill>
-                  <a:srgbClr val="4CAF50"/>
-                </a:solidFill>
-                <a:latin typeface="Cambria" pitchFamily="34" charset="0"/>
-                <a:ea typeface="Cambria" pitchFamily="34" charset="-122"/>
-                <a:cs typeface="Cambria" pitchFamily="34" charset="-120"/>
+                  <a:srgbClr val="1D4F91"/>
+                </a:solidFill>
+                <a:latin typeface="BIZ UDPGothic" pitchFamily="34" charset="0"/>
+                <a:ea typeface="BIZ UDPGothic" pitchFamily="34" charset="-122"/>
+                <a:cs typeface="BIZ UDPGothic" pitchFamily="34" charset="-120"/>
               </a:rPr>
               <a:t>過疎地の公立高校</a:t>
             </a:r>
@@ -2911,11 +2911,11 @@
             <a:r>
               <a:rPr lang="en-US" sz="1000" dirty="0">
                 <a:solidFill>
-                  <a:srgbClr val="888888"/>
+                  <a:srgbClr val="626875"/>
                 </a:solidFill>
                 <a:latin typeface="Arial" pitchFamily="34" charset="0"/>
-                <a:ea typeface="Arial" pitchFamily="34" charset="-122"/>
-                <a:cs typeface="Arial" pitchFamily="34" charset="-120"/>
+                <a:ea typeface="BIZ UDPGothic" pitchFamily="34" charset="-122"/>
+                <a:cs typeface="BIZ UDPGothic" pitchFamily="34" charset="-120"/>
               </a:rPr>
               <a:t>1校あたり年間</a:t>
             </a:r>
@@ -2950,11 +2950,11 @@
             <a:r>
               <a:rPr lang="en-US" sz="2200" b="1" dirty="0">
                 <a:solidFill>
-                  <a:srgbClr val="4CAF50"/>
-                </a:solidFill>
-                <a:latin typeface="Cambria" pitchFamily="34" charset="0"/>
-                <a:ea typeface="Cambria" pitchFamily="34" charset="-122"/>
-                <a:cs typeface="Cambria" pitchFamily="34" charset="-120"/>
+                  <a:srgbClr val="1D4F91"/>
+                </a:solidFill>
+                <a:latin typeface="BIZ UDPGothic" pitchFamily="34" charset="0"/>
+                <a:ea typeface="BIZ UDPGothic" pitchFamily="34" charset="-122"/>
+                <a:cs typeface="BIZ UDPGothic" pitchFamily="34" charset="-120"/>
               </a:rPr>
               <a:t>3億〜4億円</a:t>
             </a:r>
@@ -2989,11 +2989,11 @@
             <a:r>
               <a:rPr lang="en-US" sz="3200" dirty="0">
                 <a:solidFill>
-                  <a:srgbClr val="D62828"/>
+                  <a:srgbClr val="C8161D"/>
                 </a:solidFill>
                 <a:latin typeface="Arial" pitchFamily="34" charset="0"/>
-                <a:ea typeface="Arial" pitchFamily="34" charset="-122"/>
-                <a:cs typeface="Arial" pitchFamily="34" charset="-120"/>
+                <a:ea typeface="BIZ UDPGothic" pitchFamily="34" charset="-122"/>
+                <a:cs typeface="BIZ UDPGothic" pitchFamily="34" charset="-120"/>
               </a:rPr>
               <a:t>→</a:t>
             </a:r>
@@ -3028,11 +3028,11 @@
             <a:r>
               <a:rPr lang="en-US" sz="1300" b="1" dirty="0">
                 <a:solidFill>
-                  <a:srgbClr val="D62828"/>
-                </a:solidFill>
-                <a:latin typeface="Cambria" pitchFamily="34" charset="0"/>
-                <a:ea typeface="Cambria" pitchFamily="34" charset="-122"/>
-                <a:cs typeface="Cambria" pitchFamily="34" charset="-120"/>
+                  <a:srgbClr val="C8161D"/>
+                </a:solidFill>
+                <a:latin typeface="BIZ UDPGothic" pitchFamily="34" charset="0"/>
+                <a:ea typeface="BIZ UDPGothic" pitchFamily="34" charset="-122"/>
+                <a:cs typeface="BIZ UDPGothic" pitchFamily="34" charset="-120"/>
               </a:rPr>
               <a:t>施設整備（箱物）の考え方</a:t>
             </a:r>
@@ -3057,11 +3057,11 @@
             </a:avLst>
           </a:prstGeom>
           <a:solidFill>
-            <a:srgbClr val="081808"/>
+            <a:srgbClr val="E9EFF8"/>
           </a:solidFill>
           <a:ln w="12700">
             <a:solidFill>
-              <a:srgbClr val="2E2E2E"/>
+              <a:srgbClr val="DDE0E6"/>
             </a:solidFill>
             <a:prstDash val="solid"/>
           </a:ln>
@@ -3094,11 +3094,11 @@
             <a:r>
               <a:rPr lang="en-US" sz="1400" dirty="0">
                 <a:solidFill>
-                  <a:srgbClr val="4CAF50"/>
+                  <a:srgbClr val="1D4F91"/>
                 </a:solidFill>
                 <a:latin typeface="Arial" pitchFamily="34" charset="0"/>
-                <a:ea typeface="Arial" pitchFamily="34" charset="-122"/>
-                <a:cs typeface="Arial" pitchFamily="34" charset="-120"/>
+                <a:ea typeface="BIZ UDPGothic" pitchFamily="34" charset="-122"/>
+                <a:cs typeface="BIZ UDPGothic" pitchFamily="34" charset="-120"/>
               </a:rPr>
               <a:t>✅</a:t>
             </a:r>
@@ -3133,11 +3133,11 @@
             <a:r>
               <a:rPr lang="en-US" sz="1100" dirty="0">
                 <a:solidFill>
-                  <a:srgbClr val="CCCCCC"/>
+                  <a:srgbClr val="2B2F36"/>
                 </a:solidFill>
                 <a:latin typeface="Arial" pitchFamily="34" charset="0"/>
-                <a:ea typeface="Arial" pitchFamily="34" charset="-122"/>
-                <a:cs typeface="Arial" pitchFamily="34" charset="-120"/>
+                <a:ea typeface="BIZ UDPGothic" pitchFamily="34" charset="-122"/>
+                <a:cs typeface="BIZ UDPGothic" pitchFamily="34" charset="-120"/>
               </a:rPr>
               <a:t>スポーツ特化校がグラウンド・体育館を整備する → 学校の特色に連動した正当な教育投資として認める</a:t>
             </a:r>
@@ -3162,11 +3162,11 @@
             </a:avLst>
           </a:prstGeom>
           <a:solidFill>
-            <a:srgbClr val="081808"/>
+            <a:srgbClr val="E9EFF8"/>
           </a:solidFill>
           <a:ln w="12700">
             <a:solidFill>
-              <a:srgbClr val="2E2E2E"/>
+              <a:srgbClr val="DDE0E6"/>
             </a:solidFill>
             <a:prstDash val="solid"/>
           </a:ln>
@@ -3199,11 +3199,11 @@
             <a:r>
               <a:rPr lang="en-US" sz="1400" dirty="0">
                 <a:solidFill>
-                  <a:srgbClr val="4CAF50"/>
+                  <a:srgbClr val="1D4F91"/>
                 </a:solidFill>
                 <a:latin typeface="Arial" pitchFamily="34" charset="0"/>
-                <a:ea typeface="Arial" pitchFamily="34" charset="-122"/>
-                <a:cs typeface="Arial" pitchFamily="34" charset="-120"/>
+                <a:ea typeface="BIZ UDPGothic" pitchFamily="34" charset="-122"/>
+                <a:cs typeface="BIZ UDPGothic" pitchFamily="34" charset="-120"/>
               </a:rPr>
               <a:t>✅</a:t>
             </a:r>
@@ -3238,11 +3238,11 @@
             <a:r>
               <a:rPr lang="en-US" sz="1100" dirty="0">
                 <a:solidFill>
-                  <a:srgbClr val="CCCCCC"/>
+                  <a:srgbClr val="2B2F36"/>
                 </a:solidFill>
                 <a:latin typeface="Arial" pitchFamily="34" charset="0"/>
-                <a:ea typeface="Arial" pitchFamily="34" charset="-122"/>
-                <a:cs typeface="Arial" pitchFamily="34" charset="-120"/>
+                <a:ea typeface="BIZ UDPGothic" pitchFamily="34" charset="-122"/>
+                <a:cs typeface="BIZ UDPGothic" pitchFamily="34" charset="-120"/>
               </a:rPr>
               <a:t>きれいな校舎・充実した備品が「この学校に行きたい」という差別化につながる → 認める</a:t>
             </a:r>
@@ -3267,11 +3267,11 @@
             </a:avLst>
           </a:prstGeom>
           <a:solidFill>
-            <a:srgbClr val="081808"/>
+            <a:srgbClr val="E9EFF8"/>
           </a:solidFill>
           <a:ln w="12700">
             <a:solidFill>
-              <a:srgbClr val="2E2E2E"/>
+              <a:srgbClr val="DDE0E6"/>
             </a:solidFill>
             <a:prstDash val="solid"/>
           </a:ln>
@@ -3304,11 +3304,11 @@
             <a:r>
               <a:rPr lang="en-US" sz="1400" dirty="0">
                 <a:solidFill>
-                  <a:srgbClr val="4CAF50"/>
+                  <a:srgbClr val="1D4F91"/>
                 </a:solidFill>
                 <a:latin typeface="Arial" pitchFamily="34" charset="0"/>
-                <a:ea typeface="Arial" pitchFamily="34" charset="-122"/>
-                <a:cs typeface="Arial" pitchFamily="34" charset="-120"/>
+                <a:ea typeface="BIZ UDPGothic" pitchFamily="34" charset="-122"/>
+                <a:cs typeface="BIZ UDPGothic" pitchFamily="34" charset="-120"/>
               </a:rPr>
               <a:t>✅</a:t>
             </a:r>
@@ -3343,11 +3343,11 @@
             <a:r>
               <a:rPr lang="en-US" sz="1100" dirty="0">
                 <a:solidFill>
-                  <a:srgbClr val="CCCCCC"/>
+                  <a:srgbClr val="2B2F36"/>
                 </a:solidFill>
                 <a:latin typeface="Arial" pitchFamily="34" charset="0"/>
-                <a:ea typeface="Arial" pitchFamily="34" charset="-122"/>
-                <a:cs typeface="Arial" pitchFamily="34" charset="-120"/>
+                <a:ea typeface="BIZ UDPGothic" pitchFamily="34" charset="-122"/>
+                <a:cs typeface="BIZ UDPGothic" pitchFamily="34" charset="-120"/>
               </a:rPr>
               <a:t>地域産業連動の実習設備・最新デジタル機器 → 認める</a:t>
             </a:r>
@@ -3369,7 +3369,7 @@
     <p:bg>
       <p:bgPr>
         <a:solidFill>
-          <a:srgbClr val="0A0A0A"/>
+          <a:srgbClr val="F5F6F8"/>
         </a:solidFill>
       </p:bgPr>
     </p:bg>
@@ -3414,11 +3414,11 @@
             <a:r>
               <a:rPr lang="en-US" sz="900" b="1" spc="400" kern="0" dirty="0">
                 <a:solidFill>
-                  <a:srgbClr val="D62828"/>
+                  <a:srgbClr val="C8161D"/>
                 </a:solidFill>
                 <a:latin typeface="Arial" pitchFamily="34" charset="0"/>
-                <a:ea typeface="Arial" pitchFamily="34" charset="-122"/>
-                <a:cs typeface="Arial" pitchFamily="34" charset="-120"/>
+                <a:ea typeface="BIZ UDPGothic" pitchFamily="34" charset="-122"/>
+                <a:cs typeface="BIZ UDPGothic" pitchFamily="34" charset="-120"/>
               </a:rPr>
               <a:t>CORE 02 — GOVERNANCE</a:t>
             </a:r>
@@ -3453,11 +3453,11 @@
             <a:r>
               <a:rPr lang="en-US" sz="2800" b="1" dirty="0">
                 <a:solidFill>
-                  <a:srgbClr val="F5F5F0"/>
-                </a:solidFill>
-                <a:latin typeface="Cambria" pitchFamily="34" charset="0"/>
-                <a:ea typeface="Cambria" pitchFamily="34" charset="-122"/>
-                <a:cs typeface="Cambria" pitchFamily="34" charset="-120"/>
+                  <a:srgbClr val="16181D"/>
+                </a:solidFill>
+                <a:latin typeface="BIZ UDPGothic" pitchFamily="34" charset="0"/>
+                <a:ea typeface="BIZ UDPGothic" pitchFamily="34" charset="-122"/>
+                <a:cs typeface="BIZ UDPGothic" pitchFamily="34" charset="-120"/>
               </a:rPr>
               <a:t>意味のない重複投資は2段階で自動排除する</a:t>
             </a:r>
@@ -3480,11 +3480,11 @@
             <a:avLst/>
           </a:prstGeom>
           <a:solidFill>
-            <a:srgbClr val="2E2E2E"/>
+            <a:srgbClr val="DDE0E6"/>
           </a:solidFill>
           <a:ln w="12700">
             <a:solidFill>
-              <a:srgbClr val="2E2E2E"/>
+              <a:srgbClr val="DDE0E6"/>
             </a:solidFill>
             <a:prstDash val="solid"/>
           </a:ln>
@@ -3517,11 +3517,11 @@
             <a:r>
               <a:rPr lang="en-US" sz="1100" dirty="0">
                 <a:solidFill>
-                  <a:srgbClr val="CCCCCC"/>
+                  <a:srgbClr val="2B2F36"/>
                 </a:solidFill>
                 <a:latin typeface="Arial" pitchFamily="34" charset="0"/>
-                <a:ea typeface="Arial" pitchFamily="34" charset="-122"/>
-                <a:cs typeface="Arial" pitchFamily="34" charset="-120"/>
+                <a:ea typeface="BIZ UDPGothic" pitchFamily="34" charset="-122"/>
+                <a:cs typeface="BIZ UDPGothic" pitchFamily="34" charset="-120"/>
               </a:rPr>
               <a:t>箱物投資を一律禁止はしない。ただし地域の既存インフラと重複する無意味な投資は許さない。</a:t>
             </a:r>
@@ -3546,11 +3546,11 @@
             </a:avLst>
           </a:prstGeom>
           <a:solidFill>
-            <a:srgbClr val="1A1A1A"/>
+            <a:srgbClr val="FFFFFF"/>
           </a:solidFill>
           <a:ln w="12700">
             <a:solidFill>
-              <a:srgbClr val="2E2E2E"/>
+              <a:srgbClr val="DDE0E6"/>
             </a:solidFill>
             <a:prstDash val="solid"/>
           </a:ln>
@@ -3573,11 +3573,11 @@
             </a:avLst>
           </a:prstGeom>
           <a:solidFill>
-            <a:srgbClr val="D62828"/>
+            <a:srgbClr val="C8161D"/>
           </a:solidFill>
           <a:ln w="12700">
             <a:solidFill>
-              <a:srgbClr val="D62828"/>
+              <a:srgbClr val="C8161D"/>
             </a:solidFill>
             <a:prstDash val="solid"/>
           </a:ln>
@@ -3610,11 +3610,11 @@
             <a:r>
               <a:rPr lang="en-US" sz="1200" b="1" dirty="0">
                 <a:solidFill>
-                  <a:srgbClr val="F5F5F0"/>
+                  <a:srgbClr val="FFFFFF"/>
                 </a:solidFill>
                 <a:latin typeface="Arial" pitchFamily="34" charset="0"/>
-                <a:ea typeface="Arial" pitchFamily="34" charset="-122"/>
-                <a:cs typeface="Arial" pitchFamily="34" charset="-120"/>
+                <a:ea typeface="BIZ UDPGothic" pitchFamily="34" charset="-122"/>
+                <a:cs typeface="BIZ UDPGothic" pitchFamily="34" charset="-120"/>
               </a:rPr>
               <a:t>STEP 1</a:t>
             </a:r>
@@ -3649,11 +3649,11 @@
             <a:r>
               <a:rPr lang="en-US" sz="1400" b="1" dirty="0">
                 <a:solidFill>
-                  <a:srgbClr val="F5F5F0"/>
-                </a:solidFill>
-                <a:latin typeface="Cambria" pitchFamily="34" charset="0"/>
-                <a:ea typeface="Cambria" pitchFamily="34" charset="-122"/>
-                <a:cs typeface="Cambria" pitchFamily="34" charset="-120"/>
+                  <a:srgbClr val="16181D"/>
+                </a:solidFill>
+                <a:latin typeface="BIZ UDPGothic" pitchFamily="34" charset="0"/>
+                <a:ea typeface="BIZ UDPGothic" pitchFamily="34" charset="-122"/>
+                <a:cs typeface="BIZ UDPGothic" pitchFamily="34" charset="-120"/>
               </a:rPr>
               <a:t>システムによる自動照合</a:t>
             </a:r>
@@ -3676,11 +3676,11 @@
             <a:avLst/>
           </a:prstGeom>
           <a:solidFill>
-            <a:srgbClr val="2E2E2E"/>
+            <a:srgbClr val="DDE0E6"/>
           </a:solidFill>
           <a:ln w="12700">
             <a:solidFill>
-              <a:srgbClr val="2E2E2E"/>
+              <a:srgbClr val="DDE0E6"/>
             </a:solidFill>
             <a:prstDash val="solid"/>
           </a:ln>
@@ -3713,11 +3713,11 @@
             <a:r>
               <a:rPr lang="en-US" sz="1100" dirty="0">
                 <a:solidFill>
-                  <a:srgbClr val="CCCCCC"/>
+                  <a:srgbClr val="2B2F36"/>
                 </a:solidFill>
                 <a:latin typeface="Arial" pitchFamily="34" charset="0"/>
-                <a:ea typeface="Arial" pitchFamily="34" charset="-122"/>
-                <a:cs typeface="Arial" pitchFamily="34" charset="-120"/>
+                <a:ea typeface="BIZ UDPGothic" pitchFamily="34" charset="-122"/>
+                <a:cs typeface="BIZ UDPGothic" pitchFamily="34" charset="-120"/>
               </a:rPr>
               <a:t>地域の既存施設データベースと照合し、重複投資を自動的に弾く。人の判断を介さないため恣意的な運用が不可能。</a:t>
             </a:r>
@@ -3752,11 +3752,11 @@
             <a:r>
               <a:rPr lang="en-US" sz="1600" dirty="0">
                 <a:solidFill>
-                  <a:srgbClr val="D62828"/>
+                  <a:srgbClr val="C8161D"/>
                 </a:solidFill>
                 <a:latin typeface="Arial" pitchFamily="34" charset="0"/>
-                <a:ea typeface="Arial" pitchFamily="34" charset="-122"/>
-                <a:cs typeface="Arial" pitchFamily="34" charset="-120"/>
+                <a:ea typeface="BIZ UDPGothic" pitchFamily="34" charset="-122"/>
+                <a:cs typeface="BIZ UDPGothic" pitchFamily="34" charset="-120"/>
               </a:rPr>
               <a:t>↓</a:t>
             </a:r>
@@ -3781,11 +3781,11 @@
             </a:avLst>
           </a:prstGeom>
           <a:solidFill>
-            <a:srgbClr val="1A1A1A"/>
+            <a:srgbClr val="FFFFFF"/>
           </a:solidFill>
           <a:ln w="12700">
             <a:solidFill>
-              <a:srgbClr val="2E2E2E"/>
+              <a:srgbClr val="DDE0E6"/>
             </a:solidFill>
             <a:prstDash val="solid"/>
           </a:ln>
@@ -3808,11 +3808,11 @@
             </a:avLst>
           </a:prstGeom>
           <a:solidFill>
-            <a:srgbClr val="D62828"/>
+            <a:srgbClr val="C8161D"/>
           </a:solidFill>
           <a:ln w="12700">
             <a:solidFill>
-              <a:srgbClr val="D62828"/>
+              <a:srgbClr val="C8161D"/>
             </a:solidFill>
             <a:prstDash val="solid"/>
           </a:ln>
@@ -3845,11 +3845,11 @@
             <a:r>
               <a:rPr lang="en-US" sz="1200" b="1" dirty="0">
                 <a:solidFill>
-                  <a:srgbClr val="F5F5F0"/>
+                  <a:srgbClr val="FFFFFF"/>
                 </a:solidFill>
                 <a:latin typeface="Arial" pitchFamily="34" charset="0"/>
-                <a:ea typeface="Arial" pitchFamily="34" charset="-122"/>
-                <a:cs typeface="Arial" pitchFamily="34" charset="-120"/>
+                <a:ea typeface="BIZ UDPGothic" pitchFamily="34" charset="-122"/>
+                <a:cs typeface="BIZ UDPGothic" pitchFamily="34" charset="-120"/>
               </a:rPr>
               <a:t>STEP 2</a:t>
             </a:r>
@@ -3884,11 +3884,11 @@
             <a:r>
               <a:rPr lang="en-US" sz="1400" b="1" dirty="0">
                 <a:solidFill>
-                  <a:srgbClr val="F5F5F0"/>
-                </a:solidFill>
-                <a:latin typeface="Cambria" pitchFamily="34" charset="0"/>
-                <a:ea typeface="Cambria" pitchFamily="34" charset="-122"/>
-                <a:cs typeface="Cambria" pitchFamily="34" charset="-120"/>
+                  <a:srgbClr val="16181D"/>
+                </a:solidFill>
+                <a:latin typeface="BIZ UDPGothic" pitchFamily="34" charset="0"/>
+                <a:ea typeface="BIZ UDPGothic" pitchFamily="34" charset="-122"/>
+                <a:cs typeface="BIZ UDPGothic" pitchFamily="34" charset="-120"/>
               </a:rPr>
               <a:t>住民投票による最終承認</a:t>
             </a:r>
@@ -3911,11 +3911,11 @@
             <a:avLst/>
           </a:prstGeom>
           <a:solidFill>
-            <a:srgbClr val="2E2E2E"/>
+            <a:srgbClr val="DDE0E6"/>
           </a:solidFill>
           <a:ln w="12700">
             <a:solidFill>
-              <a:srgbClr val="2E2E2E"/>
+              <a:srgbClr val="DDE0E6"/>
             </a:solidFill>
             <a:prstDash val="solid"/>
           </a:ln>
@@ -3948,11 +3948,11 @@
             <a:r>
               <a:rPr lang="en-US" sz="1100" dirty="0">
                 <a:solidFill>
-                  <a:srgbClr val="CCCCCC"/>
+                  <a:srgbClr val="2B2F36"/>
                 </a:solidFill>
                 <a:latin typeface="Arial" pitchFamily="34" charset="0"/>
-                <a:ea typeface="Arial" pitchFamily="34" charset="-122"/>
-                <a:cs typeface="Arial" pitchFamily="34" charset="-120"/>
+                <a:ea typeface="BIZ UDPGothic" pitchFamily="34" charset="-122"/>
+                <a:cs typeface="BIZ UDPGothic" pitchFamily="34" charset="-120"/>
               </a:rPr>
               <a:t>自動照合を通過した投資案件を住民投票にかける。20%予算の住民投票と同じ仕組みで承認・否決を行う。</a:t>
             </a:r>
@@ -3977,11 +3977,11 @@
             </a:avLst>
           </a:prstGeom>
           <a:solidFill>
-            <a:srgbClr val="1A0808"/>
+            <a:srgbClr val="FCEBEB"/>
           </a:solidFill>
           <a:ln w="12700">
             <a:solidFill>
-              <a:srgbClr val="2E2E2E"/>
+              <a:srgbClr val="DDE0E6"/>
             </a:solidFill>
             <a:prstDash val="solid"/>
           </a:ln>
@@ -4014,11 +4014,11 @@
             <a:r>
               <a:rPr lang="en-US" sz="1100" b="1" dirty="0">
                 <a:solidFill>
-                  <a:srgbClr val="D62828"/>
-                </a:solidFill>
-                <a:latin typeface="Cambria" pitchFamily="34" charset="0"/>
-                <a:ea typeface="Cambria" pitchFamily="34" charset="-122"/>
-                <a:cs typeface="Cambria" pitchFamily="34" charset="-120"/>
+                  <a:srgbClr val="C8161D"/>
+                </a:solidFill>
+                <a:latin typeface="BIZ UDPGothic" pitchFamily="34" charset="0"/>
+                <a:ea typeface="BIZ UDPGothic" pitchFamily="34" charset="-122"/>
+                <a:cs typeface="BIZ UDPGothic" pitchFamily="34" charset="-120"/>
               </a:rPr>
               <a:t>禁止の例：</a:t>
             </a:r>
@@ -4053,11 +4053,11 @@
             <a:r>
               <a:rPr lang="en-US" sz="1100" dirty="0">
                 <a:solidFill>
-                  <a:srgbClr val="CCCCCC"/>
+                  <a:srgbClr val="2B2F36"/>
                 </a:solidFill>
                 <a:latin typeface="Arial" pitchFamily="34" charset="0"/>
-                <a:ea typeface="Arial" pitchFamily="34" charset="-122"/>
-                <a:cs typeface="Arial" pitchFamily="34" charset="-120"/>
+                <a:ea typeface="BIZ UDPGothic" pitchFamily="34" charset="-122"/>
+                <a:cs typeface="BIZ UDPGothic" pitchFamily="34" charset="-120"/>
               </a:rPr>
               <a:t>近隣に大型陸上競技場があり平時に高校が利用可能な地域への新設陸上トラック → 自動照合で弾く</a:t>
             </a:r>
@@ -4079,7 +4079,7 @@
     <p:bg>
       <p:bgPr>
         <a:solidFill>
-          <a:srgbClr val="0A0A0A"/>
+          <a:srgbClr val="F5F6F8"/>
         </a:solidFill>
       </p:bgPr>
     </p:bg>
@@ -4124,11 +4124,11 @@
             <a:r>
               <a:rPr lang="en-US" sz="900" b="1" spc="400" kern="0" dirty="0">
                 <a:solidFill>
-                  <a:srgbClr val="D62828"/>
+                  <a:srgbClr val="C8161D"/>
                 </a:solidFill>
                 <a:latin typeface="Arial" pitchFamily="34" charset="0"/>
-                <a:ea typeface="Arial" pitchFamily="34" charset="-122"/>
-                <a:cs typeface="Arial" pitchFamily="34" charset="-120"/>
+                <a:ea typeface="BIZ UDPGothic" pitchFamily="34" charset="-122"/>
+                <a:cs typeface="BIZ UDPGothic" pitchFamily="34" charset="-120"/>
               </a:rPr>
               <a:t>CORE 02 — VOTING</a:t>
             </a:r>
@@ -4161,17 +4161,17 @@
               <a:buNone/>
             </a:pPr>
             <a:r>
-              <a:rPr lang="en-US" sz="2800" b="1" dirty="0">
-                <a:solidFill>
-                  <a:srgbClr val="F5F5F0"/>
-                </a:solidFill>
-                <a:latin typeface="Cambria" pitchFamily="34" charset="0"/>
-                <a:ea typeface="Cambria" pitchFamily="34" charset="-122"/>
-                <a:cs typeface="Cambria" pitchFamily="34" charset="-120"/>
+              <a:rPr lang="en-US" sz="2200" b="1" dirty="0">
+                <a:solidFill>
+                  <a:srgbClr val="16181D"/>
+                </a:solidFill>
+                <a:latin typeface="BIZ UDPGothic" pitchFamily="34" charset="0"/>
+                <a:ea typeface="BIZ UDPGothic" pitchFamily="34" charset="-122"/>
+                <a:cs typeface="BIZ UDPGothic" pitchFamily="34" charset="-120"/>
               </a:rPr>
               <a:t>住民投票で使途を確定：年齢別加重投票を先行実験する</a:t>
             </a:r>
-            <a:endParaRPr lang="en-US" sz="2800" dirty="0"/>
+            <a:endParaRPr lang="en-US" sz="2200" dirty="0"/>
           </a:p>
         </p:txBody>
       </p:sp>
@@ -4190,11 +4190,11 @@
             <a:avLst/>
           </a:prstGeom>
           <a:solidFill>
-            <a:srgbClr val="2E2E2E"/>
+            <a:srgbClr val="DDE0E6"/>
           </a:solidFill>
           <a:ln w="12700">
             <a:solidFill>
-              <a:srgbClr val="2E2E2E"/>
+              <a:srgbClr val="DDE0E6"/>
             </a:solidFill>
             <a:prstDash val="solid"/>
           </a:ln>
@@ -4227,11 +4227,11 @@
             <a:r>
               <a:rPr lang="en-US" sz="1100" dirty="0">
                 <a:solidFill>
-                  <a:srgbClr val="CCCCCC"/>
+                  <a:srgbClr val="2B2F36"/>
                 </a:solidFill>
                 <a:latin typeface="Arial" pitchFamily="34" charset="0"/>
-                <a:ea typeface="Arial" pitchFamily="34" charset="-122"/>
-                <a:cs typeface="Arial" pitchFamily="34" charset="-120"/>
+                <a:ea typeface="BIZ UDPGothic" pitchFamily="34" charset="-122"/>
+                <a:cs typeface="BIZ UDPGothic" pitchFamily="34" charset="-120"/>
               </a:rPr>
               <a:t>20%のインフラ・企業誘致予算の使途は四半期ごとの住民投票で確定する。通常の選挙では実現できない設計を先行実験する場でもある。</a:t>
             </a:r>
@@ -4256,11 +4256,11 @@
             </a:avLst>
           </a:prstGeom>
           <a:solidFill>
-            <a:srgbClr val="141420"/>
+            <a:srgbClr val="E9EFF8"/>
           </a:solidFill>
           <a:ln w="12700">
             <a:solidFill>
-              <a:srgbClr val="2E2E2E"/>
+              <a:srgbClr val="DDE0E6"/>
             </a:solidFill>
             <a:prstDash val="solid"/>
           </a:ln>
@@ -4293,11 +4293,11 @@
             <a:r>
               <a:rPr lang="en-US" sz="1200" b="1" dirty="0">
                 <a:solidFill>
-                  <a:srgbClr val="4090D0"/>
-                </a:solidFill>
-                <a:latin typeface="Cambria" pitchFamily="34" charset="0"/>
-                <a:ea typeface="Cambria" pitchFamily="34" charset="-122"/>
-                <a:cs typeface="Cambria" pitchFamily="34" charset="-120"/>
+                  <a:srgbClr val="1D4F91"/>
+                </a:solidFill>
+                <a:latin typeface="BIZ UDPGothic" pitchFamily="34" charset="0"/>
+                <a:ea typeface="BIZ UDPGothic" pitchFamily="34" charset="-122"/>
+                <a:cs typeface="BIZ UDPGothic" pitchFamily="34" charset="-120"/>
               </a:rPr>
               <a:t>中学生・高校生</a:t>
             </a:r>
@@ -4332,11 +4332,11 @@
             <a:r>
               <a:rPr lang="en-US" sz="1400" b="1" dirty="0">
                 <a:solidFill>
-                  <a:srgbClr val="D62828"/>
-                </a:solidFill>
-                <a:latin typeface="Cambria" pitchFamily="34" charset="0"/>
-                <a:ea typeface="Cambria" pitchFamily="34" charset="-122"/>
-                <a:cs typeface="Cambria" pitchFamily="34" charset="-120"/>
+                  <a:srgbClr val="C8161D"/>
+                </a:solidFill>
+                <a:latin typeface="BIZ UDPGothic" pitchFamily="34" charset="0"/>
+                <a:ea typeface="BIZ UDPGothic" pitchFamily="34" charset="-122"/>
+                <a:cs typeface="BIZ UDPGothic" pitchFamily="34" charset="-120"/>
               </a:rPr>
               <a:t>3票</a:t>
             </a:r>
@@ -4371,11 +4371,11 @@
             <a:r>
               <a:rPr lang="en-US" sz="1100" dirty="0">
                 <a:solidFill>
-                  <a:srgbClr val="CCCCCC"/>
+                  <a:srgbClr val="2B2F36"/>
                 </a:solidFill>
                 <a:latin typeface="Arial" pitchFamily="34" charset="0"/>
-                <a:ea typeface="Arial" pitchFamily="34" charset="-122"/>
-                <a:cs typeface="Arial" pitchFamily="34" charset="-120"/>
+                <a:ea typeface="BIZ UDPGothic" pitchFamily="34" charset="-122"/>
+                <a:cs typeface="BIZ UDPGothic" pitchFamily="34" charset="-120"/>
               </a:rPr>
               <a:t>教育予算の最大の当事者</a:t>
             </a:r>
@@ -4400,11 +4400,11 @@
             </a:avLst>
           </a:prstGeom>
           <a:solidFill>
-            <a:srgbClr val="141420"/>
+            <a:srgbClr val="E9EFF8"/>
           </a:solidFill>
           <a:ln w="12700">
             <a:solidFill>
-              <a:srgbClr val="2E2E2E"/>
+              <a:srgbClr val="DDE0E6"/>
             </a:solidFill>
             <a:prstDash val="solid"/>
           </a:ln>
@@ -4437,11 +4437,11 @@
             <a:r>
               <a:rPr lang="en-US" sz="1200" b="1" dirty="0">
                 <a:solidFill>
-                  <a:srgbClr val="4090D0"/>
-                </a:solidFill>
-                <a:latin typeface="Cambria" pitchFamily="34" charset="0"/>
-                <a:ea typeface="Cambria" pitchFamily="34" charset="-122"/>
-                <a:cs typeface="Cambria" pitchFamily="34" charset="-120"/>
+                  <a:srgbClr val="1D4F91"/>
+                </a:solidFill>
+                <a:latin typeface="BIZ UDPGothic" pitchFamily="34" charset="0"/>
+                <a:ea typeface="BIZ UDPGothic" pitchFamily="34" charset="-122"/>
+                <a:cs typeface="BIZ UDPGothic" pitchFamily="34" charset="-120"/>
               </a:rPr>
               <a:t>10〜20代</a:t>
             </a:r>
@@ -4476,11 +4476,11 @@
             <a:r>
               <a:rPr lang="en-US" sz="1400" b="1" dirty="0">
                 <a:solidFill>
-                  <a:srgbClr val="D62828"/>
-                </a:solidFill>
-                <a:latin typeface="Cambria" pitchFamily="34" charset="0"/>
-                <a:ea typeface="Cambria" pitchFamily="34" charset="-122"/>
-                <a:cs typeface="Cambria" pitchFamily="34" charset="-120"/>
+                  <a:srgbClr val="C8161D"/>
+                </a:solidFill>
+                <a:latin typeface="BIZ UDPGothic" pitchFamily="34" charset="0"/>
+                <a:ea typeface="BIZ UDPGothic" pitchFamily="34" charset="-122"/>
+                <a:cs typeface="BIZ UDPGothic" pitchFamily="34" charset="-120"/>
               </a:rPr>
               <a:t>3票</a:t>
             </a:r>
@@ -4515,11 +4515,11 @@
             <a:r>
               <a:rPr lang="en-US" sz="1100" dirty="0">
                 <a:solidFill>
-                  <a:srgbClr val="CCCCCC"/>
+                  <a:srgbClr val="2B2F36"/>
                 </a:solidFill>
                 <a:latin typeface="Arial" pitchFamily="34" charset="0"/>
-                <a:ea typeface="Arial" pitchFamily="34" charset="-122"/>
-                <a:cs typeface="Arial" pitchFamily="34" charset="-120"/>
+                <a:ea typeface="BIZ UDPGothic" pitchFamily="34" charset="-122"/>
+                <a:cs typeface="BIZ UDPGothic" pitchFamily="34" charset="-120"/>
               </a:rPr>
               <a:t>恩恵を最も長く受ける世代</a:t>
             </a:r>
@@ -4544,11 +4544,11 @@
             </a:avLst>
           </a:prstGeom>
           <a:solidFill>
-            <a:srgbClr val="141414"/>
+            <a:srgbClr val="FFFFFF"/>
           </a:solidFill>
           <a:ln w="12700">
             <a:solidFill>
-              <a:srgbClr val="2E2E2E"/>
+              <a:srgbClr val="DDE0E6"/>
             </a:solidFill>
             <a:prstDash val="solid"/>
           </a:ln>
@@ -4581,11 +4581,11 @@
             <a:r>
               <a:rPr lang="en-US" sz="1200" b="1" dirty="0">
                 <a:solidFill>
-                  <a:srgbClr val="F5F5F0"/>
-                </a:solidFill>
-                <a:latin typeface="Cambria" pitchFamily="34" charset="0"/>
-                <a:ea typeface="Cambria" pitchFamily="34" charset="-122"/>
-                <a:cs typeface="Cambria" pitchFamily="34" charset="-120"/>
+                  <a:srgbClr val="16181D"/>
+                </a:solidFill>
+                <a:latin typeface="BIZ UDPGothic" pitchFamily="34" charset="0"/>
+                <a:ea typeface="BIZ UDPGothic" pitchFamily="34" charset="-122"/>
+                <a:cs typeface="BIZ UDPGothic" pitchFamily="34" charset="-120"/>
               </a:rPr>
               <a:t>30〜40代</a:t>
             </a:r>
@@ -4620,11 +4620,11 @@
             <a:r>
               <a:rPr lang="en-US" sz="1400" b="1" dirty="0">
                 <a:solidFill>
-                  <a:srgbClr val="D62828"/>
-                </a:solidFill>
-                <a:latin typeface="Cambria" pitchFamily="34" charset="0"/>
-                <a:ea typeface="Cambria" pitchFamily="34" charset="-122"/>
-                <a:cs typeface="Cambria" pitchFamily="34" charset="-120"/>
+                  <a:srgbClr val="C8161D"/>
+                </a:solidFill>
+                <a:latin typeface="BIZ UDPGothic" pitchFamily="34" charset="0"/>
+                <a:ea typeface="BIZ UDPGothic" pitchFamily="34" charset="-122"/>
+                <a:cs typeface="BIZ UDPGothic" pitchFamily="34" charset="-120"/>
               </a:rPr>
               <a:t>2票</a:t>
             </a:r>
@@ -4659,11 +4659,11 @@
             <a:r>
               <a:rPr lang="en-US" sz="1100" dirty="0">
                 <a:solidFill>
-                  <a:srgbClr val="CCCCCC"/>
+                  <a:srgbClr val="2B2F36"/>
                 </a:solidFill>
                 <a:latin typeface="Arial" pitchFamily="34" charset="0"/>
-                <a:ea typeface="Arial" pitchFamily="34" charset="-122"/>
-                <a:cs typeface="Arial" pitchFamily="34" charset="-120"/>
+                <a:ea typeface="BIZ UDPGothic" pitchFamily="34" charset="-122"/>
+                <a:cs typeface="BIZ UDPGothic" pitchFamily="34" charset="-120"/>
               </a:rPr>
               <a:t>子育て世代・地域の担い手</a:t>
             </a:r>
@@ -4688,11 +4688,11 @@
             </a:avLst>
           </a:prstGeom>
           <a:solidFill>
-            <a:srgbClr val="141414"/>
+            <a:srgbClr val="FFFFFF"/>
           </a:solidFill>
           <a:ln w="12700">
             <a:solidFill>
-              <a:srgbClr val="2E2E2E"/>
+              <a:srgbClr val="DDE0E6"/>
             </a:solidFill>
             <a:prstDash val="solid"/>
           </a:ln>
@@ -4725,11 +4725,11 @@
             <a:r>
               <a:rPr lang="en-US" sz="1200" b="1" dirty="0">
                 <a:solidFill>
-                  <a:srgbClr val="888888"/>
-                </a:solidFill>
-                <a:latin typeface="Cambria" pitchFamily="34" charset="0"/>
-                <a:ea typeface="Cambria" pitchFamily="34" charset="-122"/>
-                <a:cs typeface="Cambria" pitchFamily="34" charset="-120"/>
+                  <a:srgbClr val="626875"/>
+                </a:solidFill>
+                <a:latin typeface="BIZ UDPGothic" pitchFamily="34" charset="0"/>
+                <a:ea typeface="BIZ UDPGothic" pitchFamily="34" charset="-122"/>
+                <a:cs typeface="BIZ UDPGothic" pitchFamily="34" charset="-120"/>
               </a:rPr>
               <a:t>50代以上</a:t>
             </a:r>
@@ -4764,11 +4764,11 @@
             <a:r>
               <a:rPr lang="en-US" sz="1400" b="1" dirty="0">
                 <a:solidFill>
-                  <a:srgbClr val="D62828"/>
-                </a:solidFill>
-                <a:latin typeface="Cambria" pitchFamily="34" charset="0"/>
-                <a:ea typeface="Cambria" pitchFamily="34" charset="-122"/>
-                <a:cs typeface="Cambria" pitchFamily="34" charset="-120"/>
+                  <a:srgbClr val="C8161D"/>
+                </a:solidFill>
+                <a:latin typeface="BIZ UDPGothic" pitchFamily="34" charset="0"/>
+                <a:ea typeface="BIZ UDPGothic" pitchFamily="34" charset="-122"/>
+                <a:cs typeface="BIZ UDPGothic" pitchFamily="34" charset="-120"/>
               </a:rPr>
               <a:t>1票</a:t>
             </a:r>
@@ -4803,11 +4803,11 @@
             <a:r>
               <a:rPr lang="en-US" sz="1100" dirty="0">
                 <a:solidFill>
-                  <a:srgbClr val="CCCCCC"/>
+                  <a:srgbClr val="2B2F36"/>
                 </a:solidFill>
                 <a:latin typeface="Arial" pitchFamily="34" charset="0"/>
-                <a:ea typeface="Arial" pitchFamily="34" charset="-122"/>
-                <a:cs typeface="Arial" pitchFamily="34" charset="-120"/>
+                <a:ea typeface="BIZ UDPGothic" pitchFamily="34" charset="-122"/>
+                <a:cs typeface="BIZ UDPGothic" pitchFamily="34" charset="-120"/>
               </a:rPr>
               <a:t>地域の経験値を反映</a:t>
             </a:r>
@@ -4832,11 +4832,11 @@
             </a:avLst>
           </a:prstGeom>
           <a:solidFill>
-            <a:srgbClr val="141A14"/>
+            <a:srgbClr val="E9EFF8"/>
           </a:solidFill>
           <a:ln w="12700">
             <a:solidFill>
-              <a:srgbClr val="2E2E2E"/>
+              <a:srgbClr val="DDE0E6"/>
             </a:solidFill>
             <a:prstDash val="solid"/>
           </a:ln>
@@ -4869,11 +4869,11 @@
             <a:r>
               <a:rPr lang="en-US" sz="1200" b="1" dirty="0">
                 <a:solidFill>
-                  <a:srgbClr val="4CAF50"/>
-                </a:solidFill>
-                <a:latin typeface="Cambria" pitchFamily="34" charset="0"/>
-                <a:ea typeface="Cambria" pitchFamily="34" charset="-122"/>
-                <a:cs typeface="Cambria" pitchFamily="34" charset="-120"/>
+                  <a:srgbClr val="1D4F91"/>
+                </a:solidFill>
+                <a:latin typeface="BIZ UDPGothic" pitchFamily="34" charset="0"/>
+                <a:ea typeface="BIZ UDPGothic" pitchFamily="34" charset="-122"/>
+                <a:cs typeface="BIZ UDPGothic" pitchFamily="34" charset="-120"/>
               </a:rPr>
               <a:t>移住世帯（年齢問わず）</a:t>
             </a:r>
@@ -4908,11 +4908,11 @@
             <a:r>
               <a:rPr lang="en-US" sz="1400" b="1" dirty="0">
                 <a:solidFill>
-                  <a:srgbClr val="D62828"/>
-                </a:solidFill>
-                <a:latin typeface="Cambria" pitchFamily="34" charset="0"/>
-                <a:ea typeface="Cambria" pitchFamily="34" charset="-122"/>
-                <a:cs typeface="Cambria" pitchFamily="34" charset="-120"/>
+                  <a:srgbClr val="C8161D"/>
+                </a:solidFill>
+                <a:latin typeface="BIZ UDPGothic" pitchFamily="34" charset="0"/>
+                <a:ea typeface="BIZ UDPGothic" pitchFamily="34" charset="-122"/>
+                <a:cs typeface="BIZ UDPGothic" pitchFamily="34" charset="-120"/>
               </a:rPr>
               <a:t>＋1票</a:t>
             </a:r>
@@ -4947,11 +4947,11 @@
             <a:r>
               <a:rPr lang="en-US" sz="1100" dirty="0">
                 <a:solidFill>
-                  <a:srgbClr val="CCCCCC"/>
+                  <a:srgbClr val="2B2F36"/>
                 </a:solidFill>
                 <a:latin typeface="Arial" pitchFamily="34" charset="0"/>
-                <a:ea typeface="Arial" pitchFamily="34" charset="-122"/>
-                <a:cs typeface="Arial" pitchFamily="34" charset="-120"/>
+                <a:ea typeface="BIZ UDPGothic" pitchFamily="34" charset="-122"/>
+                <a:cs typeface="BIZ UDPGothic" pitchFamily="34" charset="-120"/>
               </a:rPr>
               <a:t>移住促進のインセンティブ（ボーナス）</a:t>
             </a:r>
@@ -4976,11 +4976,11 @@
             </a:avLst>
           </a:prstGeom>
           <a:solidFill>
-            <a:srgbClr val="1A1A1A"/>
+            <a:srgbClr val="FFFFFF"/>
           </a:solidFill>
           <a:ln w="12700">
             <a:solidFill>
-              <a:srgbClr val="2E2E2E"/>
+              <a:srgbClr val="DDE0E6"/>
             </a:solidFill>
             <a:prstDash val="solid"/>
           </a:ln>
@@ -5013,11 +5013,11 @@
             <a:r>
               <a:rPr lang="en-US" sz="1000" dirty="0">
                 <a:solidFill>
-                  <a:srgbClr val="888888"/>
+                  <a:srgbClr val="626875"/>
                 </a:solidFill>
                 <a:latin typeface="Arial" pitchFamily="34" charset="0"/>
-                <a:ea typeface="Arial" pitchFamily="34" charset="-122"/>
-                <a:cs typeface="Arial" pitchFamily="34" charset="-120"/>
+                <a:ea typeface="BIZ UDPGothic" pitchFamily="34" charset="-122"/>
+                <a:cs typeface="BIZ UDPGothic" pitchFamily="34" charset="-120"/>
               </a:rPr>
               <a:t>マイナンバー連携・スマホ完結・四半期ごとに実施　　年齢別加重投票・中高生への投票権を先行実験</a:t>
             </a:r>
@@ -5039,7 +5039,7 @@
     <p:bg>
       <p:bgPr>
         <a:solidFill>
-          <a:srgbClr val="0A0A0A"/>
+          <a:srgbClr val="F5F6F8"/>
         </a:solidFill>
       </p:bgPr>
     </p:bg>
@@ -5084,11 +5084,11 @@
             <a:r>
               <a:rPr lang="en-US" sz="900" b="1" spc="400" kern="0" dirty="0">
                 <a:solidFill>
-                  <a:srgbClr val="D62828"/>
+                  <a:srgbClr val="C8161D"/>
                 </a:solidFill>
                 <a:latin typeface="Arial" pitchFamily="34" charset="0"/>
-                <a:ea typeface="Arial" pitchFamily="34" charset="-122"/>
-                <a:cs typeface="Arial" pitchFamily="34" charset="-120"/>
+                <a:ea typeface="BIZ UDPGothic" pitchFamily="34" charset="-122"/>
+                <a:cs typeface="BIZ UDPGothic" pitchFamily="34" charset="-120"/>
               </a:rPr>
               <a:t>CORE 02 — LONG TERM</a:t>
             </a:r>
@@ -5123,11 +5123,11 @@
             <a:r>
               <a:rPr lang="en-US" sz="2800" b="1" dirty="0">
                 <a:solidFill>
-                  <a:srgbClr val="F5F5F0"/>
-                </a:solidFill>
-                <a:latin typeface="Cambria" pitchFamily="34" charset="0"/>
-                <a:ea typeface="Cambria" pitchFamily="34" charset="-122"/>
-                <a:cs typeface="Cambria" pitchFamily="34" charset="-120"/>
+                  <a:srgbClr val="16181D"/>
+                </a:solidFill>
+                <a:latin typeface="BIZ UDPGothic" pitchFamily="34" charset="0"/>
+                <a:ea typeface="BIZ UDPGothic" pitchFamily="34" charset="-122"/>
+                <a:cs typeface="BIZ UDPGothic" pitchFamily="34" charset="-120"/>
               </a:rPr>
               <a:t>地方再生の連鎖モデル（10〜20年スパン）</a:t>
             </a:r>
@@ -5150,11 +5150,11 @@
             <a:avLst/>
           </a:prstGeom>
           <a:solidFill>
-            <a:srgbClr val="2E2E2E"/>
+            <a:srgbClr val="DDE0E6"/>
           </a:solidFill>
           <a:ln w="12700">
             <a:solidFill>
-              <a:srgbClr val="2E2E2E"/>
+              <a:srgbClr val="DDE0E6"/>
             </a:solidFill>
             <a:prstDash val="solid"/>
           </a:ln>
@@ -5187,11 +5187,11 @@
             <a:r>
               <a:rPr lang="en-US" sz="1100" dirty="0">
                 <a:solidFill>
-                  <a:srgbClr val="CCCCCC"/>
+                  <a:srgbClr val="2B2F36"/>
                 </a:solidFill>
                 <a:latin typeface="Arial" pitchFamily="34" charset="0"/>
-                <a:ea typeface="Arial" pitchFamily="34" charset="-122"/>
-                <a:cs typeface="Arial" pitchFamily="34" charset="-120"/>
+                <a:ea typeface="BIZ UDPGothic" pitchFamily="34" charset="-122"/>
+                <a:cs typeface="BIZ UDPGothic" pitchFamily="34" charset="-120"/>
               </a:rPr>
               <a:t>補助金で一時的に人を呼ぶ従来策とは根本的に異なる。教育という長期インフラへの投資が、街全体の再生を自律的に駆動する。</a:t>
             </a:r>
@@ -5216,11 +5216,11 @@
             </a:avLst>
           </a:prstGeom>
           <a:solidFill>
-            <a:srgbClr val="141414"/>
+            <a:srgbClr val="FFFFFF"/>
           </a:solidFill>
           <a:ln w="12700">
             <a:solidFill>
-              <a:srgbClr val="2E2E2E"/>
+              <a:srgbClr val="DDE0E6"/>
             </a:solidFill>
             <a:prstDash val="solid"/>
           </a:ln>
@@ -5253,11 +5253,11 @@
             <a:r>
               <a:rPr lang="en-US" sz="1200" b="1" dirty="0">
                 <a:solidFill>
-                  <a:srgbClr val="F5F5F0"/>
-                </a:solidFill>
-                <a:latin typeface="Cambria" pitchFamily="34" charset="0"/>
-                <a:ea typeface="Cambria" pitchFamily="34" charset="-122"/>
-                <a:cs typeface="Cambria" pitchFamily="34" charset="-120"/>
+                  <a:srgbClr val="16181D"/>
+                </a:solidFill>
+                <a:latin typeface="BIZ UDPGothic" pitchFamily="34" charset="0"/>
+                <a:ea typeface="BIZ UDPGothic" pitchFamily="34" charset="-122"/>
+                <a:cs typeface="BIZ UDPGothic" pitchFamily="34" charset="-120"/>
               </a:rPr>
               <a:t>教員給与引き上げ</a:t>
             </a:r>
@@ -5270,11 +5270,11 @@
             <a:r>
               <a:rPr lang="en-US" sz="1200" b="1" dirty="0">
                 <a:solidFill>
-                  <a:srgbClr val="F5F5F0"/>
-                </a:solidFill>
-                <a:latin typeface="Cambria" pitchFamily="34" charset="0"/>
-                <a:ea typeface="Cambria" pitchFamily="34" charset="-122"/>
-                <a:cs typeface="Cambria" pitchFamily="34" charset="-120"/>
+                  <a:srgbClr val="16181D"/>
+                </a:solidFill>
+                <a:latin typeface="BIZ UDPGothic" pitchFamily="34" charset="0"/>
+                <a:ea typeface="BIZ UDPGothic" pitchFamily="34" charset="-122"/>
+                <a:cs typeface="BIZ UDPGothic" pitchFamily="34" charset="-120"/>
               </a:rPr>
               <a:t>傾斜配分</a:t>
             </a:r>
@@ -5297,11 +5297,11 @@
             <a:avLst/>
           </a:prstGeom>
           <a:solidFill>
-            <a:srgbClr val="2E2E2E"/>
+            <a:srgbClr val="DDE0E6"/>
           </a:solidFill>
           <a:ln w="12700">
             <a:solidFill>
-              <a:srgbClr val="2E2E2E"/>
+              <a:srgbClr val="DDE0E6"/>
             </a:solidFill>
             <a:prstDash val="solid"/>
           </a:ln>
@@ -5334,11 +5334,11 @@
             <a:r>
               <a:rPr lang="en-US" sz="1000" dirty="0">
                 <a:solidFill>
-                  <a:srgbClr val="CCCCCC"/>
+                  <a:srgbClr val="2B2F36"/>
                 </a:solidFill>
                 <a:latin typeface="Arial" pitchFamily="34" charset="0"/>
-                <a:ea typeface="Arial" pitchFamily="34" charset="-122"/>
-                <a:cs typeface="Arial" pitchFamily="34" charset="-120"/>
+                <a:ea typeface="BIZ UDPGothic" pitchFamily="34" charset="-122"/>
+                <a:cs typeface="BIZ UDPGothic" pitchFamily="34" charset="-120"/>
               </a:rPr>
               <a:t>優秀な教師が</a:t>
             </a:r>
@@ -5351,11 +5351,11 @@
             <a:r>
               <a:rPr lang="en-US" sz="1000" dirty="0">
                 <a:solidFill>
-                  <a:srgbClr val="CCCCCC"/>
+                  <a:srgbClr val="2B2F36"/>
                 </a:solidFill>
                 <a:latin typeface="Arial" pitchFamily="34" charset="0"/>
-                <a:ea typeface="Arial" pitchFamily="34" charset="-122"/>
-                <a:cs typeface="Arial" pitchFamily="34" charset="-120"/>
+                <a:ea typeface="BIZ UDPGothic" pitchFamily="34" charset="-122"/>
+                <a:cs typeface="BIZ UDPGothic" pitchFamily="34" charset="-120"/>
               </a:rPr>
               <a:t>地方に来る</a:t>
             </a:r>
@@ -5368,11 +5368,11 @@
             <a:r>
               <a:rPr lang="en-US" sz="1000" dirty="0">
                 <a:solidFill>
-                  <a:srgbClr val="CCCCCC"/>
+                  <a:srgbClr val="2B2F36"/>
                 </a:solidFill>
                 <a:latin typeface="Arial" pitchFamily="34" charset="0"/>
-                <a:ea typeface="Arial" pitchFamily="34" charset="-122"/>
-                <a:cs typeface="Arial" pitchFamily="34" charset="-120"/>
+                <a:ea typeface="BIZ UDPGothic" pitchFamily="34" charset="-122"/>
+                <a:cs typeface="BIZ UDPGothic" pitchFamily="34" charset="-120"/>
               </a:rPr>
               <a:t>20%でインフラ整備</a:t>
             </a:r>
@@ -5407,11 +5407,11 @@
             <a:r>
               <a:rPr lang="en-US" sz="2000" dirty="0">
                 <a:solidFill>
-                  <a:srgbClr val="D62828"/>
+                  <a:srgbClr val="C8161D"/>
                 </a:solidFill>
                 <a:latin typeface="Arial" pitchFamily="34" charset="0"/>
-                <a:ea typeface="Arial" pitchFamily="34" charset="-122"/>
-                <a:cs typeface="Arial" pitchFamily="34" charset="-120"/>
+                <a:ea typeface="BIZ UDPGothic" pitchFamily="34" charset="-122"/>
+                <a:cs typeface="BIZ UDPGothic" pitchFamily="34" charset="-120"/>
               </a:rPr>
               <a:t>→</a:t>
             </a:r>
@@ -5436,11 +5436,11 @@
             </a:avLst>
           </a:prstGeom>
           <a:solidFill>
-            <a:srgbClr val="141420"/>
+            <a:srgbClr val="E9EFF8"/>
           </a:solidFill>
           <a:ln w="12700">
             <a:solidFill>
-              <a:srgbClr val="2E2E2E"/>
+              <a:srgbClr val="DDE0E6"/>
             </a:solidFill>
             <a:prstDash val="solid"/>
           </a:ln>
@@ -5473,11 +5473,11 @@
             <a:r>
               <a:rPr lang="en-US" sz="1200" b="1" dirty="0">
                 <a:solidFill>
-                  <a:srgbClr val="F5F5F0"/>
-                </a:solidFill>
-                <a:latin typeface="Cambria" pitchFamily="34" charset="0"/>
-                <a:ea typeface="Cambria" pitchFamily="34" charset="-122"/>
-                <a:cs typeface="Cambria" pitchFamily="34" charset="-120"/>
+                  <a:srgbClr val="16181D"/>
+                </a:solidFill>
+                <a:latin typeface="BIZ UDPGothic" pitchFamily="34" charset="0"/>
+                <a:ea typeface="BIZ UDPGothic" pitchFamily="34" charset="-122"/>
+                <a:cs typeface="BIZ UDPGothic" pitchFamily="34" charset="-120"/>
               </a:rPr>
               <a:t>若年世帯が</a:t>
             </a:r>
@@ -5490,11 +5490,11 @@
             <a:r>
               <a:rPr lang="en-US" sz="1200" b="1" dirty="0">
                 <a:solidFill>
-                  <a:srgbClr val="F5F5F0"/>
-                </a:solidFill>
-                <a:latin typeface="Cambria" pitchFamily="34" charset="0"/>
-                <a:ea typeface="Cambria" pitchFamily="34" charset="-122"/>
-                <a:cs typeface="Cambria" pitchFamily="34" charset="-120"/>
+                  <a:srgbClr val="16181D"/>
+                </a:solidFill>
+                <a:latin typeface="BIZ UDPGothic" pitchFamily="34" charset="0"/>
+                <a:ea typeface="BIZ UDPGothic" pitchFamily="34" charset="-122"/>
+                <a:cs typeface="BIZ UDPGothic" pitchFamily="34" charset="-120"/>
               </a:rPr>
               <a:t>地方へ移住</a:t>
             </a:r>
@@ -5517,11 +5517,11 @@
             <a:avLst/>
           </a:prstGeom>
           <a:solidFill>
-            <a:srgbClr val="2E2E2E"/>
+            <a:srgbClr val="DDE0E6"/>
           </a:solidFill>
           <a:ln w="12700">
             <a:solidFill>
-              <a:srgbClr val="2E2E2E"/>
+              <a:srgbClr val="DDE0E6"/>
             </a:solidFill>
             <a:prstDash val="solid"/>
           </a:ln>
@@ -5554,11 +5554,11 @@
             <a:r>
               <a:rPr lang="en-US" sz="1000" dirty="0">
                 <a:solidFill>
-                  <a:srgbClr val="CCCCCC"/>
+                  <a:srgbClr val="2B2F36"/>
                 </a:solidFill>
                 <a:latin typeface="Arial" pitchFamily="34" charset="0"/>
-                <a:ea typeface="Arial" pitchFamily="34" charset="-122"/>
-                <a:cs typeface="Arial" pitchFamily="34" charset="-120"/>
+                <a:ea typeface="BIZ UDPGothic" pitchFamily="34" charset="-122"/>
+                <a:cs typeface="BIZ UDPGothic" pitchFamily="34" charset="-120"/>
               </a:rPr>
               <a:t>教育環境の逆転</a:t>
             </a:r>
@@ -5571,11 +5571,11 @@
             <a:r>
               <a:rPr lang="en-US" sz="1000" dirty="0">
                 <a:solidFill>
-                  <a:srgbClr val="CCCCCC"/>
+                  <a:srgbClr val="2B2F36"/>
                 </a:solidFill>
                 <a:latin typeface="Arial" pitchFamily="34" charset="0"/>
-                <a:ea typeface="Arial" pitchFamily="34" charset="-122"/>
-                <a:cs typeface="Arial" pitchFamily="34" charset="-120"/>
+                <a:ea typeface="BIZ UDPGothic" pitchFamily="34" charset="-122"/>
+                <a:cs typeface="BIZ UDPGothic" pitchFamily="34" charset="-120"/>
               </a:rPr>
               <a:t>住民投票で</a:t>
             </a:r>
@@ -5588,11 +5588,11 @@
             <a:r>
               <a:rPr lang="en-US" sz="1000" dirty="0">
                 <a:solidFill>
-                  <a:srgbClr val="CCCCCC"/>
+                  <a:srgbClr val="2B2F36"/>
                 </a:solidFill>
                 <a:latin typeface="Arial" pitchFamily="34" charset="0"/>
-                <a:ea typeface="Arial" pitchFamily="34" charset="-122"/>
-                <a:cs typeface="Arial" pitchFamily="34" charset="-120"/>
+                <a:ea typeface="BIZ UDPGothic" pitchFamily="34" charset="-122"/>
+                <a:cs typeface="BIZ UDPGothic" pitchFamily="34" charset="-120"/>
               </a:rPr>
               <a:t>街づくりに参加</a:t>
             </a:r>
@@ -5627,11 +5627,11 @@
             <a:r>
               <a:rPr lang="en-US" sz="2000" dirty="0">
                 <a:solidFill>
-                  <a:srgbClr val="D62828"/>
+                  <a:srgbClr val="C8161D"/>
                 </a:solidFill>
                 <a:latin typeface="Arial" pitchFamily="34" charset="0"/>
-                <a:ea typeface="Arial" pitchFamily="34" charset="-122"/>
-                <a:cs typeface="Arial" pitchFamily="34" charset="-120"/>
+                <a:ea typeface="BIZ UDPGothic" pitchFamily="34" charset="-122"/>
+                <a:cs typeface="BIZ UDPGothic" pitchFamily="34" charset="-120"/>
               </a:rPr>
               <a:t>→</a:t>
             </a:r>
@@ -5656,11 +5656,11 @@
             </a:avLst>
           </a:prstGeom>
           <a:solidFill>
-            <a:srgbClr val="141A14"/>
+            <a:srgbClr val="E9EFF8"/>
           </a:solidFill>
           <a:ln w="12700">
             <a:solidFill>
-              <a:srgbClr val="2E2E2E"/>
+              <a:srgbClr val="DDE0E6"/>
             </a:solidFill>
             <a:prstDash val="solid"/>
           </a:ln>
@@ -5693,11 +5693,11 @@
             <a:r>
               <a:rPr lang="en-US" sz="1200" b="1" dirty="0">
                 <a:solidFill>
-                  <a:srgbClr val="F5F5F0"/>
-                </a:solidFill>
-                <a:latin typeface="Cambria" pitchFamily="34" charset="0"/>
-                <a:ea typeface="Cambria" pitchFamily="34" charset="-122"/>
-                <a:cs typeface="Cambria" pitchFamily="34" charset="-120"/>
+                  <a:srgbClr val="16181D"/>
+                </a:solidFill>
+                <a:latin typeface="BIZ UDPGothic" pitchFamily="34" charset="0"/>
+                <a:ea typeface="BIZ UDPGothic" pitchFamily="34" charset="-122"/>
+                <a:cs typeface="BIZ UDPGothic" pitchFamily="34" charset="-120"/>
               </a:rPr>
               <a:t>人が集まる</a:t>
             </a:r>
@@ -5710,11 +5710,11 @@
             <a:r>
               <a:rPr lang="en-US" sz="1200" b="1" dirty="0">
                 <a:solidFill>
-                  <a:srgbClr val="F5F5F0"/>
-                </a:solidFill>
-                <a:latin typeface="Cambria" pitchFamily="34" charset="0"/>
-                <a:ea typeface="Cambria" pitchFamily="34" charset="-122"/>
-                <a:cs typeface="Cambria" pitchFamily="34" charset="-120"/>
+                  <a:srgbClr val="16181D"/>
+                </a:solidFill>
+                <a:latin typeface="BIZ UDPGothic" pitchFamily="34" charset="0"/>
+                <a:ea typeface="BIZ UDPGothic" pitchFamily="34" charset="-122"/>
+                <a:cs typeface="BIZ UDPGothic" pitchFamily="34" charset="-120"/>
               </a:rPr>
               <a:t>企業が集まる</a:t>
             </a:r>
@@ -5737,11 +5737,11 @@
             <a:avLst/>
           </a:prstGeom>
           <a:solidFill>
-            <a:srgbClr val="2E2E2E"/>
+            <a:srgbClr val="DDE0E6"/>
           </a:solidFill>
           <a:ln w="12700">
             <a:solidFill>
-              <a:srgbClr val="2E2E2E"/>
+              <a:srgbClr val="DDE0E6"/>
             </a:solidFill>
             <a:prstDash val="solid"/>
           </a:ln>
@@ -5774,11 +5774,11 @@
             <a:r>
               <a:rPr lang="en-US" sz="1000" dirty="0">
                 <a:solidFill>
-                  <a:srgbClr val="CCCCCC"/>
+                  <a:srgbClr val="2B2F36"/>
                 </a:solidFill>
                 <a:latin typeface="Arial" pitchFamily="34" charset="0"/>
-                <a:ea typeface="Arial" pitchFamily="34" charset="-122"/>
-                <a:cs typeface="Arial" pitchFamily="34" charset="-120"/>
+                <a:ea typeface="BIZ UDPGothic" pitchFamily="34" charset="-122"/>
+                <a:cs typeface="BIZ UDPGothic" pitchFamily="34" charset="-120"/>
               </a:rPr>
               <a:t>仕事が増える</a:t>
             </a:r>
@@ -5791,11 +5791,11 @@
             <a:r>
               <a:rPr lang="en-US" sz="1000" dirty="0">
                 <a:solidFill>
-                  <a:srgbClr val="CCCCCC"/>
+                  <a:srgbClr val="2B2F36"/>
                 </a:solidFill>
                 <a:latin typeface="Arial" pitchFamily="34" charset="0"/>
-                <a:ea typeface="Arial" pitchFamily="34" charset="-122"/>
-                <a:cs typeface="Arial" pitchFamily="34" charset="-120"/>
+                <a:ea typeface="BIZ UDPGothic" pitchFamily="34" charset="-122"/>
+                <a:cs typeface="BIZ UDPGothic" pitchFamily="34" charset="-120"/>
               </a:rPr>
               <a:t>所得が上がる</a:t>
             </a:r>
@@ -5830,11 +5830,11 @@
             <a:r>
               <a:rPr lang="en-US" sz="2000" dirty="0">
                 <a:solidFill>
-                  <a:srgbClr val="D62828"/>
+                  <a:srgbClr val="C8161D"/>
                 </a:solidFill>
                 <a:latin typeface="Arial" pitchFamily="34" charset="0"/>
-                <a:ea typeface="Arial" pitchFamily="34" charset="-122"/>
-                <a:cs typeface="Arial" pitchFamily="34" charset="-120"/>
+                <a:ea typeface="BIZ UDPGothic" pitchFamily="34" charset="-122"/>
+                <a:cs typeface="BIZ UDPGothic" pitchFamily="34" charset="-120"/>
               </a:rPr>
               <a:t>→</a:t>
             </a:r>
@@ -5859,11 +5859,11 @@
             </a:avLst>
           </a:prstGeom>
           <a:solidFill>
-            <a:srgbClr val="081808"/>
+            <a:srgbClr val="E9EFF8"/>
           </a:solidFill>
           <a:ln w="12700">
             <a:solidFill>
-              <a:srgbClr val="2E2E2E"/>
+              <a:srgbClr val="DDE0E6"/>
             </a:solidFill>
             <a:prstDash val="solid"/>
           </a:ln>
@@ -5896,11 +5896,11 @@
             <a:r>
               <a:rPr lang="en-US" sz="1200" b="1" dirty="0">
                 <a:solidFill>
-                  <a:srgbClr val="F5F5F0"/>
-                </a:solidFill>
-                <a:latin typeface="Cambria" pitchFamily="34" charset="0"/>
-                <a:ea typeface="Cambria" pitchFamily="34" charset="-122"/>
-                <a:cs typeface="Cambria" pitchFamily="34" charset="-120"/>
+                  <a:srgbClr val="16181D"/>
+                </a:solidFill>
+                <a:latin typeface="BIZ UDPGothic" pitchFamily="34" charset="0"/>
+                <a:ea typeface="BIZ UDPGothic" pitchFamily="34" charset="-122"/>
+                <a:cs typeface="BIZ UDPGothic" pitchFamily="34" charset="-120"/>
               </a:rPr>
               <a:t>税収増・医療</a:t>
             </a:r>
@@ -5913,11 +5913,11 @@
             <a:r>
               <a:rPr lang="en-US" sz="1200" b="1" dirty="0">
                 <a:solidFill>
-                  <a:srgbClr val="F5F5F0"/>
-                </a:solidFill>
-                <a:latin typeface="Cambria" pitchFamily="34" charset="0"/>
-                <a:ea typeface="Cambria" pitchFamily="34" charset="-122"/>
-                <a:cs typeface="Cambria" pitchFamily="34" charset="-120"/>
+                  <a:srgbClr val="16181D"/>
+                </a:solidFill>
+                <a:latin typeface="BIZ UDPGothic" pitchFamily="34" charset="0"/>
+                <a:ea typeface="BIZ UDPGothic" pitchFamily="34" charset="-122"/>
+                <a:cs typeface="BIZ UDPGothic" pitchFamily="34" charset="-120"/>
               </a:rPr>
               <a:t>コミュニティ形成</a:t>
             </a:r>
@@ -5940,11 +5940,11 @@
             <a:avLst/>
           </a:prstGeom>
           <a:solidFill>
-            <a:srgbClr val="2E2E2E"/>
+            <a:srgbClr val="DDE0E6"/>
           </a:solidFill>
           <a:ln w="12700">
             <a:solidFill>
-              <a:srgbClr val="2E2E2E"/>
+              <a:srgbClr val="DDE0E6"/>
             </a:solidFill>
             <a:prstDash val="solid"/>
           </a:ln>
@@ -5977,11 +5977,11 @@
             <a:r>
               <a:rPr lang="en-US" sz="1000" dirty="0">
                 <a:solidFill>
-                  <a:srgbClr val="CCCCCC"/>
+                  <a:srgbClr val="2B2F36"/>
                 </a:solidFill>
                 <a:latin typeface="Arial" pitchFamily="34" charset="0"/>
-                <a:ea typeface="Arial" pitchFamily="34" charset="-122"/>
-                <a:cs typeface="Arial" pitchFamily="34" charset="-120"/>
+                <a:ea typeface="BIZ UDPGothic" pitchFamily="34" charset="-122"/>
+                <a:cs typeface="BIZ UDPGothic" pitchFamily="34" charset="-120"/>
               </a:rPr>
               <a:t>さらに人が集まる</a:t>
             </a:r>
@@ -5994,11 +5994,11 @@
             <a:r>
               <a:rPr lang="en-US" sz="1000" dirty="0">
                 <a:solidFill>
-                  <a:srgbClr val="CCCCCC"/>
+                  <a:srgbClr val="2B2F36"/>
                 </a:solidFill>
                 <a:latin typeface="Arial" pitchFamily="34" charset="0"/>
-                <a:ea typeface="Arial" pitchFamily="34" charset="-122"/>
-                <a:cs typeface="Arial" pitchFamily="34" charset="-120"/>
+                <a:ea typeface="BIZ UDPGothic" pitchFamily="34" charset="-122"/>
+                <a:cs typeface="BIZ UDPGothic" pitchFamily="34" charset="-120"/>
               </a:rPr>
               <a:t>街が自律的に</a:t>
             </a:r>
@@ -6011,11 +6011,11 @@
             <a:r>
               <a:rPr lang="en-US" sz="1000" dirty="0">
                 <a:solidFill>
-                  <a:srgbClr val="CCCCCC"/>
+                  <a:srgbClr val="2B2F36"/>
                 </a:solidFill>
                 <a:latin typeface="Arial" pitchFamily="34" charset="0"/>
-                <a:ea typeface="Arial" pitchFamily="34" charset="-122"/>
-                <a:cs typeface="Arial" pitchFamily="34" charset="-120"/>
+                <a:ea typeface="BIZ UDPGothic" pitchFamily="34" charset="-122"/>
+                <a:cs typeface="BIZ UDPGothic" pitchFamily="34" charset="-120"/>
               </a:rPr>
               <a:t>再生する</a:t>
             </a:r>
@@ -6040,11 +6040,11 @@
             </a:avLst>
           </a:prstGeom>
           <a:solidFill>
-            <a:srgbClr val="1A1A1A"/>
+            <a:srgbClr val="FFFFFF"/>
           </a:solidFill>
           <a:ln w="12700">
             <a:solidFill>
-              <a:srgbClr val="2E2E2E"/>
+              <a:srgbClr val="DDE0E6"/>
             </a:solidFill>
             <a:prstDash val="solid"/>
           </a:ln>
@@ -6077,11 +6077,11 @@
             <a:r>
               <a:rPr lang="en-US" sz="1000" dirty="0">
                 <a:solidFill>
-                  <a:srgbClr val="CCCCCC"/>
+                  <a:srgbClr val="2B2F36"/>
                 </a:solidFill>
                 <a:latin typeface="Arial" pitchFamily="34" charset="0"/>
-                <a:ea typeface="Arial" pitchFamily="34" charset="-122"/>
-                <a:cs typeface="Arial" pitchFamily="34" charset="-120"/>
+                <a:ea typeface="BIZ UDPGothic" pitchFamily="34" charset="-122"/>
+                <a:cs typeface="BIZ UDPGothic" pitchFamily="34" charset="-120"/>
               </a:rPr>
               <a:t>「良い教育・良い教師が地方にいるから地方に住む」という自発的な選択を促す10〜20年の長期戦略。</a:t>
             </a:r>
@@ -6103,7 +6103,7 @@
     <p:bg>
       <p:bgPr>
         <a:solidFill>
-          <a:srgbClr val="0A0A0A"/>
+          <a:srgbClr val="F5F6F8"/>
         </a:solidFill>
       </p:bgPr>
     </p:bg>
@@ -6148,11 +6148,11 @@
             <a:r>
               <a:rPr lang="en-US" sz="900" b="1" spc="400" kern="0" dirty="0">
                 <a:solidFill>
-                  <a:srgbClr val="D62828"/>
+                  <a:srgbClr val="C8161D"/>
                 </a:solidFill>
                 <a:latin typeface="Arial" pitchFamily="34" charset="0"/>
-                <a:ea typeface="Arial" pitchFamily="34" charset="-122"/>
-                <a:cs typeface="Arial" pitchFamily="34" charset="-120"/>
+                <a:ea typeface="BIZ UDPGothic" pitchFamily="34" charset="-122"/>
+                <a:cs typeface="BIZ UDPGothic" pitchFamily="34" charset="-120"/>
               </a:rPr>
               <a:t>CORE 03</a:t>
             </a:r>
@@ -6187,11 +6187,11 @@
             <a:r>
               <a:rPr lang="en-US" sz="2800" b="1" dirty="0">
                 <a:solidFill>
-                  <a:srgbClr val="F5F5F0"/>
-                </a:solidFill>
-                <a:latin typeface="Cambria" pitchFamily="34" charset="0"/>
-                <a:ea typeface="Cambria" pitchFamily="34" charset="-122"/>
-                <a:cs typeface="Cambria" pitchFamily="34" charset="-120"/>
+                  <a:srgbClr val="16181D"/>
+                </a:solidFill>
+                <a:latin typeface="BIZ UDPGothic" pitchFamily="34" charset="0"/>
+                <a:ea typeface="BIZ UDPGothic" pitchFamily="34" charset="-122"/>
+                <a:cs typeface="BIZ UDPGothic" pitchFamily="34" charset="-120"/>
               </a:rPr>
               <a:t>教育権限の「国→都道府県・学校」への完全委譲</a:t>
             </a:r>
@@ -6214,11 +6214,11 @@
             <a:avLst/>
           </a:prstGeom>
           <a:solidFill>
-            <a:srgbClr val="2E2E2E"/>
+            <a:srgbClr val="DDE0E6"/>
           </a:solidFill>
           <a:ln w="12700">
             <a:solidFill>
-              <a:srgbClr val="2E2E2E"/>
+              <a:srgbClr val="DDE0E6"/>
             </a:solidFill>
             <a:prstDash val="solid"/>
           </a:ln>
@@ -6251,11 +6251,11 @@
             <a:r>
               <a:rPr lang="en-US" sz="1100" dirty="0">
                 <a:solidFill>
-                  <a:srgbClr val="CCCCCC"/>
+                  <a:srgbClr val="2B2F36"/>
                 </a:solidFill>
                 <a:latin typeface="Arial" pitchFamily="34" charset="0"/>
-                <a:ea typeface="Arial" pitchFamily="34" charset="-122"/>
-                <a:cs typeface="Arial" pitchFamily="34" charset="-120"/>
+                <a:ea typeface="BIZ UDPGothic" pitchFamily="34" charset="-122"/>
+                <a:cs typeface="BIZ UDPGothic" pitchFamily="34" charset="-120"/>
               </a:rPr>
               <a:t>国の一律で硬直化した学習指導要領を廃止し、カリキュラム・学部設置の権限を都道府県へ、予算執行権を学校運営へ移譲する。</a:t>
             </a:r>
@@ -6290,11 +6290,11 @@
             <a:r>
               <a:rPr lang="en-US" sz="1300" b="1" dirty="0">
                 <a:solidFill>
-                  <a:srgbClr val="D62828"/>
-                </a:solidFill>
-                <a:latin typeface="Cambria" pitchFamily="34" charset="0"/>
-                <a:ea typeface="Cambria" pitchFamily="34" charset="-122"/>
-                <a:cs typeface="Cambria" pitchFamily="34" charset="-120"/>
+                  <a:srgbClr val="C8161D"/>
+                </a:solidFill>
+                <a:latin typeface="BIZ UDPGothic" pitchFamily="34" charset="0"/>
+                <a:ea typeface="BIZ UDPGothic" pitchFamily="34" charset="-122"/>
+                <a:cs typeface="BIZ UDPGothic" pitchFamily="34" charset="-120"/>
               </a:rPr>
               <a:t>地域産業に直結した公立「専門学部」の創設（例）</a:t>
             </a:r>
@@ -6319,11 +6319,11 @@
             </a:avLst>
           </a:prstGeom>
           <a:solidFill>
-            <a:srgbClr val="1A1A1A"/>
+            <a:srgbClr val="FFFFFF"/>
           </a:solidFill>
           <a:ln w="12700">
             <a:solidFill>
-              <a:srgbClr val="2E2E2E"/>
+              <a:srgbClr val="DDE0E6"/>
             </a:solidFill>
             <a:prstDash val="solid"/>
           </a:ln>
@@ -6346,11 +6346,11 @@
             </a:avLst>
           </a:prstGeom>
           <a:solidFill>
-            <a:srgbClr val="2E2E2E"/>
+            <a:srgbClr val="DDE0E6"/>
           </a:solidFill>
           <a:ln w="12700">
             <a:solidFill>
-              <a:srgbClr val="2E2E2E"/>
+              <a:srgbClr val="DDE0E6"/>
             </a:solidFill>
             <a:prstDash val="solid"/>
           </a:ln>
@@ -6383,11 +6383,11 @@
             <a:r>
               <a:rPr lang="en-US" sz="1000" b="1" dirty="0">
                 <a:solidFill>
-                  <a:srgbClr val="F5F5F0"/>
+                  <a:srgbClr val="16181D"/>
                 </a:solidFill>
                 <a:latin typeface="Arial" pitchFamily="34" charset="0"/>
-                <a:ea typeface="Arial" pitchFamily="34" charset="-122"/>
-                <a:cs typeface="Arial" pitchFamily="34" charset="-120"/>
+                <a:ea typeface="BIZ UDPGothic" pitchFamily="34" charset="-122"/>
+                <a:cs typeface="BIZ UDPGothic" pitchFamily="34" charset="-120"/>
               </a:rPr>
               <a:t>IT・DX推進地域</a:t>
             </a:r>
@@ -6422,11 +6422,11 @@
             <a:r>
               <a:rPr lang="en-US" sz="1300" b="1" dirty="0">
                 <a:solidFill>
-                  <a:srgbClr val="F5F5F0"/>
-                </a:solidFill>
-                <a:latin typeface="Cambria" pitchFamily="34" charset="0"/>
-                <a:ea typeface="Cambria" pitchFamily="34" charset="-122"/>
-                <a:cs typeface="Cambria" pitchFamily="34" charset="-120"/>
+                  <a:srgbClr val="16181D"/>
+                </a:solidFill>
+                <a:latin typeface="BIZ UDPGothic" pitchFamily="34" charset="0"/>
+                <a:ea typeface="BIZ UDPGothic" pitchFamily="34" charset="-122"/>
+                <a:cs typeface="BIZ UDPGothic" pitchFamily="34" charset="-120"/>
               </a:rPr>
               <a:t>AI・データサイエンス学部</a:t>
             </a:r>
@@ -6451,11 +6451,11 @@
             </a:avLst>
           </a:prstGeom>
           <a:solidFill>
-            <a:srgbClr val="1A1A1A"/>
+            <a:srgbClr val="FFFFFF"/>
           </a:solidFill>
           <a:ln w="12700">
             <a:solidFill>
-              <a:srgbClr val="2E2E2E"/>
+              <a:srgbClr val="DDE0E6"/>
             </a:solidFill>
             <a:prstDash val="solid"/>
           </a:ln>
@@ -6478,11 +6478,11 @@
             </a:avLst>
           </a:prstGeom>
           <a:solidFill>
-            <a:srgbClr val="2E2E2E"/>
+            <a:srgbClr val="DDE0E6"/>
           </a:solidFill>
           <a:ln w="12700">
             <a:solidFill>
-              <a:srgbClr val="2E2E2E"/>
+              <a:srgbClr val="DDE0E6"/>
             </a:solidFill>
             <a:prstDash val="solid"/>
           </a:ln>
@@ -6515,11 +6515,11 @@
             <a:r>
               <a:rPr lang="en-US" sz="1000" b="1" dirty="0">
                 <a:solidFill>
-                  <a:srgbClr val="F5F5F0"/>
+                  <a:srgbClr val="16181D"/>
                 </a:solidFill>
                 <a:latin typeface="Arial" pitchFamily="34" charset="0"/>
-                <a:ea typeface="Arial" pitchFamily="34" charset="-122"/>
-                <a:cs typeface="Arial" pitchFamily="34" charset="-120"/>
+                <a:ea typeface="BIZ UDPGothic" pitchFamily="34" charset="-122"/>
+                <a:cs typeface="BIZ UDPGothic" pitchFamily="34" charset="-120"/>
               </a:rPr>
               <a:t>医療・ケア不足地域</a:t>
             </a:r>
@@ -6554,11 +6554,11 @@
             <a:r>
               <a:rPr lang="en-US" sz="1300" b="1" dirty="0">
                 <a:solidFill>
-                  <a:srgbClr val="F5F5F0"/>
-                </a:solidFill>
-                <a:latin typeface="Cambria" pitchFamily="34" charset="0"/>
-                <a:ea typeface="Cambria" pitchFamily="34" charset="-122"/>
-                <a:cs typeface="Cambria" pitchFamily="34" charset="-120"/>
+                  <a:srgbClr val="16181D"/>
+                </a:solidFill>
+                <a:latin typeface="BIZ UDPGothic" pitchFamily="34" charset="0"/>
+                <a:ea typeface="BIZ UDPGothic" pitchFamily="34" charset="-122"/>
+                <a:cs typeface="BIZ UDPGothic" pitchFamily="34" charset="-120"/>
               </a:rPr>
               <a:t>幼児教育・医療ケア準備学部</a:t>
             </a:r>
@@ -6583,11 +6583,11 @@
             </a:avLst>
           </a:prstGeom>
           <a:solidFill>
-            <a:srgbClr val="1A1A1A"/>
+            <a:srgbClr val="FFFFFF"/>
           </a:solidFill>
           <a:ln w="12700">
             <a:solidFill>
-              <a:srgbClr val="2E2E2E"/>
+              <a:srgbClr val="DDE0E6"/>
             </a:solidFill>
             <a:prstDash val="solid"/>
           </a:ln>
@@ -6610,11 +6610,11 @@
             </a:avLst>
           </a:prstGeom>
           <a:solidFill>
-            <a:srgbClr val="2E2E2E"/>
+            <a:srgbClr val="DDE0E6"/>
           </a:solidFill>
           <a:ln w="12700">
             <a:solidFill>
-              <a:srgbClr val="2E2E2E"/>
+              <a:srgbClr val="DDE0E6"/>
             </a:solidFill>
             <a:prstDash val="solid"/>
           </a:ln>
@@ -6647,11 +6647,11 @@
             <a:r>
               <a:rPr lang="en-US" sz="1000" b="1" dirty="0">
                 <a:solidFill>
-                  <a:srgbClr val="F5F5F0"/>
+                  <a:srgbClr val="16181D"/>
                 </a:solidFill>
                 <a:latin typeface="Arial" pitchFamily="34" charset="0"/>
-                <a:ea typeface="Arial" pitchFamily="34" charset="-122"/>
-                <a:cs typeface="Arial" pitchFamily="34" charset="-120"/>
+                <a:ea typeface="BIZ UDPGothic" pitchFamily="34" charset="-122"/>
+                <a:cs typeface="BIZ UDPGothic" pitchFamily="34" charset="-120"/>
               </a:rPr>
               <a:t>農林水産業地域</a:t>
             </a:r>
@@ -6686,11 +6686,11 @@
             <a:r>
               <a:rPr lang="en-US" sz="1300" b="1" dirty="0">
                 <a:solidFill>
-                  <a:srgbClr val="F5F5F0"/>
-                </a:solidFill>
-                <a:latin typeface="Cambria" pitchFamily="34" charset="0"/>
-                <a:ea typeface="Cambria" pitchFamily="34" charset="-122"/>
-                <a:cs typeface="Cambria" pitchFamily="34" charset="-120"/>
+                  <a:srgbClr val="16181D"/>
+                </a:solidFill>
+                <a:latin typeface="BIZ UDPGothic" pitchFamily="34" charset="0"/>
+                <a:ea typeface="BIZ UDPGothic" pitchFamily="34" charset="-122"/>
+                <a:cs typeface="BIZ UDPGothic" pitchFamily="34" charset="-120"/>
               </a:rPr>
               <a:t>スマート農業・地域資源活用学部</a:t>
             </a:r>
@@ -6715,11 +6715,11 @@
             </a:avLst>
           </a:prstGeom>
           <a:solidFill>
-            <a:srgbClr val="1A1A1A"/>
+            <a:srgbClr val="FFFFFF"/>
           </a:solidFill>
           <a:ln w="12700">
             <a:solidFill>
-              <a:srgbClr val="2E2E2E"/>
+              <a:srgbClr val="DDE0E6"/>
             </a:solidFill>
             <a:prstDash val="solid"/>
           </a:ln>
@@ -6742,11 +6742,11 @@
             </a:avLst>
           </a:prstGeom>
           <a:solidFill>
-            <a:srgbClr val="2E2E2E"/>
+            <a:srgbClr val="DDE0E6"/>
           </a:solidFill>
           <a:ln w="12700">
             <a:solidFill>
-              <a:srgbClr val="2E2E2E"/>
+              <a:srgbClr val="DDE0E6"/>
             </a:solidFill>
             <a:prstDash val="solid"/>
           </a:ln>
@@ -6779,11 +6779,11 @@
             <a:r>
               <a:rPr lang="en-US" sz="1000" b="1" dirty="0">
                 <a:solidFill>
-                  <a:srgbClr val="F5F5F0"/>
+                  <a:srgbClr val="16181D"/>
                 </a:solidFill>
                 <a:latin typeface="Arial" pitchFamily="34" charset="0"/>
-                <a:ea typeface="Arial" pitchFamily="34" charset="-122"/>
-                <a:cs typeface="Arial" pitchFamily="34" charset="-120"/>
+                <a:ea typeface="BIZ UDPGothic" pitchFamily="34" charset="-122"/>
+                <a:cs typeface="BIZ UDPGothic" pitchFamily="34" charset="-120"/>
               </a:rPr>
               <a:t>観光・文化資源地域</a:t>
             </a:r>
@@ -6818,11 +6818,11 @@
             <a:r>
               <a:rPr lang="en-US" sz="1300" b="1" dirty="0">
                 <a:solidFill>
-                  <a:srgbClr val="F5F5F0"/>
-                </a:solidFill>
-                <a:latin typeface="Cambria" pitchFamily="34" charset="0"/>
-                <a:ea typeface="Cambria" pitchFamily="34" charset="-122"/>
-                <a:cs typeface="Cambria" pitchFamily="34" charset="-120"/>
+                  <a:srgbClr val="16181D"/>
+                </a:solidFill>
+                <a:latin typeface="BIZ UDPGothic" pitchFamily="34" charset="0"/>
+                <a:ea typeface="BIZ UDPGothic" pitchFamily="34" charset="-122"/>
+                <a:cs typeface="BIZ UDPGothic" pitchFamily="34" charset="-120"/>
               </a:rPr>
               <a:t>コンテンツ制作・インバウンド実践学部</a:t>
             </a:r>
@@ -6847,11 +6847,11 @@
             </a:avLst>
           </a:prstGeom>
           <a:solidFill>
-            <a:srgbClr val="1A1A1A"/>
+            <a:srgbClr val="FFFFFF"/>
           </a:solidFill>
           <a:ln w="12700">
             <a:solidFill>
-              <a:srgbClr val="2E2E2E"/>
+              <a:srgbClr val="DDE0E6"/>
             </a:solidFill>
             <a:prstDash val="solid"/>
           </a:ln>
@@ -6884,11 +6884,11 @@
             <a:r>
               <a:rPr lang="en-US" sz="1000" dirty="0">
                 <a:solidFill>
-                  <a:srgbClr val="CCCCCC"/>
+                  <a:srgbClr val="2B2F36"/>
                 </a:solidFill>
                 <a:latin typeface="Arial" pitchFamily="34" charset="0"/>
-                <a:ea typeface="Arial" pitchFamily="34" charset="-122"/>
-                <a:cs typeface="Arial" pitchFamily="34" charset="-120"/>
+                <a:ea typeface="BIZ UDPGothic" pitchFamily="34" charset="-122"/>
+                <a:cs typeface="BIZ UDPGothic" pitchFamily="34" charset="-120"/>
               </a:rPr>
               <a:t>地域の課題と産業ニーズに直結したカリキュラムで、卒業後にそのまま地域の即戦力として機能する人材を育てる。</a:t>
             </a:r>
@@ -6910,7 +6910,7 @@
     <p:bg>
       <p:bgPr>
         <a:solidFill>
-          <a:srgbClr val="0A0A0A"/>
+          <a:srgbClr val="F5F6F8"/>
         </a:solidFill>
       </p:bgPr>
     </p:bg>
@@ -6955,11 +6955,11 @@
             <a:r>
               <a:rPr lang="en-US" sz="900" b="1" spc="400" kern="0" dirty="0">
                 <a:solidFill>
-                  <a:srgbClr val="D62828"/>
+                  <a:srgbClr val="C8161D"/>
                 </a:solidFill>
                 <a:latin typeface="Arial" pitchFamily="34" charset="0"/>
-                <a:ea typeface="Arial" pitchFamily="34" charset="-122"/>
-                <a:cs typeface="Arial" pitchFamily="34" charset="-120"/>
+                <a:ea typeface="BIZ UDPGothic" pitchFamily="34" charset="-122"/>
+                <a:cs typeface="BIZ UDPGothic" pitchFamily="34" charset="-120"/>
               </a:rPr>
               <a:t>GOVERNANCE</a:t>
             </a:r>
@@ -6994,11 +6994,11 @@
             <a:r>
               <a:rPr lang="en-US" sz="2400" b="1" dirty="0">
                 <a:solidFill>
-                  <a:srgbClr val="F5F5F0"/>
-                </a:solidFill>
-                <a:latin typeface="Cambria" pitchFamily="34" charset="0"/>
-                <a:ea typeface="Cambria" pitchFamily="34" charset="-122"/>
-                <a:cs typeface="Cambria" pitchFamily="34" charset="-120"/>
+                  <a:srgbClr val="16181D"/>
+                </a:solidFill>
+                <a:latin typeface="BIZ UDPGothic" pitchFamily="34" charset="0"/>
+                <a:ea typeface="BIZ UDPGothic" pitchFamily="34" charset="-122"/>
+                <a:cs typeface="BIZ UDPGothic" pitchFamily="34" charset="-120"/>
               </a:rPr>
               <a:t>3つのガバナンス：公金が正しく機能するための防壁</a:t>
             </a:r>
@@ -7021,11 +7021,11 @@
             <a:avLst/>
           </a:prstGeom>
           <a:solidFill>
-            <a:srgbClr val="2E2E2E"/>
+            <a:srgbClr val="DDE0E6"/>
           </a:solidFill>
           <a:ln w="12700">
             <a:solidFill>
-              <a:srgbClr val="2E2E2E"/>
+              <a:srgbClr val="DDE0E6"/>
             </a:solidFill>
             <a:prstDash val="solid"/>
           </a:ln>
@@ -7048,11 +7048,11 @@
             </a:avLst>
           </a:prstGeom>
           <a:solidFill>
-            <a:srgbClr val="1A1A1A"/>
+            <a:srgbClr val="FFFFFF"/>
           </a:solidFill>
           <a:ln w="12700">
             <a:solidFill>
-              <a:srgbClr val="2E2E2E"/>
+              <a:srgbClr val="DDE0E6"/>
             </a:solidFill>
             <a:prstDash val="solid"/>
           </a:ln>
@@ -7075,11 +7075,11 @@
             </a:avLst>
           </a:prstGeom>
           <a:solidFill>
-            <a:srgbClr val="D62828"/>
+            <a:srgbClr val="C8161D"/>
           </a:solidFill>
           <a:ln w="12700">
             <a:solidFill>
-              <a:srgbClr val="D62828"/>
+              <a:srgbClr val="C8161D"/>
             </a:solidFill>
             <a:prstDash val="solid"/>
           </a:ln>
@@ -7112,11 +7112,11 @@
             <a:r>
               <a:rPr lang="en-US" sz="1600" b="1" dirty="0">
                 <a:solidFill>
-                  <a:srgbClr val="F5F5F0"/>
+                  <a:srgbClr val="FFFFFF"/>
                 </a:solidFill>
                 <a:latin typeface="Arial" pitchFamily="34" charset="0"/>
-                <a:ea typeface="Arial" pitchFamily="34" charset="-122"/>
-                <a:cs typeface="Arial" pitchFamily="34" charset="-120"/>
+                <a:ea typeface="BIZ UDPGothic" pitchFamily="34" charset="-122"/>
+                <a:cs typeface="BIZ UDPGothic" pitchFamily="34" charset="-120"/>
               </a:rPr>
               <a:t>①</a:t>
             </a:r>
@@ -7151,11 +7151,11 @@
             <a:r>
               <a:rPr lang="en-US" sz="1200" b="1" dirty="0">
                 <a:solidFill>
-                  <a:srgbClr val="F5F5F0"/>
-                </a:solidFill>
-                <a:latin typeface="Cambria" pitchFamily="34" charset="0"/>
-                <a:ea typeface="Cambria" pitchFamily="34" charset="-122"/>
-                <a:cs typeface="Cambria" pitchFamily="34" charset="-120"/>
+                  <a:srgbClr val="16181D"/>
+                </a:solidFill>
+                <a:latin typeface="BIZ UDPGothic" pitchFamily="34" charset="0"/>
+                <a:ea typeface="BIZ UDPGothic" pitchFamily="34" charset="-122"/>
+                <a:cs typeface="BIZ UDPGothic" pitchFamily="34" charset="-120"/>
               </a:rPr>
               <a:t>教員給与は法律に則り、現行水準からの引き上げを義務化</a:t>
             </a:r>
@@ -7178,11 +7178,11 @@
             <a:avLst/>
           </a:prstGeom>
           <a:solidFill>
-            <a:srgbClr val="2E2E2E"/>
+            <a:srgbClr val="DDE0E6"/>
           </a:solidFill>
           <a:ln w="12700">
             <a:solidFill>
-              <a:srgbClr val="2E2E2E"/>
+              <a:srgbClr val="DDE0E6"/>
             </a:solidFill>
             <a:prstDash val="solid"/>
           </a:ln>
@@ -7215,11 +7215,11 @@
             <a:r>
               <a:rPr lang="en-US" sz="1000" dirty="0">
                 <a:solidFill>
-                  <a:srgbClr val="CCCCCC"/>
+                  <a:srgbClr val="2B2F36"/>
                 </a:solidFill>
                 <a:latin typeface="Arial" pitchFamily="34" charset="0"/>
-                <a:ea typeface="Arial" pitchFamily="34" charset="-122"/>
-                <a:cs typeface="Arial" pitchFamily="34" charset="-120"/>
+                <a:ea typeface="BIZ UDPGothic" pitchFamily="34" charset="-122"/>
+                <a:cs typeface="BIZ UDPGothic" pitchFamily="34" charset="-120"/>
               </a:rPr>
               <a:t>公立学校教職員給与法等の法律に則る。ただし現行水準からの引き上げを義務化し、40歳上位10%水準を法令で定める。年功序列の硬直した体系から脱却し、実績・評価に連動した報酬設計を認める。</a:t>
             </a:r>
@@ -7244,11 +7244,11 @@
             </a:avLst>
           </a:prstGeom>
           <a:solidFill>
-            <a:srgbClr val="1A1A1A"/>
+            <a:srgbClr val="FFFFFF"/>
           </a:solidFill>
           <a:ln w="12700">
             <a:solidFill>
-              <a:srgbClr val="2E2E2E"/>
+              <a:srgbClr val="DDE0E6"/>
             </a:solidFill>
             <a:prstDash val="solid"/>
           </a:ln>
@@ -7271,11 +7271,11 @@
             </a:avLst>
           </a:prstGeom>
           <a:solidFill>
-            <a:srgbClr val="D62828"/>
+            <a:srgbClr val="C8161D"/>
           </a:solidFill>
           <a:ln w="12700">
             <a:solidFill>
-              <a:srgbClr val="D62828"/>
+              <a:srgbClr val="C8161D"/>
             </a:solidFill>
             <a:prstDash val="solid"/>
           </a:ln>
@@ -7308,11 +7308,11 @@
             <a:r>
               <a:rPr lang="en-US" sz="1600" b="1" dirty="0">
                 <a:solidFill>
-                  <a:srgbClr val="F5F5F0"/>
+                  <a:srgbClr val="FFFFFF"/>
                 </a:solidFill>
                 <a:latin typeface="Arial" pitchFamily="34" charset="0"/>
-                <a:ea typeface="Arial" pitchFamily="34" charset="-122"/>
-                <a:cs typeface="Arial" pitchFamily="34" charset="-120"/>
+                <a:ea typeface="BIZ UDPGothic" pitchFamily="34" charset="-122"/>
+                <a:cs typeface="BIZ UDPGothic" pitchFamily="34" charset="-120"/>
               </a:rPr>
               <a:t>②</a:t>
             </a:r>
@@ -7347,11 +7347,11 @@
             <a:r>
               <a:rPr lang="en-US" sz="1200" b="1" dirty="0">
                 <a:solidFill>
-                  <a:srgbClr val="F5F5F0"/>
-                </a:solidFill>
-                <a:latin typeface="Cambria" pitchFamily="34" charset="0"/>
-                <a:ea typeface="Cambria" pitchFamily="34" charset="-122"/>
-                <a:cs typeface="Cambria" pitchFamily="34" charset="-120"/>
+                  <a:srgbClr val="16181D"/>
+                </a:solidFill>
+                <a:latin typeface="BIZ UDPGothic" pitchFamily="34" charset="0"/>
+                <a:ea typeface="BIZ UDPGothic" pitchFamily="34" charset="-122"/>
+                <a:cs typeface="BIZ UDPGothic" pitchFamily="34" charset="-120"/>
               </a:rPr>
               <a:t>個別寄付の完全禁止・ふるさと納税は公立のみ・PFS配分</a:t>
             </a:r>
@@ -7374,11 +7374,11 @@
             <a:avLst/>
           </a:prstGeom>
           <a:solidFill>
-            <a:srgbClr val="2E2E2E"/>
+            <a:srgbClr val="DDE0E6"/>
           </a:solidFill>
           <a:ln w="12700">
             <a:solidFill>
-              <a:srgbClr val="2E2E2E"/>
+              <a:srgbClr val="DDE0E6"/>
             </a:solidFill>
             <a:prstDash val="solid"/>
           </a:ln>
@@ -7411,11 +7411,11 @@
             <a:r>
               <a:rPr lang="en-US" sz="1000" dirty="0">
                 <a:solidFill>
-                  <a:srgbClr val="CCCCCC"/>
+                  <a:srgbClr val="2B2F36"/>
                 </a:solidFill>
                 <a:latin typeface="Arial" pitchFamily="34" charset="0"/>
-                <a:ea typeface="Arial" pitchFamily="34" charset="-122"/>
-                <a:cs typeface="Arial" pitchFamily="34" charset="-120"/>
+                <a:ea typeface="BIZ UDPGothic" pitchFamily="34" charset="-122"/>
+                <a:cs typeface="BIZ UDPGothic" pitchFamily="34" charset="-120"/>
               </a:rPr>
               <a:t>OBの財力による高校間格差を防ぐため個別寄付は禁止。ふるさと納税等は公立（コモンズ）のみ受け付ける。3年ごとの成果連動型（PFS）配分でイノベーションを起こす学校へ傾斜配分する。</a:t>
             </a:r>
@@ -7440,11 +7440,11 @@
             </a:avLst>
           </a:prstGeom>
           <a:solidFill>
-            <a:srgbClr val="1A1A1A"/>
+            <a:srgbClr val="FFFFFF"/>
           </a:solidFill>
           <a:ln w="12700">
             <a:solidFill>
-              <a:srgbClr val="2E2E2E"/>
+              <a:srgbClr val="DDE0E6"/>
             </a:solidFill>
             <a:prstDash val="solid"/>
           </a:ln>
@@ -7467,11 +7467,11 @@
             </a:avLst>
           </a:prstGeom>
           <a:solidFill>
-            <a:srgbClr val="D62828"/>
+            <a:srgbClr val="C8161D"/>
           </a:solidFill>
           <a:ln w="12700">
             <a:solidFill>
-              <a:srgbClr val="D62828"/>
+              <a:srgbClr val="C8161D"/>
             </a:solidFill>
             <a:prstDash val="solid"/>
           </a:ln>
@@ -7504,11 +7504,11 @@
             <a:r>
               <a:rPr lang="en-US" sz="1600" b="1" dirty="0">
                 <a:solidFill>
-                  <a:srgbClr val="F5F5F0"/>
+                  <a:srgbClr val="FFFFFF"/>
                 </a:solidFill>
                 <a:latin typeface="Arial" pitchFamily="34" charset="0"/>
-                <a:ea typeface="Arial" pitchFamily="34" charset="-122"/>
-                <a:cs typeface="Arial" pitchFamily="34" charset="-120"/>
+                <a:ea typeface="BIZ UDPGothic" pitchFamily="34" charset="-122"/>
+                <a:cs typeface="BIZ UDPGothic" pitchFamily="34" charset="-120"/>
               </a:rPr>
               <a:t>③</a:t>
             </a:r>
@@ -7543,11 +7543,11 @@
             <a:r>
               <a:rPr lang="en-US" sz="1200" b="1" dirty="0">
                 <a:solidFill>
-                  <a:srgbClr val="F5F5F0"/>
-                </a:solidFill>
-                <a:latin typeface="Cambria" pitchFamily="34" charset="0"/>
-                <a:ea typeface="Cambria" pitchFamily="34" charset="-122"/>
-                <a:cs typeface="Cambria" pitchFamily="34" charset="-120"/>
+                  <a:srgbClr val="16181D"/>
+                </a:solidFill>
+                <a:latin typeface="BIZ UDPGothic" pitchFamily="34" charset="0"/>
+                <a:ea typeface="BIZ UDPGothic" pitchFamily="34" charset="-122"/>
+                <a:cs typeface="BIZ UDPGothic" pitchFamily="34" charset="-120"/>
               </a:rPr>
               <a:t>財務・契約・施設計画・成果の「完全オンライン公開（ダッシュボード化）」</a:t>
             </a:r>
@@ -7570,11 +7570,11 @@
             <a:avLst/>
           </a:prstGeom>
           <a:solidFill>
-            <a:srgbClr val="2E2E2E"/>
+            <a:srgbClr val="DDE0E6"/>
           </a:solidFill>
           <a:ln w="12700">
             <a:solidFill>
-              <a:srgbClr val="2E2E2E"/>
+              <a:srgbClr val="DDE0E6"/>
             </a:solidFill>
             <a:prstDash val="solid"/>
           </a:ln>
@@ -7607,11 +7607,11 @@
             <a:r>
               <a:rPr lang="en-US" sz="1000" dirty="0">
                 <a:solidFill>
-                  <a:srgbClr val="CCCCCC"/>
+                  <a:srgbClr val="2B2F36"/>
                 </a:solidFill>
                 <a:latin typeface="Arial" pitchFamily="34" charset="0"/>
-                <a:ea typeface="Arial" pitchFamily="34" charset="-122"/>
-                <a:cs typeface="Arial" pitchFamily="34" charset="-120"/>
+                <a:ea typeface="BIZ UDPGothic" pitchFamily="34" charset="-122"/>
+                <a:cs typeface="BIZ UDPGothic" pitchFamily="34" charset="-120"/>
               </a:rPr>
               <a:t>予算の契約履歴・住民投票の結果・施設整備計画・執行内容をリアルタイムで公開。学校運営への権限委譲と透明性の完全公開をセットにし、市民の目で監視する。</a:t>
             </a:r>
@@ -7633,7 +7633,7 @@
     <p:bg>
       <p:bgPr>
         <a:solidFill>
-          <a:srgbClr val="0A0A0A"/>
+          <a:srgbClr val="F5F6F8"/>
         </a:solidFill>
       </p:bgPr>
     </p:bg>
@@ -7678,11 +7678,11 @@
             <a:r>
               <a:rPr lang="en-US" sz="900" b="1" spc="400" kern="0" dirty="0">
                 <a:solidFill>
-                  <a:srgbClr val="D62828"/>
+                  <a:srgbClr val="C8161D"/>
                 </a:solidFill>
                 <a:latin typeface="Arial" pitchFamily="34" charset="0"/>
-                <a:ea typeface="Arial" pitchFamily="34" charset="-122"/>
-                <a:cs typeface="Arial" pitchFamily="34" charset="-120"/>
+                <a:ea typeface="BIZ UDPGothic" pitchFamily="34" charset="-122"/>
+                <a:cs typeface="BIZ UDPGothic" pitchFamily="34" charset="-120"/>
               </a:rPr>
               <a:t>OUTCOME</a:t>
             </a:r>
@@ -7717,11 +7717,11 @@
             <a:r>
               <a:rPr lang="en-US" sz="2800" b="1" dirty="0">
                 <a:solidFill>
-                  <a:srgbClr val="F5F5F0"/>
-                </a:solidFill>
-                <a:latin typeface="Cambria" pitchFamily="34" charset="0"/>
-                <a:ea typeface="Cambria" pitchFamily="34" charset="-122"/>
-                <a:cs typeface="Cambria" pitchFamily="34" charset="-120"/>
+                  <a:srgbClr val="16181D"/>
+                </a:solidFill>
+                <a:latin typeface="BIZ UDPGothic" pitchFamily="34" charset="0"/>
+                <a:ea typeface="BIZ UDPGothic" pitchFamily="34" charset="-122"/>
+                <a:cs typeface="BIZ UDPGothic" pitchFamily="34" charset="-120"/>
               </a:rPr>
               <a:t>本提言がもたらす3つの「解」</a:t>
             </a:r>
@@ -7744,11 +7744,11 @@
             <a:avLst/>
           </a:prstGeom>
           <a:solidFill>
-            <a:srgbClr val="2E2E2E"/>
+            <a:srgbClr val="DDE0E6"/>
           </a:solidFill>
           <a:ln w="12700">
             <a:solidFill>
-              <a:srgbClr val="2E2E2E"/>
+              <a:srgbClr val="DDE0E6"/>
             </a:solidFill>
             <a:prstDash val="solid"/>
           </a:ln>
@@ -7771,11 +7771,11 @@
             </a:avLst>
           </a:prstGeom>
           <a:solidFill>
-            <a:srgbClr val="1A1A1A"/>
+            <a:srgbClr val="FFFFFF"/>
           </a:solidFill>
           <a:ln w="12700">
             <a:solidFill>
-              <a:srgbClr val="2E2E2E"/>
+              <a:srgbClr val="DDE0E6"/>
             </a:solidFill>
             <a:prstDash val="solid"/>
           </a:ln>
@@ -7798,11 +7798,11 @@
             </a:avLst>
           </a:prstGeom>
           <a:solidFill>
-            <a:srgbClr val="D62828"/>
+            <a:srgbClr val="C8161D"/>
           </a:solidFill>
           <a:ln w="12700">
             <a:solidFill>
-              <a:srgbClr val="D62828"/>
+              <a:srgbClr val="C8161D"/>
             </a:solidFill>
             <a:prstDash val="solid"/>
           </a:ln>
@@ -7835,11 +7835,11 @@
             <a:r>
               <a:rPr lang="en-US" sz="1800" b="1" dirty="0">
                 <a:solidFill>
-                  <a:srgbClr val="F5F5F0"/>
+                  <a:srgbClr val="FFFFFF"/>
                 </a:solidFill>
                 <a:latin typeface="Arial" pitchFamily="34" charset="0"/>
-                <a:ea typeface="Arial" pitchFamily="34" charset="-122"/>
-                <a:cs typeface="Arial" pitchFamily="34" charset="-120"/>
+                <a:ea typeface="BIZ UDPGothic" pitchFamily="34" charset="-122"/>
+                <a:cs typeface="BIZ UDPGothic" pitchFamily="34" charset="-120"/>
               </a:rPr>
               <a:t>①</a:t>
             </a:r>
@@ -7874,11 +7874,11 @@
             <a:r>
               <a:rPr lang="en-US" sz="1400" b="1" dirty="0">
                 <a:solidFill>
-                  <a:srgbClr val="D62828"/>
-                </a:solidFill>
-                <a:latin typeface="Cambria" pitchFamily="34" charset="0"/>
-                <a:ea typeface="Cambria" pitchFamily="34" charset="-122"/>
-                <a:cs typeface="Cambria" pitchFamily="34" charset="-120"/>
+                  <a:srgbClr val="C8161D"/>
+                </a:solidFill>
+                <a:latin typeface="BIZ UDPGothic" pitchFamily="34" charset="0"/>
+                <a:ea typeface="BIZ UDPGothic" pitchFamily="34" charset="-122"/>
+                <a:cs typeface="BIZ UDPGothic" pitchFamily="34" charset="-120"/>
               </a:rPr>
               <a:t>不健全な公費依存からの脱却</a:t>
             </a:r>
@@ -7913,11 +7913,11 @@
             <a:r>
               <a:rPr lang="en-US" sz="1000" dirty="0">
                 <a:solidFill>
-                  <a:srgbClr val="CCCCCC"/>
+                  <a:srgbClr val="2B2F36"/>
                 </a:solidFill>
                 <a:latin typeface="Arial" pitchFamily="34" charset="0"/>
-                <a:ea typeface="Arial" pitchFamily="34" charset="-122"/>
-                <a:cs typeface="Arial" pitchFamily="34" charset="-120"/>
+                <a:ea typeface="BIZ UDPGothic" pitchFamily="34" charset="-122"/>
+                <a:cs typeface="BIZ UDPGothic" pitchFamily="34" charset="-120"/>
               </a:rPr>
               <a:t>税金で私立を延命させるのを止め、廃校でなく公立化という転換で受け皿を維持したまま公費を集中する。真に自立できる私学のみが民間資金で存続する。</a:t>
             </a:r>
@@ -7942,11 +7942,11 @@
             </a:avLst>
           </a:prstGeom>
           <a:solidFill>
-            <a:srgbClr val="1A1A1A"/>
+            <a:srgbClr val="FFFFFF"/>
           </a:solidFill>
           <a:ln w="12700">
             <a:solidFill>
-              <a:srgbClr val="2E2E2E"/>
+              <a:srgbClr val="DDE0E6"/>
             </a:solidFill>
             <a:prstDash val="solid"/>
           </a:ln>
@@ -7969,11 +7969,11 @@
             </a:avLst>
           </a:prstGeom>
           <a:solidFill>
-            <a:srgbClr val="D62828"/>
+            <a:srgbClr val="C8161D"/>
           </a:solidFill>
           <a:ln w="12700">
             <a:solidFill>
-              <a:srgbClr val="D62828"/>
+              <a:srgbClr val="C8161D"/>
             </a:solidFill>
             <a:prstDash val="solid"/>
           </a:ln>
@@ -8006,11 +8006,11 @@
             <a:r>
               <a:rPr lang="en-US" sz="1800" b="1" dirty="0">
                 <a:solidFill>
-                  <a:srgbClr val="F5F5F0"/>
+                  <a:srgbClr val="FFFFFF"/>
                 </a:solidFill>
                 <a:latin typeface="Arial" pitchFamily="34" charset="0"/>
-                <a:ea typeface="Arial" pitchFamily="34" charset="-122"/>
-                <a:cs typeface="Arial" pitchFamily="34" charset="-120"/>
+                <a:ea typeface="BIZ UDPGothic" pitchFamily="34" charset="-122"/>
+                <a:cs typeface="BIZ UDPGothic" pitchFamily="34" charset="-120"/>
               </a:rPr>
               <a:t>②</a:t>
             </a:r>
@@ -8045,11 +8045,11 @@
             <a:r>
               <a:rPr lang="en-US" sz="1400" b="1" dirty="0">
                 <a:solidFill>
-                  <a:srgbClr val="4090D0"/>
-                </a:solidFill>
-                <a:latin typeface="Cambria" pitchFamily="34" charset="0"/>
-                <a:ea typeface="Cambria" pitchFamily="34" charset="-122"/>
-                <a:cs typeface="Cambria" pitchFamily="34" charset="-120"/>
+                  <a:srgbClr val="1D4F91"/>
+                </a:solidFill>
+                <a:latin typeface="BIZ UDPGothic" pitchFamily="34" charset="0"/>
+                <a:ea typeface="BIZ UDPGothic" pitchFamily="34" charset="-122"/>
+                <a:cs typeface="BIZ UDPGothic" pitchFamily="34" charset="-120"/>
               </a:rPr>
               <a:t>真の教育の機会均等</a:t>
             </a:r>
@@ -8084,11 +8084,11 @@
             <a:r>
               <a:rPr lang="en-US" sz="1000" dirty="0">
                 <a:solidFill>
-                  <a:srgbClr val="CCCCCC"/>
+                  <a:srgbClr val="2B2F36"/>
                 </a:solidFill>
                 <a:latin typeface="Arial" pitchFamily="34" charset="0"/>
-                <a:ea typeface="Arial" pitchFamily="34" charset="-122"/>
-                <a:cs typeface="Arial" pitchFamily="34" charset="-120"/>
+                <a:ea typeface="BIZ UDPGothic" pitchFamily="34" charset="-122"/>
+                <a:cs typeface="BIZ UDPGothic" pitchFamily="34" charset="-120"/>
               </a:rPr>
               <a:t>親の財力に関係なく「地元の公立高校に行けば、優秀な教師のもとで最高水準の教育が完全無料で受けられる」という国家としての本当のコモンズが完成する。</a:t>
             </a:r>
@@ -8113,11 +8113,11 @@
             </a:avLst>
           </a:prstGeom>
           <a:solidFill>
-            <a:srgbClr val="1A1A1A"/>
+            <a:srgbClr val="FFFFFF"/>
           </a:solidFill>
           <a:ln w="12700">
             <a:solidFill>
-              <a:srgbClr val="2E2E2E"/>
+              <a:srgbClr val="DDE0E6"/>
             </a:solidFill>
             <a:prstDash val="solid"/>
           </a:ln>
@@ -8140,11 +8140,11 @@
             </a:avLst>
           </a:prstGeom>
           <a:solidFill>
-            <a:srgbClr val="D62828"/>
+            <a:srgbClr val="C8161D"/>
           </a:solidFill>
           <a:ln w="12700">
             <a:solidFill>
-              <a:srgbClr val="D62828"/>
+              <a:srgbClr val="C8161D"/>
             </a:solidFill>
             <a:prstDash val="solid"/>
           </a:ln>
@@ -8177,11 +8177,11 @@
             <a:r>
               <a:rPr lang="en-US" sz="1800" b="1" dirty="0">
                 <a:solidFill>
-                  <a:srgbClr val="F5F5F0"/>
+                  <a:srgbClr val="FFFFFF"/>
                 </a:solidFill>
                 <a:latin typeface="Arial" pitchFamily="34" charset="0"/>
-                <a:ea typeface="Arial" pitchFamily="34" charset="-122"/>
-                <a:cs typeface="Arial" pitchFamily="34" charset="-120"/>
+                <a:ea typeface="BIZ UDPGothic" pitchFamily="34" charset="-122"/>
+                <a:cs typeface="BIZ UDPGothic" pitchFamily="34" charset="-120"/>
               </a:rPr>
               <a:t>③</a:t>
             </a:r>
@@ -8216,11 +8216,11 @@
             <a:r>
               <a:rPr lang="en-US" sz="1400" b="1" dirty="0">
                 <a:solidFill>
-                  <a:srgbClr val="4CAF50"/>
-                </a:solidFill>
-                <a:latin typeface="Cambria" pitchFamily="34" charset="0"/>
-                <a:ea typeface="Cambria" pitchFamily="34" charset="-122"/>
-                <a:cs typeface="Cambria" pitchFamily="34" charset="-120"/>
+                  <a:srgbClr val="1D4F91"/>
+                </a:solidFill>
+                <a:latin typeface="BIZ UDPGothic" pitchFamily="34" charset="0"/>
+                <a:ea typeface="BIZ UDPGothic" pitchFamily="34" charset="-122"/>
+                <a:cs typeface="BIZ UDPGothic" pitchFamily="34" charset="-120"/>
               </a:rPr>
               <a:t>地方創生の決定打（10〜20年スパン）</a:t>
             </a:r>
@@ -8255,11 +8255,11 @@
             <a:r>
               <a:rPr lang="en-US" sz="1000" dirty="0">
                 <a:solidFill>
-                  <a:srgbClr val="CCCCCC"/>
+                  <a:srgbClr val="2B2F36"/>
                 </a:solidFill>
                 <a:latin typeface="Arial" pitchFamily="34" charset="0"/>
-                <a:ea typeface="Arial" pitchFamily="34" charset="-122"/>
-                <a:cs typeface="Arial" pitchFamily="34" charset="-120"/>
+                <a:ea typeface="BIZ UDPGothic" pitchFamily="34" charset="-122"/>
+                <a:cs typeface="BIZ UDPGothic" pitchFamily="34" charset="-120"/>
               </a:rPr>
               <a:t>教育への集中投資を起点に、インフラ・企業誘致・人口流入・税収増という連鎖が自律的に動き出す。補助金で一時的に人を呼ぶ従来策とは根本的に異なる構造転換。</a:t>
             </a:r>
@@ -8281,7 +8281,7 @@
     <p:bg>
       <p:bgPr>
         <a:solidFill>
-          <a:srgbClr val="0A0A0A"/>
+          <a:srgbClr val="F5F6F8"/>
         </a:solidFill>
       </p:bgPr>
     </p:bg>
@@ -8314,11 +8314,11 @@
             <a:avLst/>
           </a:prstGeom>
           <a:solidFill>
-            <a:srgbClr val="D62828"/>
+            <a:srgbClr val="C8161D"/>
           </a:solidFill>
           <a:ln w="12700">
             <a:solidFill>
-              <a:srgbClr val="D62828"/>
+              <a:srgbClr val="C8161D"/>
             </a:solidFill>
             <a:prstDash val="solid"/>
           </a:ln>
@@ -8351,11 +8351,11 @@
             <a:r>
               <a:rPr lang="en-US" sz="1000" b="1" spc="300" kern="0" dirty="0">
                 <a:solidFill>
-                  <a:srgbClr val="D62828"/>
+                  <a:srgbClr val="C8161D"/>
                 </a:solidFill>
                 <a:latin typeface="Arial" pitchFamily="34" charset="0"/>
-                <a:ea typeface="Arial" pitchFamily="34" charset="-122"/>
-                <a:cs typeface="Arial" pitchFamily="34" charset="-120"/>
+                <a:ea typeface="BIZ UDPGothic" pitchFamily="34" charset="-122"/>
+                <a:cs typeface="BIZ UDPGothic" pitchFamily="34" charset="-120"/>
               </a:rPr>
               <a:t>REBOOT JAPAN ── 提言009　まとめ</a:t>
             </a:r>
@@ -8390,11 +8390,11 @@
             <a:r>
               <a:rPr lang="en-US" sz="2800" b="1" dirty="0">
                 <a:solidFill>
-                  <a:srgbClr val="F5F5F0"/>
-                </a:solidFill>
-                <a:latin typeface="Cambria" pitchFamily="34" charset="0"/>
-                <a:ea typeface="Cambria" pitchFamily="34" charset="-122"/>
-                <a:cs typeface="Cambria" pitchFamily="34" charset="-120"/>
+                  <a:srgbClr val="16181D"/>
+                </a:solidFill>
+                <a:latin typeface="BIZ UDPGothic" pitchFamily="34" charset="0"/>
+                <a:ea typeface="BIZ UDPGothic" pitchFamily="34" charset="-122"/>
+                <a:cs typeface="BIZ UDPGothic" pitchFamily="34" charset="-120"/>
               </a:rPr>
               <a:t>6,800億円を</a:t>
             </a:r>
@@ -8407,11 +8407,11 @@
             <a:r>
               <a:rPr lang="en-US" sz="2800" b="1" dirty="0">
                 <a:solidFill>
-                  <a:srgbClr val="F5F5F0"/>
-                </a:solidFill>
-                <a:latin typeface="Cambria" pitchFamily="34" charset="0"/>
-                <a:ea typeface="Cambria" pitchFamily="34" charset="-122"/>
-                <a:cs typeface="Cambria" pitchFamily="34" charset="-120"/>
+                  <a:srgbClr val="16181D"/>
+                </a:solidFill>
+                <a:latin typeface="BIZ UDPGothic" pitchFamily="34" charset="0"/>
+                <a:ea typeface="BIZ UDPGothic" pitchFamily="34" charset="-122"/>
+                <a:cs typeface="BIZ UDPGothic" pitchFamily="34" charset="-120"/>
               </a:rPr>
               <a:t>地方の未来へ。</a:t>
             </a:r>
@@ -8424,11 +8424,11 @@
             <a:r>
               <a:rPr lang="en-US" sz="2800" b="1" dirty="0">
                 <a:solidFill>
-                  <a:srgbClr val="F5F5F0"/>
-                </a:solidFill>
-                <a:latin typeface="Cambria" pitchFamily="34" charset="0"/>
-                <a:ea typeface="Cambria" pitchFamily="34" charset="-122"/>
-                <a:cs typeface="Cambria" pitchFamily="34" charset="-120"/>
+                  <a:srgbClr val="16181D"/>
+                </a:solidFill>
+                <a:latin typeface="BIZ UDPGothic" pitchFamily="34" charset="0"/>
+                <a:ea typeface="BIZ UDPGothic" pitchFamily="34" charset="-122"/>
+                <a:cs typeface="BIZ UDPGothic" pitchFamily="34" charset="-120"/>
               </a:rPr>
               <a:t>教師を尊び、</a:t>
             </a:r>
@@ -8441,11 +8441,11 @@
             <a:r>
               <a:rPr lang="en-US" sz="2800" b="1" dirty="0">
                 <a:solidFill>
-                  <a:srgbClr val="F5F5F0"/>
-                </a:solidFill>
-                <a:latin typeface="Cambria" pitchFamily="34" charset="0"/>
-                <a:ea typeface="Cambria" pitchFamily="34" charset="-122"/>
-                <a:cs typeface="Cambria" pitchFamily="34" charset="-120"/>
+                  <a:srgbClr val="16181D"/>
+                </a:solidFill>
+                <a:latin typeface="BIZ UDPGothic" pitchFamily="34" charset="0"/>
+                <a:ea typeface="BIZ UDPGothic" pitchFamily="34" charset="-122"/>
+                <a:cs typeface="BIZ UDPGothic" pitchFamily="34" charset="-120"/>
               </a:rPr>
               <a:t>地方を再生する。</a:t>
             </a:r>
@@ -8468,11 +8468,11 @@
             <a:avLst/>
           </a:prstGeom>
           <a:solidFill>
-            <a:srgbClr val="2E2E2E"/>
+            <a:srgbClr val="DDE0E6"/>
           </a:solidFill>
           <a:ln w="12700">
             <a:solidFill>
-              <a:srgbClr val="2E2E2E"/>
+              <a:srgbClr val="DDE0E6"/>
             </a:solidFill>
             <a:prstDash val="solid"/>
           </a:ln>
@@ -8508,11 +8508,11 @@
             <a:r>
               <a:rPr lang="en-US" sz="1100" dirty="0">
                 <a:solidFill>
-                  <a:srgbClr val="CCCCCC"/>
+                  <a:srgbClr val="2B2F36"/>
                 </a:solidFill>
                 <a:latin typeface="Arial" pitchFamily="34" charset="0"/>
-                <a:ea typeface="Arial" pitchFamily="34" charset="-122"/>
-                <a:cs typeface="Arial" pitchFamily="34" charset="-120"/>
+                <a:ea typeface="BIZ UDPGothic" pitchFamily="34" charset="-122"/>
+                <a:cs typeface="BIZ UDPGothic" pitchFamily="34" charset="-120"/>
               </a:rPr>
               <a:t>① 私立補助金6,830億円を廃止。廃校でなく「公立化」・移行期間3年</a:t>
             </a:r>
@@ -8528,11 +8528,11 @@
             <a:r>
               <a:rPr lang="en-US" sz="1100" dirty="0">
                 <a:solidFill>
-                  <a:srgbClr val="CCCCCC"/>
+                  <a:srgbClr val="2B2F36"/>
                 </a:solidFill>
                 <a:latin typeface="Arial" pitchFamily="34" charset="0"/>
-                <a:ea typeface="Arial" pitchFamily="34" charset="-122"/>
-                <a:cs typeface="Arial" pitchFamily="34" charset="-120"/>
+                <a:ea typeface="BIZ UDPGothic" pitchFamily="34" charset="-122"/>
+                <a:cs typeface="BIZ UDPGothic" pitchFamily="34" charset="-120"/>
               </a:rPr>
               <a:t>② 教員給与を40歳上位10%（約1,050万円）へ引き上げ（最優先財源）</a:t>
             </a:r>
@@ -8548,11 +8548,11 @@
             <a:r>
               <a:rPr lang="en-US" sz="1100" dirty="0">
                 <a:solidFill>
-                  <a:srgbClr val="CCCCCC"/>
+                  <a:srgbClr val="2B2F36"/>
                 </a:solidFill>
                 <a:latin typeface="Arial" pitchFamily="34" charset="0"/>
-                <a:ea typeface="Arial" pitchFamily="34" charset="-122"/>
-                <a:cs typeface="Arial" pitchFamily="34" charset="-120"/>
+                <a:ea typeface="BIZ UDPGothic" pitchFamily="34" charset="-122"/>
+                <a:cs typeface="BIZ UDPGothic" pitchFamily="34" charset="-120"/>
               </a:rPr>
               <a:t>③ 80%を公立学校へ傾斜配分（過疎地優遇）、20%をインフラ・企業誘致へ</a:t>
             </a:r>
@@ -8568,11 +8568,11 @@
             <a:r>
               <a:rPr lang="en-US" sz="1100" dirty="0">
                 <a:solidFill>
-                  <a:srgbClr val="CCCCCC"/>
+                  <a:srgbClr val="2B2F36"/>
                 </a:solidFill>
                 <a:latin typeface="Arial" pitchFamily="34" charset="0"/>
-                <a:ea typeface="Arial" pitchFamily="34" charset="-122"/>
-                <a:cs typeface="Arial" pitchFamily="34" charset="-120"/>
+                <a:ea typeface="BIZ UDPGothic" pitchFamily="34" charset="-122"/>
+                <a:cs typeface="BIZ UDPGothic" pitchFamily="34" charset="-120"/>
               </a:rPr>
               <a:t>④ 20%の使途は住民投票で確定。箱物は2段階判定（自動照合＋住民投票）</a:t>
             </a:r>
@@ -8585,11 +8585,11 @@
             <a:r>
               <a:rPr lang="en-US" sz="1100" dirty="0">
                 <a:solidFill>
-                  <a:srgbClr val="CCCCCC"/>
+                  <a:srgbClr val="2B2F36"/>
                 </a:solidFill>
                 <a:latin typeface="Arial" pitchFamily="34" charset="0"/>
-                <a:ea typeface="Arial" pitchFamily="34" charset="-122"/>
-                <a:cs typeface="Arial" pitchFamily="34" charset="-120"/>
+                <a:ea typeface="BIZ UDPGothic" pitchFamily="34" charset="-122"/>
+                <a:cs typeface="BIZ UDPGothic" pitchFamily="34" charset="-120"/>
               </a:rPr>
               <a:t>⑤ 学習指導要領廃止、都道府県・学校が地域産業連動で自律的に設計</a:t>
             </a:r>
@@ -8611,7 +8611,7 @@
     <p:bg>
       <p:bgPr>
         <a:solidFill>
-          <a:srgbClr val="0A0A0A"/>
+          <a:srgbClr val="F5F6F8"/>
         </a:solidFill>
       </p:bgPr>
     </p:bg>
@@ -8656,11 +8656,11 @@
             <a:r>
               <a:rPr lang="en-US" sz="900" b="1" spc="400" kern="0" dirty="0">
                 <a:solidFill>
-                  <a:srgbClr val="D62828"/>
+                  <a:srgbClr val="C8161D"/>
                 </a:solidFill>
                 <a:latin typeface="Arial" pitchFamily="34" charset="0"/>
-                <a:ea typeface="Arial" pitchFamily="34" charset="-122"/>
-                <a:cs typeface="Arial" pitchFamily="34" charset="-120"/>
+                <a:ea typeface="BIZ UDPGothic" pitchFamily="34" charset="-122"/>
+                <a:cs typeface="BIZ UDPGothic" pitchFamily="34" charset="-120"/>
               </a:rPr>
               <a:t>PROBLEM</a:t>
             </a:r>
@@ -8695,11 +8695,11 @@
             <a:r>
               <a:rPr lang="en-US" sz="2800" b="1" dirty="0">
                 <a:solidFill>
-                  <a:srgbClr val="F5F5F0"/>
-                </a:solidFill>
-                <a:latin typeface="Cambria" pitchFamily="34" charset="0"/>
-                <a:ea typeface="Cambria" pitchFamily="34" charset="-122"/>
-                <a:cs typeface="Cambria" pitchFamily="34" charset="-120"/>
+                  <a:srgbClr val="16181D"/>
+                </a:solidFill>
+                <a:latin typeface="BIZ UDPGothic" pitchFamily="34" charset="0"/>
+                <a:ea typeface="BIZ UDPGothic" pitchFamily="34" charset="-122"/>
+                <a:cs typeface="BIZ UDPGothic" pitchFamily="34" charset="-120"/>
               </a:rPr>
               <a:t>高校は「実質的な義務教育」である</a:t>
             </a:r>
@@ -8722,11 +8722,11 @@
             <a:avLst/>
           </a:prstGeom>
           <a:solidFill>
-            <a:srgbClr val="2E2E2E"/>
+            <a:srgbClr val="DDE0E6"/>
           </a:solidFill>
           <a:ln w="12700">
             <a:solidFill>
-              <a:srgbClr val="2E2E2E"/>
+              <a:srgbClr val="DDE0E6"/>
             </a:solidFill>
             <a:prstDash val="solid"/>
           </a:ln>
@@ -8749,11 +8749,11 @@
             </a:avLst>
           </a:prstGeom>
           <a:solidFill>
-            <a:srgbClr val="1A0808"/>
+            <a:srgbClr val="FCEBEB"/>
           </a:solidFill>
           <a:ln w="12700">
             <a:solidFill>
-              <a:srgbClr val="2E2E2E"/>
+              <a:srgbClr val="DDE0E6"/>
             </a:solidFill>
             <a:prstDash val="solid"/>
           </a:ln>
@@ -8786,11 +8786,11 @@
             <a:r>
               <a:rPr lang="en-US" sz="1300" b="1" dirty="0">
                 <a:solidFill>
-                  <a:srgbClr val="F5F5F0"/>
-                </a:solidFill>
-                <a:latin typeface="Cambria" pitchFamily="34" charset="0"/>
-                <a:ea typeface="Cambria" pitchFamily="34" charset="-122"/>
-                <a:cs typeface="Cambria" pitchFamily="34" charset="-120"/>
+                  <a:srgbClr val="16181D"/>
+                </a:solidFill>
+                <a:latin typeface="BIZ UDPGothic" pitchFamily="34" charset="0"/>
+                <a:ea typeface="BIZ UDPGothic" pitchFamily="34" charset="-122"/>
+                <a:cs typeface="BIZ UDPGothic" pitchFamily="34" charset="-120"/>
               </a:rPr>
               <a:t>高校進学率 98.8%。高校はすでに「選別のための機関」ではなく、18歳の成人を社会へ送り出す最後のセーフティネットだ。</a:t>
             </a:r>
@@ -8815,11 +8815,11 @@
             </a:avLst>
           </a:prstGeom>
           <a:solidFill>
-            <a:srgbClr val="1A1A1A"/>
+            <a:srgbClr val="FFFFFF"/>
           </a:solidFill>
           <a:ln w="12700">
             <a:solidFill>
-              <a:srgbClr val="2E2E2E"/>
+              <a:srgbClr val="DDE0E6"/>
             </a:solidFill>
             <a:prstDash val="solid"/>
           </a:ln>
@@ -8852,11 +8852,11 @@
             <a:r>
               <a:rPr lang="en-US" sz="2000" b="1" dirty="0">
                 <a:solidFill>
-                  <a:srgbClr val="D62828"/>
-                </a:solidFill>
-                <a:latin typeface="Cambria" pitchFamily="34" charset="0"/>
-                <a:ea typeface="Cambria" pitchFamily="34" charset="-122"/>
-                <a:cs typeface="Cambria" pitchFamily="34" charset="-120"/>
+                  <a:srgbClr val="C8161D"/>
+                </a:solidFill>
+                <a:latin typeface="BIZ UDPGothic" pitchFamily="34" charset="0"/>
+                <a:ea typeface="BIZ UDPGothic" pitchFamily="34" charset="-122"/>
+                <a:cs typeface="BIZ UDPGothic" pitchFamily="34" charset="-120"/>
               </a:rPr>
               <a:t>01</a:t>
             </a:r>
@@ -8879,11 +8879,11 @@
             <a:avLst/>
           </a:prstGeom>
           <a:solidFill>
-            <a:srgbClr val="2E2E2E"/>
+            <a:srgbClr val="DDE0E6"/>
           </a:solidFill>
           <a:ln w="12700">
             <a:solidFill>
-              <a:srgbClr val="2E2E2E"/>
+              <a:srgbClr val="DDE0E6"/>
             </a:solidFill>
             <a:prstDash val="solid"/>
           </a:ln>
@@ -8916,11 +8916,11 @@
             <a:r>
               <a:rPr lang="en-US" sz="1300" b="1" dirty="0">
                 <a:solidFill>
-                  <a:srgbClr val="F5F5F0"/>
-                </a:solidFill>
-                <a:latin typeface="Cambria" pitchFamily="34" charset="0"/>
-                <a:ea typeface="Cambria" pitchFamily="34" charset="-122"/>
-                <a:cs typeface="Cambria" pitchFamily="34" charset="-120"/>
+                  <a:srgbClr val="16181D"/>
+                </a:solidFill>
+                <a:latin typeface="BIZ UDPGothic" pitchFamily="34" charset="0"/>
+                <a:ea typeface="BIZ UDPGothic" pitchFamily="34" charset="-122"/>
+                <a:cs typeface="BIZ UDPGothic" pitchFamily="34" charset="-120"/>
               </a:rPr>
               <a:t>年間6,830億円の公費が私立に流れている</a:t>
             </a:r>
@@ -8955,11 +8955,11 @@
             <a:r>
               <a:rPr lang="en-US" sz="1000" dirty="0">
                 <a:solidFill>
-                  <a:srgbClr val="CCCCCC"/>
+                  <a:srgbClr val="2B2F36"/>
                 </a:solidFill>
                 <a:latin typeface="Arial" pitchFamily="34" charset="0"/>
-                <a:ea typeface="Arial" pitchFamily="34" charset="-122"/>
-                <a:cs typeface="Arial" pitchFamily="34" charset="-120"/>
+                <a:ea typeface="BIZ UDPGothic" pitchFamily="34" charset="-122"/>
+                <a:cs typeface="BIZ UDPGothic" pitchFamily="34" charset="-120"/>
               </a:rPr>
               <a:t>就学支援金5,824億円＋私学助成1,006億円。税金が私立高校の延命に使われ続けている</a:t>
             </a:r>
@@ -8984,11 +8984,11 @@
             </a:avLst>
           </a:prstGeom>
           <a:solidFill>
-            <a:srgbClr val="1A1A1A"/>
+            <a:srgbClr val="FFFFFF"/>
           </a:solidFill>
           <a:ln w="12700">
             <a:solidFill>
-              <a:srgbClr val="2E2E2E"/>
+              <a:srgbClr val="DDE0E6"/>
             </a:solidFill>
             <a:prstDash val="solid"/>
           </a:ln>
@@ -9021,11 +9021,11 @@
             <a:r>
               <a:rPr lang="en-US" sz="2000" b="1" dirty="0">
                 <a:solidFill>
-                  <a:srgbClr val="D62828"/>
-                </a:solidFill>
-                <a:latin typeface="Cambria" pitchFamily="34" charset="0"/>
-                <a:ea typeface="Cambria" pitchFamily="34" charset="-122"/>
-                <a:cs typeface="Cambria" pitchFamily="34" charset="-120"/>
+                  <a:srgbClr val="C8161D"/>
+                </a:solidFill>
+                <a:latin typeface="BIZ UDPGothic" pitchFamily="34" charset="0"/>
+                <a:ea typeface="BIZ UDPGothic" pitchFamily="34" charset="-122"/>
+                <a:cs typeface="BIZ UDPGothic" pitchFamily="34" charset="-120"/>
               </a:rPr>
               <a:t>02</a:t>
             </a:r>
@@ -9048,11 +9048,11 @@
             <a:avLst/>
           </a:prstGeom>
           <a:solidFill>
-            <a:srgbClr val="2E2E2E"/>
+            <a:srgbClr val="DDE0E6"/>
           </a:solidFill>
           <a:ln w="12700">
             <a:solidFill>
-              <a:srgbClr val="2E2E2E"/>
+              <a:srgbClr val="DDE0E6"/>
             </a:solidFill>
             <a:prstDash val="solid"/>
           </a:ln>
@@ -9085,11 +9085,11 @@
             <a:r>
               <a:rPr lang="en-US" sz="1300" b="1" dirty="0">
                 <a:solidFill>
-                  <a:srgbClr val="F5F5F0"/>
-                </a:solidFill>
-                <a:latin typeface="Cambria" pitchFamily="34" charset="0"/>
-                <a:ea typeface="Cambria" pitchFamily="34" charset="-122"/>
-                <a:cs typeface="Cambria" pitchFamily="34" charset="-120"/>
+                  <a:srgbClr val="16181D"/>
+                </a:solidFill>
+                <a:latin typeface="BIZ UDPGothic" pitchFamily="34" charset="0"/>
+                <a:ea typeface="BIZ UDPGothic" pitchFamily="34" charset="-122"/>
+                <a:cs typeface="BIZ UDPGothic" pitchFamily="34" charset="-120"/>
               </a:rPr>
               <a:t>親の財力・生まれた地域で教育格差が生まれる</a:t>
             </a:r>
@@ -9124,11 +9124,11 @@
             <a:r>
               <a:rPr lang="en-US" sz="1000" dirty="0">
                 <a:solidFill>
-                  <a:srgbClr val="CCCCCC"/>
+                  <a:srgbClr val="2B2F36"/>
                 </a:solidFill>
                 <a:latin typeface="Arial" pitchFamily="34" charset="0"/>
-                <a:ea typeface="Arial" pitchFamily="34" charset="-122"/>
-                <a:cs typeface="Arial" pitchFamily="34" charset="-120"/>
+                <a:ea typeface="BIZ UDPGothic" pitchFamily="34" charset="-122"/>
+                <a:cs typeface="BIZ UDPGothic" pitchFamily="34" charset="-120"/>
               </a:rPr>
               <a:t>公立より私立が「良い教育」という構図が固定化し、教育機会の不平等が再生産される</a:t>
             </a:r>
@@ -9153,11 +9153,11 @@
             </a:avLst>
           </a:prstGeom>
           <a:solidFill>
-            <a:srgbClr val="1A1A1A"/>
+            <a:srgbClr val="FFFFFF"/>
           </a:solidFill>
           <a:ln w="12700">
             <a:solidFill>
-              <a:srgbClr val="2E2E2E"/>
+              <a:srgbClr val="DDE0E6"/>
             </a:solidFill>
             <a:prstDash val="solid"/>
           </a:ln>
@@ -9190,11 +9190,11 @@
             <a:r>
               <a:rPr lang="en-US" sz="2000" b="1" dirty="0">
                 <a:solidFill>
-                  <a:srgbClr val="D62828"/>
-                </a:solidFill>
-                <a:latin typeface="Cambria" pitchFamily="34" charset="0"/>
-                <a:ea typeface="Cambria" pitchFamily="34" charset="-122"/>
-                <a:cs typeface="Cambria" pitchFamily="34" charset="-120"/>
+                  <a:srgbClr val="C8161D"/>
+                </a:solidFill>
+                <a:latin typeface="BIZ UDPGothic" pitchFamily="34" charset="0"/>
+                <a:ea typeface="BIZ UDPGothic" pitchFamily="34" charset="-122"/>
+                <a:cs typeface="BIZ UDPGothic" pitchFamily="34" charset="-120"/>
               </a:rPr>
               <a:t>03</a:t>
             </a:r>
@@ -9217,11 +9217,11 @@
             <a:avLst/>
           </a:prstGeom>
           <a:solidFill>
-            <a:srgbClr val="2E2E2E"/>
+            <a:srgbClr val="DDE0E6"/>
           </a:solidFill>
           <a:ln w="12700">
             <a:solidFill>
-              <a:srgbClr val="2E2E2E"/>
+              <a:srgbClr val="DDE0E6"/>
             </a:solidFill>
             <a:prstDash val="solid"/>
           </a:ln>
@@ -9254,11 +9254,11 @@
             <a:r>
               <a:rPr lang="en-US" sz="1300" b="1" dirty="0">
                 <a:solidFill>
-                  <a:srgbClr val="F5F5F0"/>
-                </a:solidFill>
-                <a:latin typeface="Cambria" pitchFamily="34" charset="0"/>
-                <a:ea typeface="Cambria" pitchFamily="34" charset="-122"/>
-                <a:cs typeface="Cambria" pitchFamily="34" charset="-120"/>
+                  <a:srgbClr val="16181D"/>
+                </a:solidFill>
+                <a:latin typeface="BIZ UDPGothic" pitchFamily="34" charset="0"/>
+                <a:ea typeface="BIZ UDPGothic" pitchFamily="34" charset="-122"/>
+                <a:cs typeface="BIZ UDPGothic" pitchFamily="34" charset="-120"/>
               </a:rPr>
               <a:t>地方の教育環境が都市部より劣る構造</a:t>
             </a:r>
@@ -9293,11 +9293,11 @@
             <a:r>
               <a:rPr lang="en-US" sz="1000" dirty="0">
                 <a:solidFill>
-                  <a:srgbClr val="CCCCCC"/>
+                  <a:srgbClr val="2B2F36"/>
                 </a:solidFill>
                 <a:latin typeface="Arial" pitchFamily="34" charset="0"/>
-                <a:ea typeface="Arial" pitchFamily="34" charset="-122"/>
-                <a:cs typeface="Arial" pitchFamily="34" charset="-120"/>
+                <a:ea typeface="BIZ UDPGothic" pitchFamily="34" charset="-122"/>
+                <a:cs typeface="BIZ UDPGothic" pitchFamily="34" charset="-120"/>
               </a:rPr>
               <a:t>人口・予算が都市部に集中し、地方の教育環境の劣化が若年世帯の都市流出を加速させている</a:t>
             </a:r>
@@ -9319,7 +9319,7 @@
     <p:bg>
       <p:bgPr>
         <a:solidFill>
-          <a:srgbClr val="0A0A0A"/>
+          <a:srgbClr val="F5F6F8"/>
         </a:solidFill>
       </p:bgPr>
     </p:bg>
@@ -9364,11 +9364,11 @@
             <a:r>
               <a:rPr lang="en-US" sz="900" b="1" spc="400" kern="0" dirty="0">
                 <a:solidFill>
-                  <a:srgbClr val="D62828"/>
+                  <a:srgbClr val="C8161D"/>
                 </a:solidFill>
                 <a:latin typeface="Arial" pitchFamily="34" charset="0"/>
-                <a:ea typeface="Arial" pitchFamily="34" charset="-122"/>
-                <a:cs typeface="Arial" pitchFamily="34" charset="-120"/>
+                <a:ea typeface="BIZ UDPGothic" pitchFamily="34" charset="-122"/>
+                <a:cs typeface="BIZ UDPGothic" pitchFamily="34" charset="-120"/>
               </a:rPr>
               <a:t>OVERVIEW</a:t>
             </a:r>
@@ -9403,11 +9403,11 @@
             <a:r>
               <a:rPr lang="en-US" sz="2800" b="1" dirty="0">
                 <a:solidFill>
-                  <a:srgbClr val="F5F5F0"/>
-                </a:solidFill>
-                <a:latin typeface="Cambria" pitchFamily="34" charset="0"/>
-                <a:ea typeface="Cambria" pitchFamily="34" charset="-122"/>
-                <a:cs typeface="Cambria" pitchFamily="34" charset="-120"/>
+                  <a:srgbClr val="16181D"/>
+                </a:solidFill>
+                <a:latin typeface="BIZ UDPGothic" pitchFamily="34" charset="0"/>
+                <a:ea typeface="BIZ UDPGothic" pitchFamily="34" charset="-122"/>
+                <a:cs typeface="BIZ UDPGothic" pitchFamily="34" charset="-120"/>
               </a:rPr>
               <a:t>改革の3つの核心</a:t>
             </a:r>
@@ -9430,11 +9430,11 @@
             <a:avLst/>
           </a:prstGeom>
           <a:solidFill>
-            <a:srgbClr val="2E2E2E"/>
+            <a:srgbClr val="DDE0E6"/>
           </a:solidFill>
           <a:ln w="12700">
             <a:solidFill>
-              <a:srgbClr val="2E2E2E"/>
+              <a:srgbClr val="DDE0E6"/>
             </a:solidFill>
             <a:prstDash val="solid"/>
           </a:ln>
@@ -9467,11 +9467,11 @@
             <a:r>
               <a:rPr lang="en-US" sz="1100" dirty="0">
                 <a:solidFill>
-                  <a:srgbClr val="CCCCCC"/>
+                  <a:srgbClr val="2B2F36"/>
                 </a:solidFill>
                 <a:latin typeface="Arial" pitchFamily="34" charset="0"/>
-                <a:ea typeface="Arial" pitchFamily="34" charset="-122"/>
-                <a:cs typeface="Arial" pitchFamily="34" charset="-120"/>
+                <a:ea typeface="BIZ UDPGothic" pitchFamily="34" charset="-122"/>
+                <a:cs typeface="BIZ UDPGothic" pitchFamily="34" charset="-120"/>
               </a:rPr>
               <a:t>6,830億円を回収し、教員給与を最優先で引き上げ。傾斜配分と住民投票で地方を再生する。</a:t>
             </a:r>
@@ -9496,11 +9496,11 @@
             </a:avLst>
           </a:prstGeom>
           <a:solidFill>
-            <a:srgbClr val="1A1414"/>
+            <a:srgbClr val="FCEBEB"/>
           </a:solidFill>
           <a:ln w="12700">
             <a:solidFill>
-              <a:srgbClr val="2E2E2E"/>
+              <a:srgbClr val="DDE0E6"/>
             </a:solidFill>
             <a:prstDash val="solid"/>
           </a:ln>
@@ -9523,11 +9523,11 @@
             </a:avLst>
           </a:prstGeom>
           <a:solidFill>
-            <a:srgbClr val="D62828"/>
+            <a:srgbClr val="C8161D"/>
           </a:solidFill>
           <a:ln w="12700">
             <a:solidFill>
-              <a:srgbClr val="D62828"/>
+              <a:srgbClr val="C8161D"/>
             </a:solidFill>
             <a:prstDash val="solid"/>
           </a:ln>
@@ -9560,11 +9560,11 @@
             <a:r>
               <a:rPr lang="en-US" sz="2000" b="1" dirty="0">
                 <a:solidFill>
-                  <a:srgbClr val="F5F5F0"/>
+                  <a:srgbClr val="FFFFFF"/>
                 </a:solidFill>
                 <a:latin typeface="Arial" pitchFamily="34" charset="0"/>
-                <a:ea typeface="Arial" pitchFamily="34" charset="-122"/>
-                <a:cs typeface="Arial" pitchFamily="34" charset="-120"/>
+                <a:ea typeface="BIZ UDPGothic" pitchFamily="34" charset="-122"/>
+                <a:cs typeface="BIZ UDPGothic" pitchFamily="34" charset="-120"/>
               </a:rPr>
               <a:t>①</a:t>
             </a:r>
@@ -9599,11 +9599,11 @@
             <a:r>
               <a:rPr lang="en-US" sz="1300" b="1" dirty="0">
                 <a:solidFill>
-                  <a:srgbClr val="F5F5F0"/>
-                </a:solidFill>
-                <a:latin typeface="Cambria" pitchFamily="34" charset="0"/>
-                <a:ea typeface="Cambria" pitchFamily="34" charset="-122"/>
-                <a:cs typeface="Cambria" pitchFamily="34" charset="-120"/>
+                  <a:srgbClr val="16181D"/>
+                </a:solidFill>
+                <a:latin typeface="BIZ UDPGothic" pitchFamily="34" charset="0"/>
+                <a:ea typeface="BIZ UDPGothic" pitchFamily="34" charset="-122"/>
+                <a:cs typeface="BIZ UDPGothic" pitchFamily="34" charset="-120"/>
               </a:rPr>
               <a:t>私立補助金の</a:t>
             </a:r>
@@ -9616,11 +9616,11 @@
             <a:r>
               <a:rPr lang="en-US" sz="1300" b="1" dirty="0">
                 <a:solidFill>
-                  <a:srgbClr val="F5F5F0"/>
-                </a:solidFill>
-                <a:latin typeface="Cambria" pitchFamily="34" charset="0"/>
-                <a:ea typeface="Cambria" pitchFamily="34" charset="-122"/>
-                <a:cs typeface="Cambria" pitchFamily="34" charset="-120"/>
+                  <a:srgbClr val="16181D"/>
+                </a:solidFill>
+                <a:latin typeface="BIZ UDPGothic" pitchFamily="34" charset="0"/>
+                <a:ea typeface="BIZ UDPGothic" pitchFamily="34" charset="-122"/>
+                <a:cs typeface="BIZ UDPGothic" pitchFamily="34" charset="-120"/>
               </a:rPr>
               <a:t>全面廃止と公立化</a:t>
             </a:r>
@@ -9643,11 +9643,11 @@
             <a:avLst/>
           </a:prstGeom>
           <a:solidFill>
-            <a:srgbClr val="2E2E2E"/>
+            <a:srgbClr val="DDE0E6"/>
           </a:solidFill>
           <a:ln w="12700">
             <a:solidFill>
-              <a:srgbClr val="2E2E2E"/>
+              <a:srgbClr val="DDE0E6"/>
             </a:solidFill>
             <a:prstDash val="solid"/>
           </a:ln>
@@ -9680,11 +9680,11 @@
             <a:r>
               <a:rPr lang="en-US" sz="1000" dirty="0">
                 <a:solidFill>
-                  <a:srgbClr val="CCCCCC"/>
+                  <a:srgbClr val="2B2F36"/>
                 </a:solidFill>
                 <a:latin typeface="Arial" pitchFamily="34" charset="0"/>
-                <a:ea typeface="Arial" pitchFamily="34" charset="-122"/>
-                <a:cs typeface="Arial" pitchFamily="34" charset="-120"/>
+                <a:ea typeface="BIZ UDPGothic" pitchFamily="34" charset="-122"/>
+                <a:cs typeface="BIZ UDPGothic" pitchFamily="34" charset="-120"/>
               </a:rPr>
               <a:t>6,830億円を回収</a:t>
             </a:r>
@@ -9697,11 +9697,11 @@
             <a:r>
               <a:rPr lang="en-US" sz="1000" dirty="0">
                 <a:solidFill>
-                  <a:srgbClr val="CCCCCC"/>
+                  <a:srgbClr val="2B2F36"/>
                 </a:solidFill>
                 <a:latin typeface="Arial" pitchFamily="34" charset="0"/>
-                <a:ea typeface="Arial" pitchFamily="34" charset="-122"/>
-                <a:cs typeface="Arial" pitchFamily="34" charset="-120"/>
+                <a:ea typeface="BIZ UDPGothic" pitchFamily="34" charset="-122"/>
+                <a:cs typeface="BIZ UDPGothic" pitchFamily="34" charset="-120"/>
               </a:rPr>
               <a:t>教員給与引き上げ最優先</a:t>
             </a:r>
@@ -9714,11 +9714,11 @@
             <a:r>
               <a:rPr lang="en-US" sz="1000" dirty="0">
                 <a:solidFill>
-                  <a:srgbClr val="CCCCCC"/>
+                  <a:srgbClr val="2B2F36"/>
                 </a:solidFill>
                 <a:latin typeface="Arial" pitchFamily="34" charset="0"/>
-                <a:ea typeface="Arial" pitchFamily="34" charset="-122"/>
-                <a:cs typeface="Arial" pitchFamily="34" charset="-120"/>
+                <a:ea typeface="BIZ UDPGothic" pitchFamily="34" charset="-122"/>
+                <a:cs typeface="BIZ UDPGothic" pitchFamily="34" charset="-120"/>
               </a:rPr>
               <a:t>廃校でなく転換・移行3年</a:t>
             </a:r>
@@ -9743,11 +9743,11 @@
             </a:avLst>
           </a:prstGeom>
           <a:solidFill>
-            <a:srgbClr val="141A14"/>
+            <a:srgbClr val="E9EFF8"/>
           </a:solidFill>
           <a:ln w="12700">
             <a:solidFill>
-              <a:srgbClr val="2E2E2E"/>
+              <a:srgbClr val="DDE0E6"/>
             </a:solidFill>
             <a:prstDash val="solid"/>
           </a:ln>
@@ -9770,11 +9770,11 @@
             </a:avLst>
           </a:prstGeom>
           <a:solidFill>
-            <a:srgbClr val="D62828"/>
+            <a:srgbClr val="C8161D"/>
           </a:solidFill>
           <a:ln w="12700">
             <a:solidFill>
-              <a:srgbClr val="D62828"/>
+              <a:srgbClr val="C8161D"/>
             </a:solidFill>
             <a:prstDash val="solid"/>
           </a:ln>
@@ -9807,11 +9807,11 @@
             <a:r>
               <a:rPr lang="en-US" sz="2000" b="1" dirty="0">
                 <a:solidFill>
-                  <a:srgbClr val="F5F5F0"/>
+                  <a:srgbClr val="FFFFFF"/>
                 </a:solidFill>
                 <a:latin typeface="Arial" pitchFamily="34" charset="0"/>
-                <a:ea typeface="Arial" pitchFamily="34" charset="-122"/>
-                <a:cs typeface="Arial" pitchFamily="34" charset="-120"/>
+                <a:ea typeface="BIZ UDPGothic" pitchFamily="34" charset="-122"/>
+                <a:cs typeface="BIZ UDPGothic" pitchFamily="34" charset="-120"/>
               </a:rPr>
               <a:t>②</a:t>
             </a:r>
@@ -9846,11 +9846,11 @@
             <a:r>
               <a:rPr lang="en-US" sz="1300" b="1" dirty="0">
                 <a:solidFill>
-                  <a:srgbClr val="F5F5F0"/>
-                </a:solidFill>
-                <a:latin typeface="Cambria" pitchFamily="34" charset="0"/>
-                <a:ea typeface="Cambria" pitchFamily="34" charset="-122"/>
-                <a:cs typeface="Cambria" pitchFamily="34" charset="-120"/>
+                  <a:srgbClr val="16181D"/>
+                </a:solidFill>
+                <a:latin typeface="BIZ UDPGothic" pitchFamily="34" charset="0"/>
+                <a:ea typeface="BIZ UDPGothic" pitchFamily="34" charset="-122"/>
+                <a:cs typeface="BIZ UDPGothic" pitchFamily="34" charset="-120"/>
               </a:rPr>
               <a:t>過疎地傾斜配分と</a:t>
             </a:r>
@@ -9863,11 +9863,11 @@
             <a:r>
               <a:rPr lang="en-US" sz="1300" b="1" dirty="0">
                 <a:solidFill>
-                  <a:srgbClr val="F5F5F0"/>
-                </a:solidFill>
-                <a:latin typeface="Cambria" pitchFamily="34" charset="0"/>
-                <a:ea typeface="Cambria" pitchFamily="34" charset="-122"/>
-                <a:cs typeface="Cambria" pitchFamily="34" charset="-120"/>
+                  <a:srgbClr val="16181D"/>
+                </a:solidFill>
+                <a:latin typeface="BIZ UDPGothic" pitchFamily="34" charset="0"/>
+                <a:ea typeface="BIZ UDPGothic" pitchFamily="34" charset="-122"/>
+                <a:cs typeface="BIZ UDPGothic" pitchFamily="34" charset="-120"/>
               </a:rPr>
               <a:t>80/20分割設計</a:t>
             </a:r>
@@ -9890,11 +9890,11 @@
             <a:avLst/>
           </a:prstGeom>
           <a:solidFill>
-            <a:srgbClr val="2E2E2E"/>
+            <a:srgbClr val="DDE0E6"/>
           </a:solidFill>
           <a:ln w="12700">
             <a:solidFill>
-              <a:srgbClr val="2E2E2E"/>
+              <a:srgbClr val="DDE0E6"/>
             </a:solidFill>
             <a:prstDash val="solid"/>
           </a:ln>
@@ -9927,11 +9927,11 @@
             <a:r>
               <a:rPr lang="en-US" sz="1000" dirty="0">
                 <a:solidFill>
-                  <a:srgbClr val="CCCCCC"/>
+                  <a:srgbClr val="2B2F36"/>
                 </a:solidFill>
                 <a:latin typeface="Arial" pitchFamily="34" charset="0"/>
-                <a:ea typeface="Arial" pitchFamily="34" charset="-122"/>
-                <a:cs typeface="Arial" pitchFamily="34" charset="-120"/>
+                <a:ea typeface="BIZ UDPGothic" pitchFamily="34" charset="-122"/>
+                <a:cs typeface="BIZ UDPGothic" pitchFamily="34" charset="-120"/>
               </a:rPr>
               <a:t>80%→学校</a:t>
             </a:r>
@@ -9944,11 +9944,11 @@
             <a:r>
               <a:rPr lang="en-US" sz="1000" dirty="0">
                 <a:solidFill>
-                  <a:srgbClr val="CCCCCC"/>
+                  <a:srgbClr val="2B2F36"/>
                 </a:solidFill>
                 <a:latin typeface="Arial" pitchFamily="34" charset="0"/>
-                <a:ea typeface="Arial" pitchFamily="34" charset="-122"/>
-                <a:cs typeface="Arial" pitchFamily="34" charset="-120"/>
+                <a:ea typeface="BIZ UDPGothic" pitchFamily="34" charset="-122"/>
+                <a:cs typeface="BIZ UDPGothic" pitchFamily="34" charset="-120"/>
               </a:rPr>
               <a:t>20%→インフラ・企業誘致</a:t>
             </a:r>
@@ -9961,11 +9961,11 @@
             <a:r>
               <a:rPr lang="en-US" sz="1000" dirty="0">
                 <a:solidFill>
-                  <a:srgbClr val="CCCCCC"/>
+                  <a:srgbClr val="2B2F36"/>
                 </a:solidFill>
                 <a:latin typeface="Arial" pitchFamily="34" charset="0"/>
-                <a:ea typeface="Arial" pitchFamily="34" charset="-122"/>
-                <a:cs typeface="Arial" pitchFamily="34" charset="-120"/>
+                <a:ea typeface="BIZ UDPGothic" pitchFamily="34" charset="-122"/>
+                <a:cs typeface="BIZ UDPGothic" pitchFamily="34" charset="-120"/>
               </a:rPr>
               <a:t>住民投票で使途確定</a:t>
             </a:r>
@@ -9990,11 +9990,11 @@
             </a:avLst>
           </a:prstGeom>
           <a:solidFill>
-            <a:srgbClr val="14141A"/>
+            <a:srgbClr val="E9EFF8"/>
           </a:solidFill>
           <a:ln w="12700">
             <a:solidFill>
-              <a:srgbClr val="2E2E2E"/>
+              <a:srgbClr val="DDE0E6"/>
             </a:solidFill>
             <a:prstDash val="solid"/>
           </a:ln>
@@ -10017,11 +10017,11 @@
             </a:avLst>
           </a:prstGeom>
           <a:solidFill>
-            <a:srgbClr val="D62828"/>
+            <a:srgbClr val="C8161D"/>
           </a:solidFill>
           <a:ln w="12700">
             <a:solidFill>
-              <a:srgbClr val="D62828"/>
+              <a:srgbClr val="C8161D"/>
             </a:solidFill>
             <a:prstDash val="solid"/>
           </a:ln>
@@ -10054,11 +10054,11 @@
             <a:r>
               <a:rPr lang="en-US" sz="2000" b="1" dirty="0">
                 <a:solidFill>
-                  <a:srgbClr val="F5F5F0"/>
+                  <a:srgbClr val="FFFFFF"/>
                 </a:solidFill>
                 <a:latin typeface="Arial" pitchFamily="34" charset="0"/>
-                <a:ea typeface="Arial" pitchFamily="34" charset="-122"/>
-                <a:cs typeface="Arial" pitchFamily="34" charset="-120"/>
+                <a:ea typeface="BIZ UDPGothic" pitchFamily="34" charset="-122"/>
+                <a:cs typeface="BIZ UDPGothic" pitchFamily="34" charset="-120"/>
               </a:rPr>
               <a:t>③</a:t>
             </a:r>
@@ -10093,11 +10093,11 @@
             <a:r>
               <a:rPr lang="en-US" sz="1300" b="1" dirty="0">
                 <a:solidFill>
-                  <a:srgbClr val="F5F5F0"/>
-                </a:solidFill>
-                <a:latin typeface="Cambria" pitchFamily="34" charset="0"/>
-                <a:ea typeface="Cambria" pitchFamily="34" charset="-122"/>
-                <a:cs typeface="Cambria" pitchFamily="34" charset="-120"/>
+                  <a:srgbClr val="16181D"/>
+                </a:solidFill>
+                <a:latin typeface="BIZ UDPGothic" pitchFamily="34" charset="0"/>
+                <a:ea typeface="BIZ UDPGothic" pitchFamily="34" charset="-122"/>
+                <a:cs typeface="BIZ UDPGothic" pitchFamily="34" charset="-120"/>
               </a:rPr>
               <a:t>教育権限の</a:t>
             </a:r>
@@ -10110,11 +10110,11 @@
             <a:r>
               <a:rPr lang="en-US" sz="1300" b="1" dirty="0">
                 <a:solidFill>
-                  <a:srgbClr val="F5F5F0"/>
-                </a:solidFill>
-                <a:latin typeface="Cambria" pitchFamily="34" charset="0"/>
-                <a:ea typeface="Cambria" pitchFamily="34" charset="-122"/>
-                <a:cs typeface="Cambria" pitchFamily="34" charset="-120"/>
+                  <a:srgbClr val="16181D"/>
+                </a:solidFill>
+                <a:latin typeface="BIZ UDPGothic" pitchFamily="34" charset="0"/>
+                <a:ea typeface="BIZ UDPGothic" pitchFamily="34" charset="-122"/>
+                <a:cs typeface="BIZ UDPGothic" pitchFamily="34" charset="-120"/>
               </a:rPr>
               <a:t>国→都道府県・学校委譲</a:t>
             </a:r>
@@ -10137,11 +10137,11 @@
             <a:avLst/>
           </a:prstGeom>
           <a:solidFill>
-            <a:srgbClr val="2E2E2E"/>
+            <a:srgbClr val="DDE0E6"/>
           </a:solidFill>
           <a:ln w="12700">
             <a:solidFill>
-              <a:srgbClr val="2E2E2E"/>
+              <a:srgbClr val="DDE0E6"/>
             </a:solidFill>
             <a:prstDash val="solid"/>
           </a:ln>
@@ -10174,11 +10174,11 @@
             <a:r>
               <a:rPr lang="en-US" sz="1000" dirty="0">
                 <a:solidFill>
-                  <a:srgbClr val="CCCCCC"/>
+                  <a:srgbClr val="2B2F36"/>
                 </a:solidFill>
                 <a:latin typeface="Arial" pitchFamily="34" charset="0"/>
-                <a:ea typeface="Arial" pitchFamily="34" charset="-122"/>
-                <a:cs typeface="Arial" pitchFamily="34" charset="-120"/>
+                <a:ea typeface="BIZ UDPGothic" pitchFamily="34" charset="-122"/>
+                <a:cs typeface="BIZ UDPGothic" pitchFamily="34" charset="-120"/>
               </a:rPr>
               <a:t>学習指導要領廃止</a:t>
             </a:r>
@@ -10191,11 +10191,11 @@
             <a:r>
               <a:rPr lang="en-US" sz="1000" dirty="0">
                 <a:solidFill>
-                  <a:srgbClr val="CCCCCC"/>
+                  <a:srgbClr val="2B2F36"/>
                 </a:solidFill>
                 <a:latin typeface="Arial" pitchFamily="34" charset="0"/>
-                <a:ea typeface="Arial" pitchFamily="34" charset="-122"/>
-                <a:cs typeface="Arial" pitchFamily="34" charset="-120"/>
+                <a:ea typeface="BIZ UDPGothic" pitchFamily="34" charset="-122"/>
+                <a:cs typeface="BIZ UDPGothic" pitchFamily="34" charset="-120"/>
               </a:rPr>
               <a:t>地域産業連動の</a:t>
             </a:r>
@@ -10208,11 +10208,11 @@
             <a:r>
               <a:rPr lang="en-US" sz="1000" dirty="0">
                 <a:solidFill>
-                  <a:srgbClr val="CCCCCC"/>
+                  <a:srgbClr val="2B2F36"/>
                 </a:solidFill>
                 <a:latin typeface="Arial" pitchFamily="34" charset="0"/>
-                <a:ea typeface="Arial" pitchFamily="34" charset="-122"/>
-                <a:cs typeface="Arial" pitchFamily="34" charset="-120"/>
+                <a:ea typeface="BIZ UDPGothic" pitchFamily="34" charset="-122"/>
+                <a:cs typeface="BIZ UDPGothic" pitchFamily="34" charset="-120"/>
               </a:rPr>
               <a:t>専門学部創設</a:t>
             </a:r>
@@ -10234,7 +10234,7 @@
     <p:bg>
       <p:bgPr>
         <a:solidFill>
-          <a:srgbClr val="0A0A0A"/>
+          <a:srgbClr val="F5F6F8"/>
         </a:solidFill>
       </p:bgPr>
     </p:bg>
@@ -10279,11 +10279,11 @@
             <a:r>
               <a:rPr lang="en-US" sz="900" b="1" spc="400" kern="0" dirty="0">
                 <a:solidFill>
-                  <a:srgbClr val="D62828"/>
+                  <a:srgbClr val="C8161D"/>
                 </a:solidFill>
                 <a:latin typeface="Arial" pitchFamily="34" charset="0"/>
-                <a:ea typeface="Arial" pitchFamily="34" charset="-122"/>
-                <a:cs typeface="Arial" pitchFamily="34" charset="-120"/>
+                <a:ea typeface="BIZ UDPGothic" pitchFamily="34" charset="-122"/>
+                <a:cs typeface="BIZ UDPGothic" pitchFamily="34" charset="-120"/>
               </a:rPr>
               <a:t>CORE 01</a:t>
             </a:r>
@@ -10318,11 +10318,11 @@
             <a:r>
               <a:rPr lang="en-US" sz="2800" b="1" dirty="0">
                 <a:solidFill>
-                  <a:srgbClr val="F5F5F0"/>
-                </a:solidFill>
-                <a:latin typeface="Cambria" pitchFamily="34" charset="0"/>
-                <a:ea typeface="Cambria" pitchFamily="34" charset="-122"/>
-                <a:cs typeface="Cambria" pitchFamily="34" charset="-120"/>
+                  <a:srgbClr val="16181D"/>
+                </a:solidFill>
+                <a:latin typeface="BIZ UDPGothic" pitchFamily="34" charset="0"/>
+                <a:ea typeface="BIZ UDPGothic" pitchFamily="34" charset="-122"/>
+                <a:cs typeface="BIZ UDPGothic" pitchFamily="34" charset="-120"/>
               </a:rPr>
               <a:t>私立補助金の全面廃止：6,830億円を回収する</a:t>
             </a:r>
@@ -10345,11 +10345,11 @@
             <a:avLst/>
           </a:prstGeom>
           <a:solidFill>
-            <a:srgbClr val="2E2E2E"/>
+            <a:srgbClr val="DDE0E6"/>
           </a:solidFill>
           <a:ln w="12700">
             <a:solidFill>
-              <a:srgbClr val="2E2E2E"/>
+              <a:srgbClr val="DDE0E6"/>
             </a:solidFill>
             <a:prstDash val="solid"/>
           </a:ln>
@@ -10372,11 +10372,11 @@
             </a:avLst>
           </a:prstGeom>
           <a:solidFill>
-            <a:srgbClr val="1A0808"/>
+            <a:srgbClr val="FCEBEB"/>
           </a:solidFill>
           <a:ln w="12700">
             <a:solidFill>
-              <a:srgbClr val="2E2E2E"/>
+              <a:srgbClr val="DDE0E6"/>
             </a:solidFill>
             <a:prstDash val="solid"/>
           </a:ln>
@@ -10409,11 +10409,11 @@
             <a:r>
               <a:rPr lang="en-US" sz="1400" b="1" dirty="0">
                 <a:solidFill>
-                  <a:srgbClr val="F5F5F0"/>
-                </a:solidFill>
-                <a:latin typeface="Cambria" pitchFamily="34" charset="0"/>
-                <a:ea typeface="Cambria" pitchFamily="34" charset="-122"/>
-                <a:cs typeface="Cambria" pitchFamily="34" charset="-120"/>
+                  <a:srgbClr val="16181D"/>
+                </a:solidFill>
+                <a:latin typeface="BIZ UDPGothic" pitchFamily="34" charset="0"/>
+                <a:ea typeface="BIZ UDPGothic" pitchFamily="34" charset="-122"/>
+                <a:cs typeface="BIZ UDPGothic" pitchFamily="34" charset="-120"/>
               </a:rPr>
               <a:t>高等学校等就学支援金（私立・所得制限撤廃分）</a:t>
             </a:r>
@@ -10448,11 +10448,11 @@
             <a:r>
               <a:rPr lang="en-US" sz="1800" b="1" dirty="0">
                 <a:solidFill>
-                  <a:srgbClr val="D62828"/>
-                </a:solidFill>
-                <a:latin typeface="Cambria" pitchFamily="34" charset="0"/>
-                <a:ea typeface="Cambria" pitchFamily="34" charset="-122"/>
-                <a:cs typeface="Cambria" pitchFamily="34" charset="-120"/>
+                  <a:srgbClr val="C8161D"/>
+                </a:solidFill>
+                <a:latin typeface="BIZ UDPGothic" pitchFamily="34" charset="0"/>
+                <a:ea typeface="BIZ UDPGothic" pitchFamily="34" charset="-122"/>
+                <a:cs typeface="BIZ UDPGothic" pitchFamily="34" charset="-120"/>
               </a:rPr>
               <a:t>5,824億円</a:t>
             </a:r>
@@ -10477,11 +10477,11 @@
             </a:avLst>
           </a:prstGeom>
           <a:solidFill>
-            <a:srgbClr val="1A0808"/>
+            <a:srgbClr val="FCEBEB"/>
           </a:solidFill>
           <a:ln w="12700">
             <a:solidFill>
-              <a:srgbClr val="2E2E2E"/>
+              <a:srgbClr val="DDE0E6"/>
             </a:solidFill>
             <a:prstDash val="solid"/>
           </a:ln>
@@ -10514,11 +10514,11 @@
             <a:r>
               <a:rPr lang="en-US" sz="1400" b="1" dirty="0">
                 <a:solidFill>
-                  <a:srgbClr val="F5F5F0"/>
-                </a:solidFill>
-                <a:latin typeface="Cambria" pitchFamily="34" charset="0"/>
-                <a:ea typeface="Cambria" pitchFamily="34" charset="-122"/>
-                <a:cs typeface="Cambria" pitchFamily="34" charset="-120"/>
+                  <a:srgbClr val="16181D"/>
+                </a:solidFill>
+                <a:latin typeface="BIZ UDPGothic" pitchFamily="34" charset="0"/>
+                <a:ea typeface="BIZ UDPGothic" pitchFamily="34" charset="-122"/>
+                <a:cs typeface="BIZ UDPGothic" pitchFamily="34" charset="-120"/>
               </a:rPr>
               <a:t>私立高等学校等経常費助成費（私学助成）</a:t>
             </a:r>
@@ -10553,11 +10553,11 @@
             <a:r>
               <a:rPr lang="en-US" sz="1800" b="1" dirty="0">
                 <a:solidFill>
-                  <a:srgbClr val="D62828"/>
-                </a:solidFill>
-                <a:latin typeface="Cambria" pitchFamily="34" charset="0"/>
-                <a:ea typeface="Cambria" pitchFamily="34" charset="-122"/>
-                <a:cs typeface="Cambria" pitchFamily="34" charset="-120"/>
+                  <a:srgbClr val="C8161D"/>
+                </a:solidFill>
+                <a:latin typeface="BIZ UDPGothic" pitchFamily="34" charset="0"/>
+                <a:ea typeface="BIZ UDPGothic" pitchFamily="34" charset="-122"/>
+                <a:cs typeface="BIZ UDPGothic" pitchFamily="34" charset="-120"/>
               </a:rPr>
               <a:t>1,006億円</a:t>
             </a:r>
@@ -10582,11 +10582,11 @@
             </a:avLst>
           </a:prstGeom>
           <a:solidFill>
-            <a:srgbClr val="D62828"/>
+            <a:srgbClr val="C8161D"/>
           </a:solidFill>
           <a:ln w="12700">
             <a:solidFill>
-              <a:srgbClr val="D62828"/>
+              <a:srgbClr val="C8161D"/>
             </a:solidFill>
             <a:prstDash val="solid"/>
           </a:ln>
@@ -10619,11 +10619,11 @@
             <a:r>
               <a:rPr lang="en-US" sz="1500" b="1" dirty="0">
                 <a:solidFill>
-                  <a:srgbClr val="F5F5F0"/>
-                </a:solidFill>
-                <a:latin typeface="Cambria" pitchFamily="34" charset="0"/>
-                <a:ea typeface="Cambria" pitchFamily="34" charset="-122"/>
-                <a:cs typeface="Cambria" pitchFamily="34" charset="-120"/>
+                  <a:srgbClr val="FFFFFF"/>
+                </a:solidFill>
+                <a:latin typeface="BIZ UDPGothic" pitchFamily="34" charset="0"/>
+                <a:ea typeface="BIZ UDPGothic" pitchFamily="34" charset="-122"/>
+                <a:cs typeface="BIZ UDPGothic" pitchFamily="34" charset="-120"/>
               </a:rPr>
               <a:t>廃止合計　約6,830億円　→　全額を公立高校・地域インフラへ集中投資</a:t>
             </a:r>
@@ -10648,11 +10648,11 @@
             </a:avLst>
           </a:prstGeom>
           <a:solidFill>
-            <a:srgbClr val="081808"/>
+            <a:srgbClr val="E9EFF8"/>
           </a:solidFill>
           <a:ln w="12700">
             <a:solidFill>
-              <a:srgbClr val="2E2E2E"/>
+              <a:srgbClr val="DDE0E6"/>
             </a:solidFill>
             <a:prstDash val="solid"/>
           </a:ln>
@@ -10685,11 +10685,11 @@
             <a:r>
               <a:rPr lang="en-US" sz="1200" b="1" dirty="0">
                 <a:solidFill>
-                  <a:srgbClr val="4CAF50"/>
-                </a:solidFill>
-                <a:latin typeface="Cambria" pitchFamily="34" charset="0"/>
-                <a:ea typeface="Cambria" pitchFamily="34" charset="-122"/>
-                <a:cs typeface="Cambria" pitchFamily="34" charset="-120"/>
+                  <a:srgbClr val="1D4F91"/>
+                </a:solidFill>
+                <a:latin typeface="BIZ UDPGothic" pitchFamily="34" charset="0"/>
+                <a:ea typeface="BIZ UDPGothic" pitchFamily="34" charset="-122"/>
+                <a:cs typeface="BIZ UDPGothic" pitchFamily="34" charset="-120"/>
               </a:rPr>
               <a:t>回収した予算の使い方：まず最初に教員給与の引き上げに充当（約850億円）→ 残りを80/20分割へ</a:t>
             </a:r>
@@ -10724,11 +10724,11 @@
             <a:r>
               <a:rPr lang="en-US" sz="1000" dirty="0">
                 <a:solidFill>
-                  <a:srgbClr val="CCCCCC"/>
+                  <a:srgbClr val="2B2F36"/>
                 </a:solidFill>
                 <a:latin typeface="Arial" pitchFamily="34" charset="0"/>
-                <a:ea typeface="Arial" pitchFamily="34" charset="-122"/>
-                <a:cs typeface="Arial" pitchFamily="34" charset="-120"/>
+                <a:ea typeface="BIZ UDPGothic" pitchFamily="34" charset="-122"/>
+                <a:cs typeface="BIZ UDPGothic" pitchFamily="34" charset="-120"/>
               </a:rPr>
               <a:t>教育の質は教師の質で決まる。給与引き上げが最優先財源である。</a:t>
             </a:r>
@@ -10750,7 +10750,7 @@
     <p:bg>
       <p:bgPr>
         <a:solidFill>
-          <a:srgbClr val="0A0A0A"/>
+          <a:srgbClr val="F5F6F8"/>
         </a:solidFill>
       </p:bgPr>
     </p:bg>
@@ -10795,11 +10795,11 @@
             <a:r>
               <a:rPr lang="en-US" sz="900" b="1" spc="400" kern="0" dirty="0">
                 <a:solidFill>
-                  <a:srgbClr val="D62828"/>
+                  <a:srgbClr val="C8161D"/>
                 </a:solidFill>
                 <a:latin typeface="Arial" pitchFamily="34" charset="0"/>
-                <a:ea typeface="Arial" pitchFamily="34" charset="-122"/>
-                <a:cs typeface="Arial" pitchFamily="34" charset="-120"/>
+                <a:ea typeface="BIZ UDPGothic" pitchFamily="34" charset="-122"/>
+                <a:cs typeface="BIZ UDPGothic" pitchFamily="34" charset="-120"/>
               </a:rPr>
               <a:t>CORE 01 — PRIORITY</a:t>
             </a:r>
@@ -10834,11 +10834,11 @@
             <a:r>
               <a:rPr lang="en-US" sz="2800" b="1" dirty="0">
                 <a:solidFill>
-                  <a:srgbClr val="F5F5F0"/>
-                </a:solidFill>
-                <a:latin typeface="Cambria" pitchFamily="34" charset="0"/>
-                <a:ea typeface="Cambria" pitchFamily="34" charset="-122"/>
-                <a:cs typeface="Cambria" pitchFamily="34" charset="-120"/>
+                  <a:srgbClr val="16181D"/>
+                </a:solidFill>
+                <a:latin typeface="BIZ UDPGothic" pitchFamily="34" charset="0"/>
+                <a:ea typeface="BIZ UDPGothic" pitchFamily="34" charset="-122"/>
+                <a:cs typeface="BIZ UDPGothic" pitchFamily="34" charset="-120"/>
               </a:rPr>
               <a:t>教員給与の抜本的引き上げ：人に教えることは尊い</a:t>
             </a:r>
@@ -10861,11 +10861,11 @@
             <a:avLst/>
           </a:prstGeom>
           <a:solidFill>
-            <a:srgbClr val="2E2E2E"/>
+            <a:srgbClr val="DDE0E6"/>
           </a:solidFill>
           <a:ln w="12700">
             <a:solidFill>
-              <a:srgbClr val="2E2E2E"/>
+              <a:srgbClr val="DDE0E6"/>
             </a:solidFill>
             <a:prstDash val="solid"/>
           </a:ln>
@@ -10898,11 +10898,11 @@
             <a:r>
               <a:rPr lang="en-US" sz="1100" dirty="0">
                 <a:solidFill>
-                  <a:srgbClr val="CCCCCC"/>
+                  <a:srgbClr val="2B2F36"/>
                 </a:solidFill>
                 <a:latin typeface="Arial" pitchFamily="34" charset="0"/>
-                <a:ea typeface="Arial" pitchFamily="34" charset="-122"/>
-                <a:cs typeface="Arial" pitchFamily="34" charset="-120"/>
+                <a:ea typeface="BIZ UDPGothic" pitchFamily="34" charset="-122"/>
+                <a:cs typeface="BIZ UDPGothic" pitchFamily="34" charset="-120"/>
               </a:rPr>
               <a:t>人に教えるという行為は、本来尊いものである。その価値を給与水準に反映させる。優秀な若者が教職を真剣に選択肢に入れる水準まで引き上げることで、数年後に質の高い人材が教育現場に流入する。</a:t>
             </a:r>
@@ -10927,11 +10927,11 @@
             </a:avLst>
           </a:prstGeom>
           <a:solidFill>
-            <a:srgbClr val="141414"/>
+            <a:srgbClr val="FFFFFF"/>
           </a:solidFill>
           <a:ln w="12700">
             <a:solidFill>
-              <a:srgbClr val="2E2E2E"/>
+              <a:srgbClr val="DDE0E6"/>
             </a:solidFill>
             <a:prstDash val="solid"/>
           </a:ln>
@@ -10954,11 +10954,11 @@
             </a:avLst>
           </a:prstGeom>
           <a:solidFill>
-            <a:srgbClr val="D62828"/>
+            <a:srgbClr val="C8161D"/>
           </a:solidFill>
           <a:ln w="12700">
             <a:solidFill>
-              <a:srgbClr val="D62828"/>
+              <a:srgbClr val="C8161D"/>
             </a:solidFill>
             <a:prstDash val="solid"/>
           </a:ln>
@@ -10991,11 +10991,11 @@
             <a:r>
               <a:rPr lang="en-US" sz="1100" b="1" dirty="0">
                 <a:solidFill>
-                  <a:srgbClr val="F5F5F0"/>
+                  <a:srgbClr val="FFFFFF"/>
                 </a:solidFill>
                 <a:latin typeface="Arial" pitchFamily="34" charset="0"/>
-                <a:ea typeface="Arial" pitchFamily="34" charset="-122"/>
-                <a:cs typeface="Arial" pitchFamily="34" charset="-120"/>
+                <a:ea typeface="BIZ UDPGothic" pitchFamily="34" charset="-122"/>
+                <a:cs typeface="BIZ UDPGothic" pitchFamily="34" charset="-120"/>
               </a:rPr>
               <a:t>高校教員</a:t>
             </a:r>
@@ -11030,11 +11030,11 @@
             <a:r>
               <a:rPr lang="en-US" sz="1100" dirty="0">
                 <a:solidFill>
-                  <a:srgbClr val="F5F5F0"/>
+                  <a:srgbClr val="16181D"/>
                 </a:solidFill>
                 <a:latin typeface="Arial" pitchFamily="34" charset="0"/>
-                <a:ea typeface="Arial" pitchFamily="34" charset="-122"/>
-                <a:cs typeface="Arial" pitchFamily="34" charset="-120"/>
+                <a:ea typeface="BIZ UDPGothic" pitchFamily="34" charset="-122"/>
+                <a:cs typeface="BIZ UDPGothic" pitchFamily="34" charset="-120"/>
               </a:rPr>
               <a:t>上位10%（90パーセンタイル）</a:t>
             </a:r>
@@ -11069,11 +11069,11 @@
             <a:r>
               <a:rPr lang="en-US" sz="1400" b="1" dirty="0">
                 <a:solidFill>
-                  <a:srgbClr val="F5F5F0"/>
-                </a:solidFill>
-                <a:latin typeface="Cambria" pitchFamily="34" charset="0"/>
-                <a:ea typeface="Cambria" pitchFamily="34" charset="-122"/>
-                <a:cs typeface="Cambria" pitchFamily="34" charset="-120"/>
+                  <a:srgbClr val="16181D"/>
+                </a:solidFill>
+                <a:latin typeface="BIZ UDPGothic" pitchFamily="34" charset="0"/>
+                <a:ea typeface="BIZ UDPGothic" pitchFamily="34" charset="-122"/>
+                <a:cs typeface="BIZ UDPGothic" pitchFamily="34" charset="-120"/>
               </a:rPr>
               <a:t>約1,000〜1,100万円</a:t>
             </a:r>
@@ -11108,11 +11108,11 @@
             <a:r>
               <a:rPr lang="en-US" sz="900" dirty="0">
                 <a:solidFill>
-                  <a:srgbClr val="888888"/>
+                  <a:srgbClr val="626875"/>
                 </a:solidFill>
                 <a:latin typeface="Arial" pitchFamily="34" charset="0"/>
-                <a:ea typeface="Arial" pitchFamily="34" charset="-122"/>
-                <a:cs typeface="Arial" pitchFamily="34" charset="-120"/>
+                <a:ea typeface="BIZ UDPGothic" pitchFamily="34" charset="-122"/>
+                <a:cs typeface="BIZ UDPGothic" pitchFamily="34" charset="-120"/>
               </a:rPr>
               <a:t>現行約650万円 → 約1.6倍</a:t>
             </a:r>
@@ -11137,11 +11137,11 @@
             </a:avLst>
           </a:prstGeom>
           <a:solidFill>
-            <a:srgbClr val="141420"/>
+            <a:srgbClr val="E9EFF8"/>
           </a:solidFill>
           <a:ln w="12700">
             <a:solidFill>
-              <a:srgbClr val="2E2E2E"/>
+              <a:srgbClr val="DDE0E6"/>
             </a:solidFill>
             <a:prstDash val="solid"/>
           </a:ln>
@@ -11164,11 +11164,11 @@
             </a:avLst>
           </a:prstGeom>
           <a:solidFill>
-            <a:srgbClr val="D62828"/>
+            <a:srgbClr val="C8161D"/>
           </a:solidFill>
           <a:ln w="12700">
             <a:solidFill>
-              <a:srgbClr val="D62828"/>
+              <a:srgbClr val="C8161D"/>
             </a:solidFill>
             <a:prstDash val="solid"/>
           </a:ln>
@@ -11201,11 +11201,11 @@
             <a:r>
               <a:rPr lang="en-US" sz="1100" b="1" dirty="0">
                 <a:solidFill>
-                  <a:srgbClr val="F5F5F0"/>
+                  <a:srgbClr val="FFFFFF"/>
                 </a:solidFill>
                 <a:latin typeface="Arial" pitchFamily="34" charset="0"/>
-                <a:ea typeface="Arial" pitchFamily="34" charset="-122"/>
-                <a:cs typeface="Arial" pitchFamily="34" charset="-120"/>
+                <a:ea typeface="BIZ UDPGothic" pitchFamily="34" charset="-122"/>
+                <a:cs typeface="BIZ UDPGothic" pitchFamily="34" charset="-120"/>
               </a:rPr>
               <a:t>大学教授（標準）</a:t>
             </a:r>
@@ -11240,11 +11240,11 @@
             <a:r>
               <a:rPr lang="en-US" sz="1100" dirty="0">
                 <a:solidFill>
-                  <a:srgbClr val="4090D0"/>
+                  <a:srgbClr val="1D4F91"/>
                 </a:solidFill>
                 <a:latin typeface="Arial" pitchFamily="34" charset="0"/>
-                <a:ea typeface="Arial" pitchFamily="34" charset="-122"/>
-                <a:cs typeface="Arial" pitchFamily="34" charset="-120"/>
+                <a:ea typeface="BIZ UDPGothic" pitchFamily="34" charset="-122"/>
+                <a:cs typeface="BIZ UDPGothic" pitchFamily="34" charset="-120"/>
               </a:rPr>
               <a:t>上位5〜10%</a:t>
             </a:r>
@@ -11279,11 +11279,11 @@
             <a:r>
               <a:rPr lang="en-US" sz="1400" b="1" dirty="0">
                 <a:solidFill>
-                  <a:srgbClr val="4090D0"/>
-                </a:solidFill>
-                <a:latin typeface="Cambria" pitchFamily="34" charset="0"/>
-                <a:ea typeface="Cambria" pitchFamily="34" charset="-122"/>
-                <a:cs typeface="Cambria" pitchFamily="34" charset="-120"/>
+                  <a:srgbClr val="1D4F91"/>
+                </a:solidFill>
+                <a:latin typeface="BIZ UDPGothic" pitchFamily="34" charset="0"/>
+                <a:ea typeface="BIZ UDPGothic" pitchFamily="34" charset="-122"/>
+                <a:cs typeface="BIZ UDPGothic" pitchFamily="34" charset="-120"/>
               </a:rPr>
               <a:t>約1,100〜1,500万円</a:t>
             </a:r>
@@ -11318,11 +11318,11 @@
             <a:r>
               <a:rPr lang="en-US" sz="900" dirty="0">
                 <a:solidFill>
-                  <a:srgbClr val="888888"/>
+                  <a:srgbClr val="626875"/>
                 </a:solidFill>
                 <a:latin typeface="Arial" pitchFamily="34" charset="0"/>
-                <a:ea typeface="Arial" pitchFamily="34" charset="-122"/>
-                <a:cs typeface="Arial" pitchFamily="34" charset="-120"/>
+                <a:ea typeface="BIZ UDPGothic" pitchFamily="34" charset="-122"/>
+                <a:cs typeface="BIZ UDPGothic" pitchFamily="34" charset="-120"/>
               </a:rPr>
               <a:t>現行約1,100万円 → 上限引き上げ</a:t>
             </a:r>
@@ -11347,11 +11347,11 @@
             </a:avLst>
           </a:prstGeom>
           <a:solidFill>
-            <a:srgbClr val="1A1408"/>
+            <a:srgbClr val="FFF4DB"/>
           </a:solidFill>
           <a:ln w="12700">
             <a:solidFill>
-              <a:srgbClr val="2E2E2E"/>
+              <a:srgbClr val="DDE0E6"/>
             </a:solidFill>
             <a:prstDash val="solid"/>
           </a:ln>
@@ -11374,11 +11374,11 @@
             </a:avLst>
           </a:prstGeom>
           <a:solidFill>
-            <a:srgbClr val="D62828"/>
+            <a:srgbClr val="C8161D"/>
           </a:solidFill>
           <a:ln w="12700">
             <a:solidFill>
-              <a:srgbClr val="D62828"/>
+              <a:srgbClr val="C8161D"/>
             </a:solidFill>
             <a:prstDash val="solid"/>
           </a:ln>
@@ -11411,11 +11411,11 @@
             <a:r>
               <a:rPr lang="en-US" sz="1100" b="1" dirty="0">
                 <a:solidFill>
-                  <a:srgbClr val="F5F5F0"/>
+                  <a:srgbClr val="FFFFFF"/>
                 </a:solidFill>
                 <a:latin typeface="Arial" pitchFamily="34" charset="0"/>
-                <a:ea typeface="Arial" pitchFamily="34" charset="-122"/>
-                <a:cs typeface="Arial" pitchFamily="34" charset="-120"/>
+                <a:ea typeface="BIZ UDPGothic" pitchFamily="34" charset="-122"/>
+                <a:cs typeface="BIZ UDPGothic" pitchFamily="34" charset="-120"/>
               </a:rPr>
               <a:t>世界的研究者</a:t>
             </a:r>
@@ -11450,11 +11450,11 @@
             <a:r>
               <a:rPr lang="en-US" sz="1100" dirty="0">
                 <a:solidFill>
-                  <a:srgbClr val="E0A000"/>
+                  <a:srgbClr val="9A6200"/>
                 </a:solidFill>
                 <a:latin typeface="Arial" pitchFamily="34" charset="0"/>
-                <a:ea typeface="Arial" pitchFamily="34" charset="-122"/>
-                <a:cs typeface="Arial" pitchFamily="34" charset="-120"/>
+                <a:ea typeface="BIZ UDPGothic" pitchFamily="34" charset="-122"/>
+                <a:cs typeface="BIZ UDPGothic" pitchFamily="34" charset="-120"/>
               </a:rPr>
               <a:t>上位1%（99パーセンタイル）</a:t>
             </a:r>
@@ -11489,11 +11489,11 @@
             <a:r>
               <a:rPr lang="en-US" sz="1400" b="1" dirty="0">
                 <a:solidFill>
-                  <a:srgbClr val="E0A000"/>
-                </a:solidFill>
-                <a:latin typeface="Cambria" pitchFamily="34" charset="0"/>
-                <a:ea typeface="Cambria" pitchFamily="34" charset="-122"/>
-                <a:cs typeface="Cambria" pitchFamily="34" charset="-120"/>
+                  <a:srgbClr val="9A6200"/>
+                </a:solidFill>
+                <a:latin typeface="BIZ UDPGothic" pitchFamily="34" charset="0"/>
+                <a:ea typeface="BIZ UDPGothic" pitchFamily="34" charset="-122"/>
+                <a:cs typeface="BIZ UDPGothic" pitchFamily="34" charset="-120"/>
               </a:rPr>
               <a:t>約3,000万円〜</a:t>
             </a:r>
@@ -11528,11 +11528,11 @@
             <a:r>
               <a:rPr lang="en-US" sz="900" dirty="0">
                 <a:solidFill>
-                  <a:srgbClr val="888888"/>
+                  <a:srgbClr val="626875"/>
                 </a:solidFill>
                 <a:latin typeface="Arial" pitchFamily="34" charset="0"/>
-                <a:ea typeface="Arial" pitchFamily="34" charset="-122"/>
-                <a:cs typeface="Arial" pitchFamily="34" charset="-120"/>
+                <a:ea typeface="BIZ UDPGothic" pitchFamily="34" charset="-122"/>
+                <a:cs typeface="BIZ UDPGothic" pitchFamily="34" charset="-120"/>
               </a:rPr>
               <a:t>国際的な人材獲得競争に対応</a:t>
             </a:r>
@@ -11557,11 +11557,11 @@
             </a:avLst>
           </a:prstGeom>
           <a:solidFill>
-            <a:srgbClr val="1A1A1A"/>
+            <a:srgbClr val="FFFFFF"/>
           </a:solidFill>
           <a:ln w="12700">
             <a:solidFill>
-              <a:srgbClr val="2E2E2E"/>
+              <a:srgbClr val="DDE0E6"/>
             </a:solidFill>
             <a:prstDash val="solid"/>
           </a:ln>
@@ -11594,11 +11594,11 @@
             <a:r>
               <a:rPr lang="en-US" sz="1000" dirty="0">
                 <a:solidFill>
-                  <a:srgbClr val="CCCCCC"/>
+                  <a:srgbClr val="2B2F36"/>
                 </a:solidFill>
                 <a:latin typeface="Arial" pitchFamily="34" charset="0"/>
-                <a:ea typeface="Arial" pitchFamily="34" charset="-122"/>
-                <a:cs typeface="Arial" pitchFamily="34" charset="-120"/>
+                <a:ea typeface="BIZ UDPGothic" pitchFamily="34" charset="-122"/>
+                <a:cs typeface="BIZ UDPGothic" pitchFamily="34" charset="-120"/>
               </a:rPr>
               <a:t>財源試算：高校教員23万人の平均年収を650万→1,050万円へ引き上げ = 追加人件費 約850億円 ／ 6,830億円の範囲内で吸収可能</a:t>
             </a:r>
@@ -11620,7 +11620,7 @@
     <p:bg>
       <p:bgPr>
         <a:solidFill>
-          <a:srgbClr val="0A0A0A"/>
+          <a:srgbClr val="F5F6F8"/>
         </a:solidFill>
       </p:bgPr>
     </p:bg>
@@ -11665,11 +11665,11 @@
             <a:r>
               <a:rPr lang="en-US" sz="900" b="1" spc="400" kern="0" dirty="0">
                 <a:solidFill>
-                  <a:srgbClr val="D62828"/>
+                  <a:srgbClr val="C8161D"/>
                 </a:solidFill>
                 <a:latin typeface="Arial" pitchFamily="34" charset="0"/>
-                <a:ea typeface="Arial" pitchFamily="34" charset="-122"/>
-                <a:cs typeface="Arial" pitchFamily="34" charset="-120"/>
+                <a:ea typeface="BIZ UDPGothic" pitchFamily="34" charset="-122"/>
+                <a:cs typeface="BIZ UDPGothic" pitchFamily="34" charset="-120"/>
               </a:rPr>
               <a:t>CORE 01 — IMPACT</a:t>
             </a:r>
@@ -11704,11 +11704,11 @@
             <a:r>
               <a:rPr lang="en-US" sz="2400" b="1" dirty="0">
                 <a:solidFill>
-                  <a:srgbClr val="F5F5F0"/>
-                </a:solidFill>
-                <a:latin typeface="Cambria" pitchFamily="34" charset="0"/>
-                <a:ea typeface="Cambria" pitchFamily="34" charset="-122"/>
-                <a:cs typeface="Cambria" pitchFamily="34" charset="-120"/>
+                  <a:srgbClr val="16181D"/>
+                </a:solidFill>
+                <a:latin typeface="BIZ UDPGothic" pitchFamily="34" charset="0"/>
+                <a:ea typeface="BIZ UDPGothic" pitchFamily="34" charset="-122"/>
+                <a:cs typeface="BIZ UDPGothic" pitchFamily="34" charset="-120"/>
               </a:rPr>
               <a:t>40歳で1,000万円超：教職が「選ばれるキャリア」になる</a:t>
             </a:r>
@@ -11731,11 +11731,11 @@
             <a:avLst/>
           </a:prstGeom>
           <a:solidFill>
-            <a:srgbClr val="2E2E2E"/>
+            <a:srgbClr val="DDE0E6"/>
           </a:solidFill>
           <a:ln w="12700">
             <a:solidFill>
-              <a:srgbClr val="2E2E2E"/>
+              <a:srgbClr val="DDE0E6"/>
             </a:solidFill>
             <a:prstDash val="solid"/>
           </a:ln>
@@ -11768,11 +11768,11 @@
             <a:r>
               <a:rPr lang="en-US" sz="1100" dirty="0">
                 <a:solidFill>
-                  <a:srgbClr val="CCCCCC"/>
+                  <a:srgbClr val="2B2F36"/>
                 </a:solidFill>
                 <a:latin typeface="Arial" pitchFamily="34" charset="0"/>
-                <a:ea typeface="Arial" pitchFamily="34" charset="-122"/>
-                <a:cs typeface="Arial" pitchFamily="34" charset="-120"/>
+                <a:ea typeface="BIZ UDPGothic" pitchFamily="34" charset="-122"/>
+                <a:cs typeface="BIZ UDPGothic" pitchFamily="34" charset="-120"/>
               </a:rPr>
               <a:t>現行の高校教員40歳平均は約650万円。上位10%水準（約1,050万円）へ引き上げることで、教職のポジショニングが根本的に変わる。</a:t>
             </a:r>
@@ -11797,11 +11797,11 @@
             </a:avLst>
           </a:prstGeom>
           <a:solidFill>
-            <a:srgbClr val="141414"/>
+            <a:srgbClr val="FFFFFF"/>
           </a:solidFill>
           <a:ln w="12700">
             <a:solidFill>
-              <a:srgbClr val="2E2E2E"/>
+              <a:srgbClr val="DDE0E6"/>
             </a:solidFill>
             <a:prstDash val="solid"/>
           </a:ln>
@@ -11834,11 +11834,11 @@
             <a:r>
               <a:rPr lang="en-US" sz="1300" dirty="0">
                 <a:solidFill>
-                  <a:srgbClr val="888888"/>
-                </a:solidFill>
-                <a:latin typeface="Cambria" pitchFamily="34" charset="0"/>
-                <a:ea typeface="Cambria" pitchFamily="34" charset="-122"/>
-                <a:cs typeface="Cambria" pitchFamily="34" charset="-120"/>
+                  <a:srgbClr val="626875"/>
+                </a:solidFill>
+                <a:latin typeface="BIZ UDPGothic" pitchFamily="34" charset="0"/>
+                <a:ea typeface="BIZ UDPGothic" pitchFamily="34" charset="-122"/>
+                <a:cs typeface="BIZ UDPGothic" pitchFamily="34" charset="-120"/>
               </a:rPr>
               <a:t>医師（40歳・勤務医）</a:t>
             </a:r>
@@ -11873,11 +11873,11 @@
             <a:r>
               <a:rPr lang="en-US" sz="1400" b="1" dirty="0">
                 <a:solidFill>
-                  <a:srgbClr val="888888"/>
-                </a:solidFill>
-                <a:latin typeface="Cambria" pitchFamily="34" charset="0"/>
-                <a:ea typeface="Cambria" pitchFamily="34" charset="-122"/>
-                <a:cs typeface="Cambria" pitchFamily="34" charset="-120"/>
+                  <a:srgbClr val="626875"/>
+                </a:solidFill>
+                <a:latin typeface="BIZ UDPGothic" pitchFamily="34" charset="0"/>
+                <a:ea typeface="BIZ UDPGothic" pitchFamily="34" charset="-122"/>
+                <a:cs typeface="BIZ UDPGothic" pitchFamily="34" charset="-120"/>
               </a:rPr>
               <a:t>約1,200〜1,500万円</a:t>
             </a:r>
@@ -11902,11 +11902,11 @@
             </a:avLst>
           </a:prstGeom>
           <a:solidFill>
-            <a:srgbClr val="141414"/>
+            <a:srgbClr val="FFFFFF"/>
           </a:solidFill>
           <a:ln w="12700">
             <a:solidFill>
-              <a:srgbClr val="2E2E2E"/>
+              <a:srgbClr val="DDE0E6"/>
             </a:solidFill>
             <a:prstDash val="solid"/>
           </a:ln>
@@ -11939,11 +11939,11 @@
             <a:r>
               <a:rPr lang="en-US" sz="1300" dirty="0">
                 <a:solidFill>
-                  <a:srgbClr val="888888"/>
-                </a:solidFill>
-                <a:latin typeface="Cambria" pitchFamily="34" charset="0"/>
-                <a:ea typeface="Cambria" pitchFamily="34" charset="-122"/>
-                <a:cs typeface="Cambria" pitchFamily="34" charset="-120"/>
+                  <a:srgbClr val="626875"/>
+                </a:solidFill>
+                <a:latin typeface="BIZ UDPGothic" pitchFamily="34" charset="0"/>
+                <a:ea typeface="BIZ UDPGothic" pitchFamily="34" charset="-122"/>
+                <a:cs typeface="BIZ UDPGothic" pitchFamily="34" charset="-120"/>
               </a:rPr>
               <a:t>弁護士（40歳）</a:t>
             </a:r>
@@ -11978,11 +11978,11 @@
             <a:r>
               <a:rPr lang="en-US" sz="1400" b="1" dirty="0">
                 <a:solidFill>
-                  <a:srgbClr val="888888"/>
-                </a:solidFill>
-                <a:latin typeface="Cambria" pitchFamily="34" charset="0"/>
-                <a:ea typeface="Cambria" pitchFamily="34" charset="-122"/>
-                <a:cs typeface="Cambria" pitchFamily="34" charset="-120"/>
+                  <a:srgbClr val="626875"/>
+                </a:solidFill>
+                <a:latin typeface="BIZ UDPGothic" pitchFamily="34" charset="0"/>
+                <a:ea typeface="BIZ UDPGothic" pitchFamily="34" charset="-122"/>
+                <a:cs typeface="BIZ UDPGothic" pitchFamily="34" charset="-120"/>
               </a:rPr>
               <a:t>約800〜1,200万円</a:t>
             </a:r>
@@ -12007,11 +12007,11 @@
             </a:avLst>
           </a:prstGeom>
           <a:solidFill>
-            <a:srgbClr val="141414"/>
+            <a:srgbClr val="FFFFFF"/>
           </a:solidFill>
           <a:ln w="12700">
             <a:solidFill>
-              <a:srgbClr val="2E2E2E"/>
+              <a:srgbClr val="DDE0E6"/>
             </a:solidFill>
             <a:prstDash val="solid"/>
           </a:ln>
@@ -12044,11 +12044,11 @@
             <a:r>
               <a:rPr lang="en-US" sz="1300" dirty="0">
                 <a:solidFill>
-                  <a:srgbClr val="888888"/>
-                </a:solidFill>
-                <a:latin typeface="Cambria" pitchFamily="34" charset="0"/>
-                <a:ea typeface="Cambria" pitchFamily="34" charset="-122"/>
-                <a:cs typeface="Cambria" pitchFamily="34" charset="-120"/>
+                  <a:srgbClr val="626875"/>
+                </a:solidFill>
+                <a:latin typeface="BIZ UDPGothic" pitchFamily="34" charset="0"/>
+                <a:ea typeface="BIZ UDPGothic" pitchFamily="34" charset="-122"/>
+                <a:cs typeface="BIZ UDPGothic" pitchFamily="34" charset="-120"/>
               </a:rPr>
               <a:t>外資コンサル（40歳）</a:t>
             </a:r>
@@ -12083,11 +12083,11 @@
             <a:r>
               <a:rPr lang="en-US" sz="1400" b="1" dirty="0">
                 <a:solidFill>
-                  <a:srgbClr val="888888"/>
-                </a:solidFill>
-                <a:latin typeface="Cambria" pitchFamily="34" charset="0"/>
-                <a:ea typeface="Cambria" pitchFamily="34" charset="-122"/>
-                <a:cs typeface="Cambria" pitchFamily="34" charset="-120"/>
+                  <a:srgbClr val="626875"/>
+                </a:solidFill>
+                <a:latin typeface="BIZ UDPGothic" pitchFamily="34" charset="0"/>
+                <a:ea typeface="BIZ UDPGothic" pitchFamily="34" charset="-122"/>
+                <a:cs typeface="BIZ UDPGothic" pitchFamily="34" charset="-120"/>
               </a:rPr>
               <a:t>約1,000〜2,000万円</a:t>
             </a:r>
@@ -12112,11 +12112,11 @@
             </a:avLst>
           </a:prstGeom>
           <a:solidFill>
-            <a:srgbClr val="081808"/>
+            <a:srgbClr val="E9EFF8"/>
           </a:solidFill>
           <a:ln w="12700">
             <a:solidFill>
-              <a:srgbClr val="2E2E2E"/>
+              <a:srgbClr val="DDE0E6"/>
             </a:solidFill>
             <a:prstDash val="solid"/>
           </a:ln>
@@ -12149,11 +12149,11 @@
             <a:r>
               <a:rPr lang="en-US" sz="1300" b="1" dirty="0">
                 <a:solidFill>
-                  <a:srgbClr val="4CAF50"/>
-                </a:solidFill>
-                <a:latin typeface="Cambria" pitchFamily="34" charset="0"/>
-                <a:ea typeface="Cambria" pitchFamily="34" charset="-122"/>
-                <a:cs typeface="Cambria" pitchFamily="34" charset="-120"/>
+                  <a:srgbClr val="1D4F91"/>
+                </a:solidFill>
+                <a:latin typeface="BIZ UDPGothic" pitchFamily="34" charset="0"/>
+                <a:ea typeface="BIZ UDPGothic" pitchFamily="34" charset="-122"/>
+                <a:cs typeface="BIZ UDPGothic" pitchFamily="34" charset="-120"/>
               </a:rPr>
               <a:t>高校教員【改革後・40歳】</a:t>
             </a:r>
@@ -12188,11 +12188,11 @@
             <a:r>
               <a:rPr lang="en-US" sz="1400" b="1" dirty="0">
                 <a:solidFill>
-                  <a:srgbClr val="4CAF50"/>
-                </a:solidFill>
-                <a:latin typeface="Cambria" pitchFamily="34" charset="0"/>
-                <a:ea typeface="Cambria" pitchFamily="34" charset="-122"/>
-                <a:cs typeface="Cambria" pitchFamily="34" charset="-120"/>
+                  <a:srgbClr val="1D4F91"/>
+                </a:solidFill>
+                <a:latin typeface="BIZ UDPGothic" pitchFamily="34" charset="0"/>
+                <a:ea typeface="BIZ UDPGothic" pitchFamily="34" charset="-122"/>
+                <a:cs typeface="BIZ UDPGothic" pitchFamily="34" charset="-120"/>
               </a:rPr>
               <a:t>約1,000〜1,100万円</a:t>
             </a:r>
@@ -12217,11 +12217,11 @@
             </a:avLst>
           </a:prstGeom>
           <a:solidFill>
-            <a:srgbClr val="1A0808"/>
+            <a:srgbClr val="FCEBEB"/>
           </a:solidFill>
           <a:ln w="12700">
             <a:solidFill>
-              <a:srgbClr val="2E2E2E"/>
+              <a:srgbClr val="DDE0E6"/>
             </a:solidFill>
             <a:prstDash val="solid"/>
           </a:ln>
@@ -12254,11 +12254,11 @@
             <a:r>
               <a:rPr lang="en-US" sz="1300" b="1" dirty="0">
                 <a:solidFill>
-                  <a:srgbClr val="D62828"/>
-                </a:solidFill>
-                <a:latin typeface="Cambria" pitchFamily="34" charset="0"/>
-                <a:ea typeface="Cambria" pitchFamily="34" charset="-122"/>
-                <a:cs typeface="Cambria" pitchFamily="34" charset="-120"/>
+                  <a:srgbClr val="C8161D"/>
+                </a:solidFill>
+                <a:latin typeface="BIZ UDPGothic" pitchFamily="34" charset="0"/>
+                <a:ea typeface="BIZ UDPGothic" pitchFamily="34" charset="-122"/>
+                <a:cs typeface="BIZ UDPGothic" pitchFamily="34" charset="-120"/>
               </a:rPr>
               <a:t>高校教員【現行・40歳】</a:t>
             </a:r>
@@ -12293,11 +12293,11 @@
             <a:r>
               <a:rPr lang="en-US" sz="1400" b="1" dirty="0">
                 <a:solidFill>
-                  <a:srgbClr val="D62828"/>
-                </a:solidFill>
-                <a:latin typeface="Cambria" pitchFamily="34" charset="0"/>
-                <a:ea typeface="Cambria" pitchFamily="34" charset="-122"/>
-                <a:cs typeface="Cambria" pitchFamily="34" charset="-120"/>
+                  <a:srgbClr val="C8161D"/>
+                </a:solidFill>
+                <a:latin typeface="BIZ UDPGothic" pitchFamily="34" charset="0"/>
+                <a:ea typeface="BIZ UDPGothic" pitchFamily="34" charset="-122"/>
+                <a:cs typeface="BIZ UDPGothic" pitchFamily="34" charset="-120"/>
               </a:rPr>
               <a:t>約650万円</a:t>
             </a:r>
@@ -12319,7 +12319,7 @@
     <p:bg>
       <p:bgPr>
         <a:solidFill>
-          <a:srgbClr val="0A0A0A"/>
+          <a:srgbClr val="F5F6F8"/>
         </a:solidFill>
       </p:bgPr>
     </p:bg>
@@ -12364,11 +12364,11 @@
             <a:r>
               <a:rPr lang="en-US" sz="900" b="1" spc="400" kern="0" dirty="0">
                 <a:solidFill>
-                  <a:srgbClr val="D62828"/>
+                  <a:srgbClr val="C8161D"/>
                 </a:solidFill>
                 <a:latin typeface="Arial" pitchFamily="34" charset="0"/>
-                <a:ea typeface="Arial" pitchFamily="34" charset="-122"/>
-                <a:cs typeface="Arial" pitchFamily="34" charset="-120"/>
+                <a:ea typeface="BIZ UDPGothic" pitchFamily="34" charset="-122"/>
+                <a:cs typeface="BIZ UDPGothic" pitchFamily="34" charset="-120"/>
               </a:rPr>
               <a:t>CORE 01 — DESIGN</a:t>
             </a:r>
@@ -12403,11 +12403,11 @@
             <a:r>
               <a:rPr lang="en-US" sz="2400" b="1" dirty="0">
                 <a:solidFill>
-                  <a:srgbClr val="F5F5F0"/>
-                </a:solidFill>
-                <a:latin typeface="Cambria" pitchFamily="34" charset="0"/>
-                <a:ea typeface="Cambria" pitchFamily="34" charset="-122"/>
-                <a:cs typeface="Cambria" pitchFamily="34" charset="-120"/>
+                  <a:srgbClr val="16181D"/>
+                </a:solidFill>
+                <a:latin typeface="BIZ UDPGothic" pitchFamily="34" charset="0"/>
+                <a:ea typeface="BIZ UDPGothic" pitchFamily="34" charset="-122"/>
+                <a:cs typeface="BIZ UDPGothic" pitchFamily="34" charset="-120"/>
               </a:rPr>
               <a:t>廃校でなく「公立化」：受け皿を維持したまま転換する</a:t>
             </a:r>
@@ -12430,11 +12430,11 @@
             <a:avLst/>
           </a:prstGeom>
           <a:solidFill>
-            <a:srgbClr val="2E2E2E"/>
+            <a:srgbClr val="DDE0E6"/>
           </a:solidFill>
           <a:ln w="12700">
             <a:solidFill>
-              <a:srgbClr val="2E2E2E"/>
+              <a:srgbClr val="DDE0E6"/>
             </a:solidFill>
             <a:prstDash val="solid"/>
           </a:ln>
@@ -12467,11 +12467,11 @@
             <a:r>
               <a:rPr lang="en-US" sz="1100" dirty="0">
                 <a:solidFill>
-                  <a:srgbClr val="CCCCCC"/>
+                  <a:srgbClr val="2B2F36"/>
                 </a:solidFill>
                 <a:latin typeface="Arial" pitchFamily="34" charset="0"/>
-                <a:ea typeface="Arial" pitchFamily="34" charset="-122"/>
-                <a:cs typeface="Arial" pitchFamily="34" charset="-120"/>
+                <a:ea typeface="BIZ UDPGothic" pitchFamily="34" charset="-122"/>
+                <a:cs typeface="BIZ UDPGothic" pitchFamily="34" charset="-120"/>
               </a:rPr>
               <a:t>私立を一律廃校にするのではなく、公立高校として転換・存続させる。地方で「私立が消えて受け皿がなくなる」という逆説を完全に回避する。</a:t>
             </a:r>
@@ -12496,11 +12496,11 @@
             </a:avLst>
           </a:prstGeom>
           <a:solidFill>
-            <a:srgbClr val="081808"/>
+            <a:srgbClr val="E9EFF8"/>
           </a:solidFill>
           <a:ln w="12700">
             <a:solidFill>
-              <a:srgbClr val="2E2E2E"/>
+              <a:srgbClr val="DDE0E6"/>
             </a:solidFill>
             <a:prstDash val="solid"/>
           </a:ln>
@@ -12523,11 +12523,11 @@
             </a:avLst>
           </a:prstGeom>
           <a:solidFill>
-            <a:srgbClr val="D62828"/>
+            <a:srgbClr val="C8161D"/>
           </a:solidFill>
           <a:ln w="12700">
             <a:solidFill>
-              <a:srgbClr val="D62828"/>
+              <a:srgbClr val="C8161D"/>
             </a:solidFill>
             <a:prstDash val="solid"/>
           </a:ln>
@@ -12560,11 +12560,11 @@
             <a:r>
               <a:rPr lang="en-US" sz="1100" b="1" dirty="0">
                 <a:solidFill>
-                  <a:srgbClr val="F5F5F0"/>
+                  <a:srgbClr val="FFFFFF"/>
                 </a:solidFill>
                 <a:latin typeface="Arial" pitchFamily="34" charset="0"/>
-                <a:ea typeface="Arial" pitchFamily="34" charset="-122"/>
-                <a:cs typeface="Arial" pitchFamily="34" charset="-120"/>
+                <a:ea typeface="BIZ UDPGothic" pitchFamily="34" charset="-122"/>
+                <a:cs typeface="BIZ UDPGothic" pitchFamily="34" charset="-120"/>
               </a:rPr>
               <a:t>学長が継続意思あり</a:t>
             </a:r>
@@ -12599,11 +12599,11 @@
             <a:r>
               <a:rPr lang="en-US" sz="1100" dirty="0">
                 <a:solidFill>
-                  <a:srgbClr val="CCCCCC"/>
+                  <a:srgbClr val="2B2F36"/>
                 </a:solidFill>
                 <a:latin typeface="Arial" pitchFamily="34" charset="0"/>
-                <a:ea typeface="Arial" pitchFamily="34" charset="-122"/>
-                <a:cs typeface="Arial" pitchFamily="34" charset="-120"/>
+                <a:ea typeface="BIZ UDPGothic" pitchFamily="34" charset="-122"/>
+                <a:cs typeface="BIZ UDPGothic" pitchFamily="34" charset="-120"/>
               </a:rPr>
               <a:t>宗教色を廃止した上で、都道府県の枠内で独自性を一部維持。既存の教職員・カリキュラムを活かして公立として再出発する。</a:t>
             </a:r>
@@ -12628,11 +12628,11 @@
             </a:avLst>
           </a:prstGeom>
           <a:solidFill>
-            <a:srgbClr val="08081A"/>
+            <a:srgbClr val="E9EFF8"/>
           </a:solidFill>
           <a:ln w="12700">
             <a:solidFill>
-              <a:srgbClr val="2E2E2E"/>
+              <a:srgbClr val="DDE0E6"/>
             </a:solidFill>
             <a:prstDash val="solid"/>
           </a:ln>
@@ -12655,11 +12655,11 @@
             </a:avLst>
           </a:prstGeom>
           <a:solidFill>
-            <a:srgbClr val="D62828"/>
+            <a:srgbClr val="C8161D"/>
           </a:solidFill>
           <a:ln w="12700">
             <a:solidFill>
-              <a:srgbClr val="D62828"/>
+              <a:srgbClr val="C8161D"/>
             </a:solidFill>
             <a:prstDash val="solid"/>
           </a:ln>
@@ -12692,11 +12692,11 @@
             <a:r>
               <a:rPr lang="en-US" sz="1100" b="1" dirty="0">
                 <a:solidFill>
-                  <a:srgbClr val="F5F5F0"/>
+                  <a:srgbClr val="FFFFFF"/>
                 </a:solidFill>
                 <a:latin typeface="Arial" pitchFamily="34" charset="0"/>
-                <a:ea typeface="Arial" pitchFamily="34" charset="-122"/>
-                <a:cs typeface="Arial" pitchFamily="34" charset="-120"/>
+                <a:ea typeface="BIZ UDPGothic" pitchFamily="34" charset="-122"/>
+                <a:cs typeface="BIZ UDPGothic" pitchFamily="34" charset="-120"/>
               </a:rPr>
               <a:t>学長が継続意思なし</a:t>
             </a:r>
@@ -12731,11 +12731,11 @@
             <a:r>
               <a:rPr lang="en-US" sz="1100" dirty="0">
                 <a:solidFill>
-                  <a:srgbClr val="CCCCCC"/>
+                  <a:srgbClr val="2B2F36"/>
                 </a:solidFill>
                 <a:latin typeface="Arial" pitchFamily="34" charset="0"/>
-                <a:ea typeface="Arial" pitchFamily="34" charset="-122"/>
-                <a:cs typeface="Arial" pitchFamily="34" charset="-120"/>
+                <a:ea typeface="BIZ UDPGothic" pitchFamily="34" charset="-122"/>
+                <a:cs typeface="BIZ UDPGothic" pitchFamily="34" charset="-120"/>
               </a:rPr>
               <a:t>都道府県が方針・運営を完全に引き継ぐ。施設・教職員を公立として再編し、地域のニーズに合わせたカリキュラムへ転換する。</a:t>
             </a:r>
@@ -12760,11 +12760,11 @@
             </a:avLst>
           </a:prstGeom>
           <a:solidFill>
-            <a:srgbClr val="1A1A1A"/>
+            <a:srgbClr val="FFFFFF"/>
           </a:solidFill>
           <a:ln w="12700">
             <a:solidFill>
-              <a:srgbClr val="2E2E2E"/>
+              <a:srgbClr val="DDE0E6"/>
             </a:solidFill>
             <a:prstDash val="solid"/>
           </a:ln>
@@ -12797,11 +12797,11 @@
             <a:r>
               <a:rPr lang="en-US" sz="1000" dirty="0">
                 <a:solidFill>
-                  <a:srgbClr val="888888"/>
+                  <a:srgbClr val="626875"/>
                 </a:solidFill>
                 <a:latin typeface="Arial" pitchFamily="34" charset="0"/>
-                <a:ea typeface="Arial" pitchFamily="34" charset="-122"/>
-                <a:cs typeface="Arial" pitchFamily="34" charset="-120"/>
+                <a:ea typeface="BIZ UDPGothic" pitchFamily="34" charset="-122"/>
+                <a:cs typeface="BIZ UDPGothic" pitchFamily="34" charset="-120"/>
               </a:rPr>
               <a:t>いずれの場合も宗教教育は廃止。公立としての中立性を担保。</a:t>
             </a:r>
@@ -12814,11 +12814,11 @@
             <a:r>
               <a:rPr lang="en-US" sz="1000" dirty="0">
                 <a:solidFill>
-                  <a:srgbClr val="888888"/>
+                  <a:srgbClr val="626875"/>
                 </a:solidFill>
                 <a:latin typeface="Arial" pitchFamily="34" charset="0"/>
-                <a:ea typeface="Arial" pitchFamily="34" charset="-122"/>
-                <a:cs typeface="Arial" pitchFamily="34" charset="-120"/>
+                <a:ea typeface="BIZ UDPGothic" pitchFamily="34" charset="-122"/>
+                <a:cs typeface="BIZ UDPGothic" pitchFamily="34" charset="-120"/>
               </a:rPr>
               <a:t>真に自立できる私学（民間資金のみで運営可能）は存続を認める。</a:t>
             </a:r>
@@ -12840,7 +12840,7 @@
     <p:bg>
       <p:bgPr>
         <a:solidFill>
-          <a:srgbClr val="0A0A0A"/>
+          <a:srgbClr val="F5F6F8"/>
         </a:solidFill>
       </p:bgPr>
     </p:bg>
@@ -12885,11 +12885,11 @@
             <a:r>
               <a:rPr lang="en-US" sz="900" b="1" spc="400" kern="0" dirty="0">
                 <a:solidFill>
-                  <a:srgbClr val="D62828"/>
+                  <a:srgbClr val="C8161D"/>
                 </a:solidFill>
                 <a:latin typeface="Arial" pitchFamily="34" charset="0"/>
-                <a:ea typeface="Arial" pitchFamily="34" charset="-122"/>
-                <a:cs typeface="Arial" pitchFamily="34" charset="-120"/>
+                <a:ea typeface="BIZ UDPGothic" pitchFamily="34" charset="-122"/>
+                <a:cs typeface="BIZ UDPGothic" pitchFamily="34" charset="-120"/>
               </a:rPr>
               <a:t>CORE 01 — TIMELINE</a:t>
             </a:r>
@@ -12924,11 +12924,11 @@
             <a:r>
               <a:rPr lang="en-US" sz="2800" b="1" dirty="0">
                 <a:solidFill>
-                  <a:srgbClr val="F5F5F0"/>
-                </a:solidFill>
-                <a:latin typeface="Cambria" pitchFamily="34" charset="0"/>
-                <a:ea typeface="Cambria" pitchFamily="34" charset="-122"/>
-                <a:cs typeface="Cambria" pitchFamily="34" charset="-120"/>
+                  <a:srgbClr val="16181D"/>
+                </a:solidFill>
+                <a:latin typeface="BIZ UDPGothic" pitchFamily="34" charset="0"/>
+                <a:ea typeface="BIZ UDPGothic" pitchFamily="34" charset="-122"/>
+                <a:cs typeface="BIZ UDPGothic" pitchFamily="34" charset="-120"/>
               </a:rPr>
               <a:t>移行期間：最低3年で現在の在校生を保護する</a:t>
             </a:r>
@@ -12951,11 +12951,11 @@
             <a:avLst/>
           </a:prstGeom>
           <a:solidFill>
-            <a:srgbClr val="2E2E2E"/>
+            <a:srgbClr val="DDE0E6"/>
           </a:solidFill>
           <a:ln w="12700">
             <a:solidFill>
-              <a:srgbClr val="2E2E2E"/>
+              <a:srgbClr val="DDE0E6"/>
             </a:solidFill>
             <a:prstDash val="solid"/>
           </a:ln>
@@ -12978,11 +12978,11 @@
             </a:avLst>
           </a:prstGeom>
           <a:solidFill>
-            <a:srgbClr val="1A1A1A"/>
+            <a:srgbClr val="FFFFFF"/>
           </a:solidFill>
           <a:ln w="12700">
             <a:solidFill>
-              <a:srgbClr val="2E2E2E"/>
+              <a:srgbClr val="DDE0E6"/>
             </a:solidFill>
             <a:prstDash val="solid"/>
           </a:ln>
@@ -13005,11 +13005,11 @@
             </a:avLst>
           </a:prstGeom>
           <a:solidFill>
-            <a:srgbClr val="D62828"/>
+            <a:srgbClr val="C8161D"/>
           </a:solidFill>
           <a:ln w="12700">
             <a:solidFill>
-              <a:srgbClr val="D62828"/>
+              <a:srgbClr val="C8161D"/>
             </a:solidFill>
             <a:prstDash val="solid"/>
           </a:ln>
@@ -13042,11 +13042,11 @@
             <a:r>
               <a:rPr lang="en-US" sz="1100" b="1" dirty="0">
                 <a:solidFill>
-                  <a:srgbClr val="F5F5F0"/>
+                  <a:srgbClr val="FFFFFF"/>
                 </a:solidFill>
                 <a:latin typeface="Arial" pitchFamily="34" charset="0"/>
-                <a:ea typeface="Arial" pitchFamily="34" charset="-122"/>
-                <a:cs typeface="Arial" pitchFamily="34" charset="-120"/>
+                <a:ea typeface="BIZ UDPGothic" pitchFamily="34" charset="-122"/>
+                <a:cs typeface="BIZ UDPGothic" pitchFamily="34" charset="-120"/>
               </a:rPr>
               <a:t>制度開始（Y年）</a:t>
             </a:r>
@@ -13081,11 +13081,11 @@
             <a:r>
               <a:rPr lang="en-US" sz="1100" dirty="0">
                 <a:solidFill>
-                  <a:srgbClr val="CCCCCC"/>
+                  <a:srgbClr val="2B2F36"/>
                 </a:solidFill>
                 <a:latin typeface="Arial" pitchFamily="34" charset="0"/>
-                <a:ea typeface="Arial" pitchFamily="34" charset="-122"/>
-                <a:cs typeface="Arial" pitchFamily="34" charset="-120"/>
+                <a:ea typeface="BIZ UDPGothic" pitchFamily="34" charset="-122"/>
+                <a:cs typeface="BIZ UDPGothic" pitchFamily="34" charset="-120"/>
               </a:rPr>
               <a:t>制度の全内容を公表。私立高校が公立化の準備を開始。現在の在校生への支援・カリキュラムは現行どおり継続。</a:t>
             </a:r>
@@ -13120,11 +13120,11 @@
             <a:r>
               <a:rPr lang="en-US" sz="1400" dirty="0">
                 <a:solidFill>
-                  <a:srgbClr val="D62828"/>
+                  <a:srgbClr val="C8161D"/>
                 </a:solidFill>
                 <a:latin typeface="Arial" pitchFamily="34" charset="0"/>
-                <a:ea typeface="Arial" pitchFamily="34" charset="-122"/>
-                <a:cs typeface="Arial" pitchFamily="34" charset="-120"/>
+                <a:ea typeface="BIZ UDPGothic" pitchFamily="34" charset="-122"/>
+                <a:cs typeface="BIZ UDPGothic" pitchFamily="34" charset="-120"/>
               </a:rPr>
               <a:t>↓</a:t>
             </a:r>
@@ -13149,11 +13149,11 @@
             </a:avLst>
           </a:prstGeom>
           <a:solidFill>
-            <a:srgbClr val="1A1A1A"/>
+            <a:srgbClr val="FFFFFF"/>
           </a:solidFill>
           <a:ln w="12700">
             <a:solidFill>
-              <a:srgbClr val="2E2E2E"/>
+              <a:srgbClr val="DDE0E6"/>
             </a:solidFill>
             <a:prstDash val="solid"/>
           </a:ln>
@@ -13176,11 +13176,11 @@
             </a:avLst>
           </a:prstGeom>
           <a:solidFill>
-            <a:srgbClr val="D62828"/>
+            <a:srgbClr val="C8161D"/>
           </a:solidFill>
           <a:ln w="12700">
             <a:solidFill>
-              <a:srgbClr val="D62828"/>
+              <a:srgbClr val="C8161D"/>
             </a:solidFill>
             <a:prstDash val="solid"/>
           </a:ln>
@@ -13213,11 +13213,11 @@
             <a:r>
               <a:rPr lang="en-US" sz="1100" b="1" dirty="0">
                 <a:solidFill>
-                  <a:srgbClr val="F5F5F0"/>
+                  <a:srgbClr val="FFFFFF"/>
                 </a:solidFill>
                 <a:latin typeface="Arial" pitchFamily="34" charset="0"/>
-                <a:ea typeface="Arial" pitchFamily="34" charset="-122"/>
-                <a:cs typeface="Arial" pitchFamily="34" charset="-120"/>
+                <a:ea typeface="BIZ UDPGothic" pitchFamily="34" charset="-122"/>
+                <a:cs typeface="BIZ UDPGothic" pitchFamily="34" charset="-120"/>
               </a:rPr>
               <a:t>Y〜Y+3年</a:t>
             </a:r>
@@ -13230,11 +13230,11 @@
             <a:r>
               <a:rPr lang="en-US" sz="1100" b="1" dirty="0">
                 <a:solidFill>
-                  <a:srgbClr val="F5F5F0"/>
+                  <a:srgbClr val="FFFFFF"/>
                 </a:solidFill>
                 <a:latin typeface="Arial" pitchFamily="34" charset="0"/>
-                <a:ea typeface="Arial" pitchFamily="34" charset="-122"/>
-                <a:cs typeface="Arial" pitchFamily="34" charset="-120"/>
+                <a:ea typeface="BIZ UDPGothic" pitchFamily="34" charset="-122"/>
+                <a:cs typeface="BIZ UDPGothic" pitchFamily="34" charset="-120"/>
               </a:rPr>
               <a:t>移行期間</a:t>
             </a:r>
@@ -13269,11 +13269,11 @@
             <a:r>
               <a:rPr lang="en-US" sz="1100" dirty="0">
                 <a:solidFill>
-                  <a:srgbClr val="CCCCCC"/>
+                  <a:srgbClr val="2B2F36"/>
                 </a:solidFill>
                 <a:latin typeface="Arial" pitchFamily="34" charset="0"/>
-                <a:ea typeface="Arial" pitchFamily="34" charset="-122"/>
-                <a:cs typeface="Arial" pitchFamily="34" charset="-120"/>
+                <a:ea typeface="BIZ UDPGothic" pitchFamily="34" charset="-122"/>
+                <a:cs typeface="BIZ UDPGothic" pitchFamily="34" charset="-120"/>
               </a:rPr>
               <a:t>現行制度を継続。在校生は今の私立高校のまま卒業まで通える。公立化の具体的な準備・調整をこの期間に実施する。</a:t>
             </a:r>
@@ -13308,11 +13308,11 @@
             <a:r>
               <a:rPr lang="en-US" sz="1400" dirty="0">
                 <a:solidFill>
-                  <a:srgbClr val="D62828"/>
+                  <a:srgbClr val="C8161D"/>
                 </a:solidFill>
                 <a:latin typeface="Arial" pitchFamily="34" charset="0"/>
-                <a:ea typeface="Arial" pitchFamily="34" charset="-122"/>
-                <a:cs typeface="Arial" pitchFamily="34" charset="-120"/>
+                <a:ea typeface="BIZ UDPGothic" pitchFamily="34" charset="-122"/>
+                <a:cs typeface="BIZ UDPGothic" pitchFamily="34" charset="-120"/>
               </a:rPr>
               <a:t>↓</a:t>
             </a:r>
@@ -13337,11 +13337,11 @@
             </a:avLst>
           </a:prstGeom>
           <a:solidFill>
-            <a:srgbClr val="1A1A1A"/>
+            <a:srgbClr val="FFFFFF"/>
           </a:solidFill>
           <a:ln w="12700">
             <a:solidFill>
-              <a:srgbClr val="2E2E2E"/>
+              <a:srgbClr val="DDE0E6"/>
             </a:solidFill>
             <a:prstDash val="solid"/>
           </a:ln>
@@ -13364,11 +13364,11 @@
             </a:avLst>
           </a:prstGeom>
           <a:solidFill>
-            <a:srgbClr val="D62828"/>
+            <a:srgbClr val="C8161D"/>
           </a:solidFill>
           <a:ln w="12700">
             <a:solidFill>
-              <a:srgbClr val="D62828"/>
+              <a:srgbClr val="C8161D"/>
             </a:solidFill>
             <a:prstDash val="solid"/>
           </a:ln>
@@ -13401,11 +13401,11 @@
             <a:r>
               <a:rPr lang="en-US" sz="1100" b="1" dirty="0">
                 <a:solidFill>
-                  <a:srgbClr val="F5F5F0"/>
+                  <a:srgbClr val="FFFFFF"/>
                 </a:solidFill>
                 <a:latin typeface="Arial" pitchFamily="34" charset="0"/>
-                <a:ea typeface="Arial" pitchFamily="34" charset="-122"/>
-                <a:cs typeface="Arial" pitchFamily="34" charset="-120"/>
+                <a:ea typeface="BIZ UDPGothic" pitchFamily="34" charset="-122"/>
+                <a:cs typeface="BIZ UDPGothic" pitchFamily="34" charset="-120"/>
               </a:rPr>
               <a:t>Y+3年以降</a:t>
             </a:r>
@@ -13418,11 +13418,11 @@
             <a:r>
               <a:rPr lang="en-US" sz="1100" b="1" dirty="0">
                 <a:solidFill>
-                  <a:srgbClr val="F5F5F0"/>
+                  <a:srgbClr val="FFFFFF"/>
                 </a:solidFill>
                 <a:latin typeface="Arial" pitchFamily="34" charset="0"/>
-                <a:ea typeface="Arial" pitchFamily="34" charset="-122"/>
-                <a:cs typeface="Arial" pitchFamily="34" charset="-120"/>
+                <a:ea typeface="BIZ UDPGothic" pitchFamily="34" charset="-122"/>
+                <a:cs typeface="BIZ UDPGothic" pitchFamily="34" charset="-120"/>
               </a:rPr>
               <a:t>公立化実施</a:t>
             </a:r>
@@ -13457,11 +13457,11 @@
             <a:r>
               <a:rPr lang="en-US" sz="1100" dirty="0">
                 <a:solidFill>
-                  <a:srgbClr val="CCCCCC"/>
+                  <a:srgbClr val="2B2F36"/>
                 </a:solidFill>
                 <a:latin typeface="Arial" pitchFamily="34" charset="0"/>
-                <a:ea typeface="Arial" pitchFamily="34" charset="-122"/>
-                <a:cs typeface="Arial" pitchFamily="34" charset="-120"/>
+                <a:ea typeface="BIZ UDPGothic" pitchFamily="34" charset="-122"/>
+                <a:cs typeface="BIZ UDPGothic" pitchFamily="34" charset="-120"/>
               </a:rPr>
               <a:t>私立高校を順次公立化。受け皿は維持したまま公費の投入先を公立に完全集中する。傾斜配分・住民投票の本格稼働開始。</a:t>
             </a:r>
@@ -13483,7 +13483,7 @@
     <p:bg>
       <p:bgPr>
         <a:solidFill>
-          <a:srgbClr val="0A0A0A"/>
+          <a:srgbClr val="F5F6F8"/>
         </a:solidFill>
       </p:bgPr>
     </p:bg>
@@ -13528,11 +13528,11 @@
             <a:r>
               <a:rPr lang="en-US" sz="900" b="1" spc="400" kern="0" dirty="0">
                 <a:solidFill>
-                  <a:srgbClr val="D62828"/>
+                  <a:srgbClr val="C8161D"/>
                 </a:solidFill>
                 <a:latin typeface="Arial" pitchFamily="34" charset="0"/>
-                <a:ea typeface="Arial" pitchFamily="34" charset="-122"/>
-                <a:cs typeface="Arial" pitchFamily="34" charset="-120"/>
+                <a:ea typeface="BIZ UDPGothic" pitchFamily="34" charset="-122"/>
+                <a:cs typeface="BIZ UDPGothic" pitchFamily="34" charset="-120"/>
               </a:rPr>
               <a:t>CORE 02</a:t>
             </a:r>
@@ -13567,11 +13567,11 @@
             <a:r>
               <a:rPr lang="en-US" sz="2800" b="1" dirty="0">
                 <a:solidFill>
-                  <a:srgbClr val="F5F5F0"/>
-                </a:solidFill>
-                <a:latin typeface="Cambria" pitchFamily="34" charset="0"/>
-                <a:ea typeface="Cambria" pitchFamily="34" charset="-122"/>
-                <a:cs typeface="Cambria" pitchFamily="34" charset="-120"/>
+                  <a:srgbClr val="16181D"/>
+                </a:solidFill>
+                <a:latin typeface="BIZ UDPGothic" pitchFamily="34" charset="0"/>
+                <a:ea typeface="BIZ UDPGothic" pitchFamily="34" charset="-122"/>
+                <a:cs typeface="BIZ UDPGothic" pitchFamily="34" charset="-120"/>
               </a:rPr>
               <a:t>予算の80/20分割設計：学校運営が権限を持つ</a:t>
             </a:r>
@@ -13594,11 +13594,11 @@
             <a:avLst/>
           </a:prstGeom>
           <a:solidFill>
-            <a:srgbClr val="2E2E2E"/>
+            <a:srgbClr val="DDE0E6"/>
           </a:solidFill>
           <a:ln w="12700">
             <a:solidFill>
-              <a:srgbClr val="2E2E2E"/>
+              <a:srgbClr val="DDE0E6"/>
             </a:solidFill>
             <a:prstDash val="solid"/>
           </a:ln>
@@ -13621,11 +13621,11 @@
             </a:avLst>
           </a:prstGeom>
           <a:solidFill>
-            <a:srgbClr val="1A1A1A"/>
+            <a:srgbClr val="FFFFFF"/>
           </a:solidFill>
           <a:ln w="12700">
             <a:solidFill>
-              <a:srgbClr val="2E2E2E"/>
+              <a:srgbClr val="DDE0E6"/>
             </a:solidFill>
             <a:prstDash val="solid"/>
           </a:ln>
@@ -13658,11 +13658,11 @@
             <a:r>
               <a:rPr lang="en-US" sz="1200" b="1" dirty="0">
                 <a:solidFill>
-                  <a:srgbClr val="F5F5F0"/>
-                </a:solidFill>
-                <a:latin typeface="Cambria" pitchFamily="34" charset="0"/>
-                <a:ea typeface="Cambria" pitchFamily="34" charset="-122"/>
-                <a:cs typeface="Cambria" pitchFamily="34" charset="-120"/>
+                  <a:srgbClr val="16181D"/>
+                </a:solidFill>
+                <a:latin typeface="BIZ UDPGothic" pitchFamily="34" charset="0"/>
+                <a:ea typeface="BIZ UDPGothic" pitchFamily="34" charset="-122"/>
+                <a:cs typeface="BIZ UDPGothic" pitchFamily="34" charset="-120"/>
               </a:rPr>
               <a:t>国（6,830億円 − 給与引き上げ分）</a:t>
             </a:r>
@@ -13697,11 +13697,11 @@
             <a:r>
               <a:rPr lang="en-US" sz="1800" dirty="0">
                 <a:solidFill>
-                  <a:srgbClr val="D62828"/>
+                  <a:srgbClr val="C8161D"/>
                 </a:solidFill>
                 <a:latin typeface="Arial" pitchFamily="34" charset="0"/>
-                <a:ea typeface="Arial" pitchFamily="34" charset="-122"/>
-                <a:cs typeface="Arial" pitchFamily="34" charset="-120"/>
+                <a:ea typeface="BIZ UDPGothic" pitchFamily="34" charset="-122"/>
+                <a:cs typeface="BIZ UDPGothic" pitchFamily="34" charset="-120"/>
               </a:rPr>
               <a:t>↓</a:t>
             </a:r>
@@ -13726,11 +13726,11 @@
             </a:avLst>
           </a:prstGeom>
           <a:solidFill>
-            <a:srgbClr val="141414"/>
+            <a:srgbClr val="FFFFFF"/>
           </a:solidFill>
           <a:ln w="12700">
             <a:solidFill>
-              <a:srgbClr val="2E2E2E"/>
+              <a:srgbClr val="DDE0E6"/>
             </a:solidFill>
             <a:prstDash val="solid"/>
           </a:ln>
@@ -13763,11 +13763,11 @@
             <a:r>
               <a:rPr lang="en-US" sz="1200" b="1" dirty="0">
                 <a:solidFill>
-                  <a:srgbClr val="F5F5F0"/>
-                </a:solidFill>
-                <a:latin typeface="Cambria" pitchFamily="34" charset="0"/>
-                <a:ea typeface="Cambria" pitchFamily="34" charset="-122"/>
-                <a:cs typeface="Cambria" pitchFamily="34" charset="-120"/>
+                  <a:srgbClr val="16181D"/>
+                </a:solidFill>
+                <a:latin typeface="BIZ UDPGothic" pitchFamily="34" charset="0"/>
+                <a:ea typeface="BIZ UDPGothic" pitchFamily="34" charset="-122"/>
+                <a:cs typeface="BIZ UDPGothic" pitchFamily="34" charset="-120"/>
               </a:rPr>
               <a:t>都道府県（受け取り・分割のみ）</a:t>
             </a:r>
@@ -13802,11 +13802,11 @@
             <a:r>
               <a:rPr lang="en-US" sz="2200" dirty="0">
                 <a:solidFill>
-                  <a:srgbClr val="4090D0"/>
+                  <a:srgbClr val="1D4F91"/>
                 </a:solidFill>
                 <a:latin typeface="Arial" pitchFamily="34" charset="0"/>
-                <a:ea typeface="Arial" pitchFamily="34" charset="-122"/>
-                <a:cs typeface="Arial" pitchFamily="34" charset="-120"/>
+                <a:ea typeface="BIZ UDPGothic" pitchFamily="34" charset="-122"/>
+                <a:cs typeface="BIZ UDPGothic" pitchFamily="34" charset="-120"/>
               </a:rPr>
               <a:t>↙</a:t>
             </a:r>
@@ -13841,11 +13841,11 @@
             <a:r>
               <a:rPr lang="en-US" sz="2200" dirty="0">
                 <a:solidFill>
-                  <a:srgbClr val="4CAF50"/>
+                  <a:srgbClr val="1D4F91"/>
                 </a:solidFill>
                 <a:latin typeface="Arial" pitchFamily="34" charset="0"/>
-                <a:ea typeface="Arial" pitchFamily="34" charset="-122"/>
-                <a:cs typeface="Arial" pitchFamily="34" charset="-120"/>
+                <a:ea typeface="BIZ UDPGothic" pitchFamily="34" charset="-122"/>
+                <a:cs typeface="BIZ UDPGothic" pitchFamily="34" charset="-120"/>
               </a:rPr>
               <a:t>↘</a:t>
             </a:r>
@@ -13870,11 +13870,11 @@
             </a:avLst>
           </a:prstGeom>
           <a:solidFill>
-            <a:srgbClr val="141420"/>
+            <a:srgbClr val="E9EFF8"/>
           </a:solidFill>
           <a:ln w="12700">
             <a:solidFill>
-              <a:srgbClr val="2E2E2E"/>
+              <a:srgbClr val="DDE0E6"/>
             </a:solidFill>
             <a:prstDash val="solid"/>
           </a:ln>
@@ -13907,11 +13907,11 @@
             <a:r>
               <a:rPr lang="en-US" sz="2200" b="1" dirty="0">
                 <a:solidFill>
-                  <a:srgbClr val="4090D0"/>
-                </a:solidFill>
-                <a:latin typeface="Cambria" pitchFamily="34" charset="0"/>
-                <a:ea typeface="Cambria" pitchFamily="34" charset="-122"/>
-                <a:cs typeface="Cambria" pitchFamily="34" charset="-120"/>
+                  <a:srgbClr val="1D4F91"/>
+                </a:solidFill>
+                <a:latin typeface="BIZ UDPGothic" pitchFamily="34" charset="0"/>
+                <a:ea typeface="BIZ UDPGothic" pitchFamily="34" charset="-122"/>
+                <a:cs typeface="BIZ UDPGothic" pitchFamily="34" charset="-120"/>
               </a:rPr>
               <a:t>20%</a:t>
             </a:r>
@@ -13946,11 +13946,11 @@
             <a:r>
               <a:rPr lang="en-US" sz="1200" b="1" dirty="0">
                 <a:solidFill>
-                  <a:srgbClr val="4090D0"/>
-                </a:solidFill>
-                <a:latin typeface="Cambria" pitchFamily="34" charset="0"/>
-                <a:ea typeface="Cambria" pitchFamily="34" charset="-122"/>
-                <a:cs typeface="Cambria" pitchFamily="34" charset="-120"/>
+                  <a:srgbClr val="1D4F91"/>
+                </a:solidFill>
+                <a:latin typeface="BIZ UDPGothic" pitchFamily="34" charset="0"/>
+                <a:ea typeface="BIZ UDPGothic" pitchFamily="34" charset="-122"/>
+                <a:cs typeface="BIZ UDPGothic" pitchFamily="34" charset="-120"/>
               </a:rPr>
               <a:t>インフラ・企業誘致</a:t>
             </a:r>
@@ -13963,11 +13963,11 @@
             <a:r>
               <a:rPr lang="en-US" sz="1200" b="1" dirty="0">
                 <a:solidFill>
-                  <a:srgbClr val="4090D0"/>
-                </a:solidFill>
-                <a:latin typeface="Cambria" pitchFamily="34" charset="0"/>
-                <a:ea typeface="Cambria" pitchFamily="34" charset="-122"/>
-                <a:cs typeface="Cambria" pitchFamily="34" charset="-120"/>
+                  <a:srgbClr val="1D4F91"/>
+                </a:solidFill>
+                <a:latin typeface="BIZ UDPGothic" pitchFamily="34" charset="0"/>
+                <a:ea typeface="BIZ UDPGothic" pitchFamily="34" charset="-122"/>
+                <a:cs typeface="BIZ UDPGothic" pitchFamily="34" charset="-120"/>
               </a:rPr>
               <a:t>専用予算</a:t>
             </a:r>
@@ -14002,11 +14002,11 @@
             <a:r>
               <a:rPr lang="en-US" sz="1000" dirty="0">
                 <a:solidFill>
-                  <a:srgbClr val="CCCCCC"/>
+                  <a:srgbClr val="2B2F36"/>
                 </a:solidFill>
                 <a:latin typeface="Arial" pitchFamily="34" charset="0"/>
-                <a:ea typeface="Arial" pitchFamily="34" charset="-122"/>
-                <a:cs typeface="Arial" pitchFamily="34" charset="-120"/>
+                <a:ea typeface="BIZ UDPGothic" pitchFamily="34" charset="-122"/>
+                <a:cs typeface="BIZ UDPGothic" pitchFamily="34" charset="-120"/>
               </a:rPr>
               <a:t>住民投票で使途を確定（四半期ごと）</a:t>
             </a:r>
@@ -14019,11 +14019,11 @@
             <a:r>
               <a:rPr lang="en-US" sz="1000" dirty="0">
                 <a:solidFill>
-                  <a:srgbClr val="CCCCCC"/>
+                  <a:srgbClr val="2B2F36"/>
                 </a:solidFill>
                 <a:latin typeface="Arial" pitchFamily="34" charset="0"/>
-                <a:ea typeface="Arial" pitchFamily="34" charset="-122"/>
-                <a:cs typeface="Arial" pitchFamily="34" charset="-120"/>
+                <a:ea typeface="BIZ UDPGothic" pitchFamily="34" charset="-122"/>
+                <a:cs typeface="BIZ UDPGothic" pitchFamily="34" charset="-120"/>
               </a:rPr>
               <a:t>学校運営が権限を持ち執行</a:t>
             </a:r>
@@ -14036,11 +14036,11 @@
             <a:r>
               <a:rPr lang="en-US" sz="1000" dirty="0">
                 <a:solidFill>
-                  <a:srgbClr val="CCCCCC"/>
+                  <a:srgbClr val="2B2F36"/>
                 </a:solidFill>
                 <a:latin typeface="Arial" pitchFamily="34" charset="0"/>
-                <a:ea typeface="Arial" pitchFamily="34" charset="-122"/>
-                <a:cs typeface="Arial" pitchFamily="34" charset="-120"/>
+                <a:ea typeface="BIZ UDPGothic" pitchFamily="34" charset="-122"/>
+                <a:cs typeface="BIZ UDPGothic" pitchFamily="34" charset="-120"/>
               </a:rPr>
               <a:t>専用口座で分離・未執行分は学校枠へ返還</a:t>
             </a:r>
@@ -14065,11 +14065,11 @@
             </a:avLst>
           </a:prstGeom>
           <a:solidFill>
-            <a:srgbClr val="081808"/>
+            <a:srgbClr val="E9EFF8"/>
           </a:solidFill>
           <a:ln w="12700">
             <a:solidFill>
-              <a:srgbClr val="2E2E2E"/>
+              <a:srgbClr val="DDE0E6"/>
             </a:solidFill>
             <a:prstDash val="solid"/>
           </a:ln>
@@ -14102,11 +14102,11 @@
             <a:r>
               <a:rPr lang="en-US" sz="2200" b="1" dirty="0">
                 <a:solidFill>
-                  <a:srgbClr val="4CAF50"/>
-                </a:solidFill>
-                <a:latin typeface="Cambria" pitchFamily="34" charset="0"/>
-                <a:ea typeface="Cambria" pitchFamily="34" charset="-122"/>
-                <a:cs typeface="Cambria" pitchFamily="34" charset="-120"/>
+                  <a:srgbClr val="1D4F91"/>
+                </a:solidFill>
+                <a:latin typeface="BIZ UDPGothic" pitchFamily="34" charset="0"/>
+                <a:ea typeface="BIZ UDPGothic" pitchFamily="34" charset="-122"/>
+                <a:cs typeface="BIZ UDPGothic" pitchFamily="34" charset="-120"/>
               </a:rPr>
               <a:t>80%</a:t>
             </a:r>
@@ -14141,11 +14141,11 @@
             <a:r>
               <a:rPr lang="en-US" sz="1200" b="1" dirty="0">
                 <a:solidFill>
-                  <a:srgbClr val="4CAF50"/>
-                </a:solidFill>
-                <a:latin typeface="Cambria" pitchFamily="34" charset="0"/>
-                <a:ea typeface="Cambria" pitchFamily="34" charset="-122"/>
-                <a:cs typeface="Cambria" pitchFamily="34" charset="-120"/>
+                  <a:srgbClr val="1D4F91"/>
+                </a:solidFill>
+                <a:latin typeface="BIZ UDPGothic" pitchFamily="34" charset="0"/>
+                <a:ea typeface="BIZ UDPGothic" pitchFamily="34" charset="-122"/>
+                <a:cs typeface="BIZ UDPGothic" pitchFamily="34" charset="-120"/>
               </a:rPr>
               <a:t>公立高校への</a:t>
             </a:r>
@@ -14158,11 +14158,11 @@
             <a:r>
               <a:rPr lang="en-US" sz="1200" b="1" dirty="0">
                 <a:solidFill>
-                  <a:srgbClr val="4CAF50"/>
-                </a:solidFill>
-                <a:latin typeface="Cambria" pitchFamily="34" charset="0"/>
-                <a:ea typeface="Cambria" pitchFamily="34" charset="-122"/>
-                <a:cs typeface="Cambria" pitchFamily="34" charset="-120"/>
+                  <a:srgbClr val="1D4F91"/>
+                </a:solidFill>
+                <a:latin typeface="BIZ UDPGothic" pitchFamily="34" charset="0"/>
+                <a:ea typeface="BIZ UDPGothic" pitchFamily="34" charset="-122"/>
+                <a:cs typeface="BIZ UDPGothic" pitchFamily="34" charset="-120"/>
               </a:rPr>
               <a:t>傾斜配分</a:t>
             </a:r>
@@ -14197,11 +14197,11 @@
             <a:r>
               <a:rPr lang="en-US" sz="1000" dirty="0">
                 <a:solidFill>
-                  <a:srgbClr val="CCCCCC"/>
+                  <a:srgbClr val="2B2F36"/>
                 </a:solidFill>
                 <a:latin typeface="Arial" pitchFamily="34" charset="0"/>
-                <a:ea typeface="Arial" pitchFamily="34" charset="-122"/>
-                <a:cs typeface="Arial" pitchFamily="34" charset="-120"/>
+                <a:ea typeface="BIZ UDPGothic" pitchFamily="34" charset="-122"/>
+                <a:cs typeface="BIZ UDPGothic" pitchFamily="34" charset="-120"/>
               </a:rPr>
               <a:t>過疎地に厚く・都市部に薄く</a:t>
             </a:r>
@@ -14214,11 +14214,11 @@
             <a:r>
               <a:rPr lang="en-US" sz="1000" dirty="0">
                 <a:solidFill>
-                  <a:srgbClr val="CCCCCC"/>
+                  <a:srgbClr val="2B2F36"/>
                 </a:solidFill>
                 <a:latin typeface="Arial" pitchFamily="34" charset="0"/>
-                <a:ea typeface="Arial" pitchFamily="34" charset="-122"/>
-                <a:cs typeface="Arial" pitchFamily="34" charset="-120"/>
+                <a:ea typeface="BIZ UDPGothic" pitchFamily="34" charset="-122"/>
+                <a:cs typeface="BIZ UDPGothic" pitchFamily="34" charset="-120"/>
               </a:rPr>
               <a:t>学校運営が権限を持ち自律的に執行</a:t>
             </a:r>
@@ -14231,11 +14231,11 @@
             <a:r>
               <a:rPr lang="en-US" sz="1000" dirty="0">
                 <a:solidFill>
-                  <a:srgbClr val="CCCCCC"/>
+                  <a:srgbClr val="2B2F36"/>
                 </a:solidFill>
                 <a:latin typeface="Arial" pitchFamily="34" charset="0"/>
-                <a:ea typeface="Arial" pitchFamily="34" charset="-122"/>
-                <a:cs typeface="Arial" pitchFamily="34" charset="-120"/>
+                <a:ea typeface="BIZ UDPGothic" pitchFamily="34" charset="-122"/>
+                <a:cs typeface="BIZ UDPGothic" pitchFamily="34" charset="-120"/>
               </a:rPr>
               <a:t>都道府県は使途に介入しない</a:t>
             </a:r>
